--- a/Arquitectura de Sistemas Computacionales/Clases/Clase 8 - Monitoreo optimizacion y CI-CD/Presentacion.pptx
+++ b/Arquitectura de Sistemas Computacionales/Clases/Clase 8 - Monitoreo optimizacion y CI-CD/Presentacion.pptx
@@ -3377,7 +3377,7 @@
                 </a:solidFill>
                 <a:latin typeface="Calibri"/>
               </a:rPr>
-              <a:t> · Teoría breve · Taller PI · Quiz/cierre.</a:t>
+              <a:t> · Teoría breve · Taller PI · cierre.</a:t>
             </a:r>
           </a:p>
           <a:p>
@@ -4542,7 +4542,7 @@
                 </a:solidFill>
                 <a:latin typeface="Calibri"/>
               </a:rPr>
-              <a:t> Quiz corto / revisión de evidencias.</a:t>
+              <a:t> Revisión de evidencias del PI.</a:t>
             </a:r>
           </a:p>
           <a:p>

--- a/Arquitectura de Sistemas Computacionales/Clases/Clase 8 - Monitoreo optimizacion y CI-CD/Presentacion.pptx
+++ b/Arquitectura de Sistemas Computacionales/Clases/Clase 8 - Monitoreo optimizacion y CI-CD/Presentacion.pptx
@@ -3850,7 +3850,7 @@
                 </a:solidFill>
                 <a:latin typeface="Calibri"/>
               </a:rPr>
-              <a:t>Subir evidencias al paquete CloudLite (Drive/repo) y a ExamLab domingo 23:59.</a:t>
+              <a:t>Subir evidencias al paquete CloudLite (Drive/repo) y a ExamLab (https://examlab.lovable.app/) domingo 23:59.</a:t>
             </a:r>
           </a:p>
         </p:txBody>
@@ -5402,7 +5402,7 @@
                 </a:solidFill>
                 <a:latin typeface="Calibri"/>
               </a:rPr>
-              <a:t>–   📸 [CAP: actions-yml] Workflow del stub CloudLite.</a:t>
+              <a:t>–   Workflow del stub CloudLite.</a:t>
             </a:r>
           </a:p>
         </p:txBody>
@@ -5442,6 +5442,30 @@
           </a:p>
         </p:txBody>
       </p:sp>
+      <p:pic>
+        <p:nvPicPr>
+          <p:cNvPr id="7" name="Picture 6" descr="salida-actions-run.png"/>
+          <p:cNvPicPr>
+            <a:picLocks noChangeAspect="1"/>
+          </p:cNvPicPr>
+          <p:nvPr/>
+        </p:nvPicPr>
+        <p:blipFill>
+          <a:blip r:embed="rId2"/>
+          <a:stretch>
+            <a:fillRect/>
+          </a:stretch>
+        </p:blipFill>
+        <p:spPr>
+          <a:xfrm>
+            <a:off x="8625535" y="5279938"/>
+            <a:ext cx="3108960" cy="1120861"/>
+          </a:xfrm>
+          <a:prstGeom prst="rect">
+            <a:avLst/>
+          </a:prstGeom>
+        </p:spPr>
+      </p:pic>
     </p:spTree>
   </p:cSld>
   <p:clrMapOvr>

--- a/Arquitectura de Sistemas Computacionales/Clases/Clase 8 - Monitoreo optimizacion y CI-CD/Presentacion.pptx
+++ b/Arquitectura de Sistemas Computacionales/Clases/Clase 8 - Monitoreo optimizacion y CI-CD/Presentacion.pptx
@@ -6710,7 +6710,7 @@
                 </a:solidFill>
                 <a:latin typeface="Calibri"/>
               </a:rPr>
-              <a:t> Creen repo free (o usen el del equipo) con stub mínimo.</a:t>
+              <a:t> Paso 1: creen o reutilicen el repositorio gratuito del equipo con el stub de la Clase 3 y al menos 3 pruebas automatizadas que verifiquen la ruta de salud, un caso valido y un caso de error de negocio, verificando con una ejecucion local o en el lab que las 3 pruebas pasan antes de tocar el pipeline; el enlace del repositorio queda en la portada del informe.</a:t>
             </a:r>
           </a:p>
           <a:p>
@@ -6744,7 +6744,7 @@
                 </a:solidFill>
                 <a:latin typeface="Calibri"/>
               </a:rPr>
-              <a:t> Agreguen `.github/workflows/ci.yml` (build/test + deploy simulado).</a:t>
+              <a:t> Paso 2: agreguen el archivo .github/workflows/ci.yml con 4 jobs encadenados (build, test, package y deploy simulado), disparadores en push y pull_request sobre la rama principal, y publicacion de artefacto, verificando que ningun paso imprima secretos y que el job de deploy diga explicitamente en su log que es un despliegue simulado.</a:t>
             </a:r>
           </a:p>
           <a:p>
@@ -6778,7 +6778,7 @@
                 </a:solidFill>
                 <a:latin typeface="Calibri"/>
               </a:rPr>
-              <a:t> Listen 4–6 métricas/logs a observar en producción hipotética.</a:t>
+              <a:t> Paso 3: ejecuten el workflow con un push real, esperen el run completo y capturen el enlace del run verde mas el nombre del artefacto descargable, verificando que los 4 jobs aparezcan en verde y que el artefacto pese mas de 0 bytes; si Actions falla por cuota, dejen registrado el mensaje textual del error y la explicacion, que es el plan B aceptado.</a:t>
             </a:r>
           </a:p>
           <a:p>
@@ -6812,7 +6812,7 @@
                 </a:solidFill>
                 <a:latin typeface="Calibri"/>
               </a:rPr>
-              <a:t> Peguen captura del run verde (o YAML + explicación si Actions falla por cuota).</a:t>
+              <a:t> Paso 4: escriban en ExamLab el diagrama Mermaid del pipeline con los 4 jobs dentro de un subgrafo, la compuerta de decision y las dos salidas (despliegue simulado y bloqueo del pull request), verificando al renderizar que los nombres de los jobs sean exactamente los del ci.yml.</a:t>
             </a:r>
           </a:p>
           <a:p>
@@ -6846,7 +6846,7 @@
                 </a:solidFill>
                 <a:latin typeface="Calibri"/>
               </a:rPr>
-              <a:t> Actualicen informe secciones CI/CD y Monitoreo.</a:t>
+              <a:t> Paso 5: completen la tabla de 5 senales de monitoreo con umbral y accion, actualicen las secciones CI/CD y Monitoreo del informe y suban las 5 preguntas a ExamLab (modulo Talleres) antes del domingo 23:59, verificando que el enlace del run verde abra sin pedir permisos y que cada senal se pueda medir en el diseno que ya dibujaron.</a:t>
             </a:r>
           </a:p>
         </p:txBody>

--- a/Arquitectura de Sistemas Computacionales/Clases/Clase 8 - Monitoreo optimizacion y CI-CD/Presentacion.pptx
+++ b/Arquitectura de Sistemas Computacionales/Clases/Clase 8 - Monitoreo optimizacion y CI-CD/Presentacion.pptx
@@ -4517,7 +4517,7 @@
                 </a:solidFill>
                 <a:latin typeface="Calibri"/>
               </a:rPr>
-              <a:t> Taller guiado PI (demo en vivo + trabajo de equipo).</a:t>
+              <a:t> Taller guiado PI (demo en vivo + avance individual).</a:t>
             </a:r>
           </a:p>
           <a:p>
@@ -5132,7 +5132,7 @@
                 </a:solidFill>
                 <a:latin typeface="Calibri"/>
               </a:rPr>
-              <a:t>–   Equipos 2–3 · todos deben poder explicar el artefacto.</a:t>
+              <a:t>–   Individual por defecto · el docente puede autorizar equipos de 2–3; la entrega en ExamLab siempre es individual.</a:t>
             </a:r>
           </a:p>
         </p:txBody>
@@ -6710,7 +6710,7 @@
                 </a:solidFill>
                 <a:latin typeface="Calibri"/>
               </a:rPr>
-              <a:t> Paso 1: creen o reutilicen el repositorio gratuito del equipo con el stub de la Clase 3 y al menos 3 pruebas automatizadas que verifiquen la ruta de salud, un caso valido y un caso de error de negocio, verificando con una ejecucion local o en el lab que las 3 pruebas pasan antes de tocar el pipeline; el enlace del repositorio queda en la portada del informe.</a:t>
+              <a:t> Paso 1: cree o reutilice su repositorio gratuito del proyecto con el stub de la Clase 3 y al menos 3 pruebas automatizadas que verifiquen la ruta de salud, un caso valido y un caso de error de negocio, verificando con una ejecucion local o en el lab que las 3 pruebas pasan antes de tocar el pipeline; el enlace del repositorio queda en la portada del informe.</a:t>
             </a:r>
           </a:p>
           <a:p>

--- a/Arquitectura de Sistemas Computacionales/Clases/Clase 8 - Monitoreo optimizacion y CI-CD/Presentacion.pptx
+++ b/Arquitectura de Sistemas Computacionales/Clases/Clase 8 - Monitoreo optimizacion y CI-CD/Presentacion.pptx
@@ -3850,7 +3850,7 @@
                 </a:solidFill>
                 <a:latin typeface="Calibri"/>
               </a:rPr>
-              <a:t>Subir evidencias al paquete CloudLite (Drive/repo) y a ExamLab (https://examlab.lovable.app/) domingo 23:59.</a:t>
+              <a:t>Subir evidencias al paquete CloudLite (Drive/repo) y a ExamLab (https://uniaj.examlab.workers.dev/) domingo 23:59.</a:t>
             </a:r>
           </a:p>
         </p:txBody>

--- a/Arquitectura de Sistemas Computacionales/Clases/Clase 8 - Monitoreo optimizacion y CI-CD/Presentacion.pptx
+++ b/Arquitectura de Sistemas Computacionales/Clases/Clase 8 - Monitoreo optimizacion y CI-CD/Presentacion.pptx
@@ -16,6 +16,8 @@
     <p:sldId id="264" r:id="rId15"/>
     <p:sldId id="265" r:id="rId16"/>
     <p:sldId id="266" r:id="rId17"/>
+    <p:sldId id="267" r:id="rId18"/>
+    <p:sldId id="268" r:id="rId19"/>
   </p:sldIdLst>
   <p:sldSz cx="12191695" cy="6858000" type="screen4x3"/>
   <p:notesSz cx="6858000" cy="9144000"/>
@@ -3468,7 +3470,7 @@
         <p:spPr>
           <a:xfrm>
             <a:off x="0" y="0"/>
-            <a:ext cx="12191695" cy="960120"/>
+            <a:ext cx="12191695" cy="1170432"/>
           </a:xfrm>
           <a:prstGeom prst="rect">
             <a:avLst/>
@@ -3510,7 +3512,7 @@
         </p:nvSpPr>
         <p:spPr>
           <a:xfrm>
-            <a:off x="0" y="960120"/>
+            <a:off x="0" y="1170432"/>
             <a:ext cx="12191695" cy="41148"/>
           </a:xfrm>
           <a:prstGeom prst="rect">
@@ -3554,7 +3556,7 @@
         <p:spPr>
           <a:xfrm>
             <a:off x="457200" y="164592"/>
-            <a:ext cx="11277295" cy="502920"/>
+            <a:ext cx="11277295" cy="384048"/>
           </a:xfrm>
           <a:prstGeom prst="rect">
             <a:avLst/>
@@ -3574,20 +3576,225 @@
                 </a:solidFill>
                 <a:latin typeface="Calibri"/>
               </a:rPr>
-              <a:t>Para continuar (PI)</a:t>
-            </a:r>
-          </a:p>
-        </p:txBody>
-      </p:sp>
-      <p:sp>
-        <p:nvSpPr>
-          <p:cNvPr id="5" name="Rounded Rectangle 4"/>
+              <a:t>Del boceto a ExamLab (diagrama)</a:t>
+            </a:r>
+          </a:p>
+        </p:txBody>
+      </p:sp>
+      <p:sp>
+        <p:nvSpPr>
+          <p:cNvPr id="5" name="TextBox 4"/>
+          <p:cNvSpPr txBox="1"/>
+          <p:nvPr/>
+        </p:nvSpPr>
+        <p:spPr>
+          <a:xfrm>
+            <a:off x="457200" y="566928"/>
+            <a:ext cx="11277295" cy="411480"/>
+          </a:xfrm>
+          <a:prstGeom prst="rect">
+            <a:avLst/>
+          </a:prstGeom>
+          <a:noFill/>
+        </p:spPr>
+        <p:txBody>
+          <a:bodyPr wrap="square">
+            <a:spAutoFit/>
+          </a:bodyPr>
+          <a:lstStyle/>
+          <a:p>
+            <a:r>
+              <a:rPr sz="1400" b="0" i="0">
+                <a:solidFill>
+                  <a:srgbClr val="B8D8EE"/>
+                </a:solidFill>
+                <a:latin typeface="Calibri"/>
+              </a:rPr>
+              <a:t>El diagrama se entrega como código Mermaid dentro de ExamLab, no como imagen</a:t>
+            </a:r>
+          </a:p>
+        </p:txBody>
+      </p:sp>
+      <p:sp>
+        <p:nvSpPr>
+          <p:cNvPr id="6" name="Rounded Rectangle 5"/>
           <p:cNvSpPr/>
           <p:nvPr/>
         </p:nvSpPr>
         <p:spPr>
           <a:xfrm>
-            <a:off x="457200" y="1261872"/>
+            <a:off x="457200" y="1659636"/>
+            <a:ext cx="11277295" cy="1051560"/>
+          </a:xfrm>
+          <a:prstGeom prst="roundRect">
+            <a:avLst>
+              <a:gd name="adj" fmla="val 12000"/>
+            </a:avLst>
+          </a:prstGeom>
+          <a:solidFill>
+            <a:srgbClr val="F2F2F2"/>
+          </a:solidFill>
+          <a:ln>
+            <a:noFill/>
+          </a:ln>
+        </p:spPr>
+        <p:style>
+          <a:lnRef idx="1">
+            <a:schemeClr val="accent1"/>
+          </a:lnRef>
+          <a:fillRef idx="3">
+            <a:schemeClr val="accent1"/>
+          </a:fillRef>
+          <a:effectRef idx="2">
+            <a:schemeClr val="accent1"/>
+          </a:effectRef>
+          <a:fontRef idx="minor">
+            <a:schemeClr val="lt1"/>
+          </a:fontRef>
+        </p:style>
+        <p:txBody>
+          <a:bodyPr rtlCol="0" anchor="ctr"/>
+          <a:lstStyle/>
+          <a:p>
+            <a:pPr algn="ctr"/>
+          </a:p>
+        </p:txBody>
+      </p:sp>
+      <p:sp>
+        <p:nvSpPr>
+          <p:cNvPr id="7" name="Rounded Rectangle 6"/>
+          <p:cNvSpPr/>
+          <p:nvPr/>
+        </p:nvSpPr>
+        <p:spPr>
+          <a:xfrm>
+            <a:off x="594360" y="1965960"/>
+            <a:ext cx="438912" cy="438912"/>
+          </a:xfrm>
+          <a:prstGeom prst="roundRect">
+            <a:avLst>
+              <a:gd name="adj" fmla="val 12000"/>
+            </a:avLst>
+          </a:prstGeom>
+          <a:solidFill>
+            <a:srgbClr val="095292"/>
+          </a:solidFill>
+          <a:ln>
+            <a:noFill/>
+          </a:ln>
+        </p:spPr>
+        <p:style>
+          <a:lnRef idx="1">
+            <a:schemeClr val="accent1"/>
+          </a:lnRef>
+          <a:fillRef idx="3">
+            <a:schemeClr val="accent1"/>
+          </a:fillRef>
+          <a:effectRef idx="2">
+            <a:schemeClr val="accent1"/>
+          </a:effectRef>
+          <a:fontRef idx="minor">
+            <a:schemeClr val="lt1"/>
+          </a:fontRef>
+        </p:style>
+        <p:txBody>
+          <a:bodyPr rtlCol="0" anchor="ctr"/>
+          <a:lstStyle/>
+          <a:p>
+            <a:pPr algn="ctr"/>
+          </a:p>
+        </p:txBody>
+      </p:sp>
+      <p:sp>
+        <p:nvSpPr>
+          <p:cNvPr id="8" name="TextBox 7"/>
+          <p:cNvSpPr txBox="1"/>
+          <p:nvPr/>
+        </p:nvSpPr>
+        <p:spPr>
+          <a:xfrm>
+            <a:off x="594360" y="1965960"/>
+            <a:ext cx="438912" cy="438912"/>
+          </a:xfrm>
+          <a:prstGeom prst="rect">
+            <a:avLst/>
+          </a:prstGeom>
+          <a:noFill/>
+        </p:spPr>
+        <p:txBody>
+          <a:bodyPr wrap="square" anchor="ctr"/>
+          <a:lstStyle/>
+          <a:p>
+            <a:pPr algn="ctr"/>
+            <a:r>
+              <a:rPr sz="1600" b="1" i="0">
+                <a:solidFill>
+                  <a:srgbClr val="FFFFFF"/>
+                </a:solidFill>
+                <a:latin typeface="Calibri"/>
+              </a:rPr>
+              <a:t>1</a:t>
+            </a:r>
+          </a:p>
+        </p:txBody>
+      </p:sp>
+      <p:sp>
+        <p:nvSpPr>
+          <p:cNvPr id="9" name="TextBox 8"/>
+          <p:cNvSpPr txBox="1"/>
+          <p:nvPr/>
+        </p:nvSpPr>
+        <p:spPr>
+          <a:xfrm>
+            <a:off x="1188720" y="1751076"/>
+            <a:ext cx="10271455" cy="886968"/>
+          </a:xfrm>
+          <a:prstGeom prst="rect">
+            <a:avLst/>
+          </a:prstGeom>
+          <a:noFill/>
+        </p:spPr>
+        <p:txBody>
+          <a:bodyPr wrap="square" anchor="ctr"/>
+          <a:lstStyle/>
+          <a:p>
+            <a:r>
+              <a:rPr sz="1500" b="1" i="0">
+                <a:solidFill>
+                  <a:srgbClr val="095292"/>
+                </a:solidFill>
+                <a:latin typeface="Calibri"/>
+              </a:rPr>
+              <a:t>Disena visual</a:t>
+            </a:r>
+          </a:p>
+          <a:p>
+            <a:pPr>
+              <a:spcBef>
+                <a:spcPts val="200"/>
+              </a:spcBef>
+            </a:pPr>
+            <a:r>
+              <a:rPr sz="1300" b="0" i="0">
+                <a:solidFill>
+                  <a:srgbClr val="333333"/>
+                </a:solidFill>
+                <a:latin typeface="Calibri"/>
+              </a:rPr>
+              <a:t>Dibuja el diagrama como quieras en Excalidraw o draw.io: es mas rapido arrastrar cajas que escribir codigo, y ahi es donde piensas el modelo.</a:t>
+            </a:r>
+          </a:p>
+        </p:txBody>
+      </p:sp>
+      <p:sp>
+        <p:nvSpPr>
+          <p:cNvPr id="10" name="Rounded Rectangle 9"/>
+          <p:cNvSpPr/>
+          <p:nvPr/>
+        </p:nvSpPr>
+        <p:spPr>
+          <a:xfrm>
+            <a:off x="457200" y="2802636"/>
             <a:ext cx="11277295" cy="1051560"/>
           </a:xfrm>
           <a:prstGeom prst="roundRect">
@@ -3626,20 +3833,22 @@
       </p:sp>
       <p:sp>
         <p:nvSpPr>
-          <p:cNvPr id="6" name="Rectangle 5"/>
+          <p:cNvPr id="11" name="Rounded Rectangle 10"/>
           <p:cNvSpPr/>
           <p:nvPr/>
         </p:nvSpPr>
         <p:spPr>
           <a:xfrm>
-            <a:off x="457200" y="1261872"/>
-            <a:ext cx="128016" cy="1051560"/>
-          </a:xfrm>
-          <a:prstGeom prst="rect">
-            <a:avLst/>
+            <a:off x="594360" y="3108960"/>
+            <a:ext cx="438912" cy="438912"/>
+          </a:xfrm>
+          <a:prstGeom prst="roundRect">
+            <a:avLst>
+              <a:gd name="adj" fmla="val 12000"/>
+            </a:avLst>
           </a:prstGeom>
           <a:solidFill>
-            <a:srgbClr val="269CCB"/>
+            <a:srgbClr val="095292"/>
           </a:solidFill>
           <a:ln>
             <a:noFill/>
@@ -3669,14 +3878,14 @@
       </p:sp>
       <p:sp>
         <p:nvSpPr>
-          <p:cNvPr id="7" name="TextBox 6"/>
+          <p:cNvPr id="12" name="TextBox 11"/>
           <p:cNvSpPr txBox="1"/>
           <p:nvPr/>
         </p:nvSpPr>
         <p:spPr>
           <a:xfrm>
-            <a:off x="777240" y="1399031"/>
-            <a:ext cx="10774375" cy="822959"/>
+            <a:off x="594360" y="3108960"/>
+            <a:ext cx="438912" cy="438912"/>
           </a:xfrm>
           <a:prstGeom prst="rect">
             <a:avLst/>
@@ -3684,48 +3893,79 @@
           <a:noFill/>
         </p:spPr>
         <p:txBody>
-          <a:bodyPr wrap="square">
-            <a:spAutoFit/>
-          </a:bodyPr>
-          <a:lstStyle/>
-          <a:p>
-            <a:r>
-              <a:rPr sz="1200" b="1" i="0">
-                <a:solidFill>
-                  <a:srgbClr val="269CCB"/>
-                </a:solidFill>
-                <a:latin typeface="Calibri"/>
-              </a:rPr>
-              <a:t>Info</a:t>
+          <a:bodyPr wrap="square" anchor="ctr"/>
+          <a:lstStyle/>
+          <a:p>
+            <a:pPr algn="ctr"/>
+            <a:r>
+              <a:rPr sz="1600" b="1" i="0">
+                <a:solidFill>
+                  <a:srgbClr val="FFFFFF"/>
+                </a:solidFill>
+                <a:latin typeface="Calibri"/>
+              </a:rPr>
+              <a:t>2</a:t>
+            </a:r>
+          </a:p>
+        </p:txBody>
+      </p:sp>
+      <p:sp>
+        <p:nvSpPr>
+          <p:cNvPr id="13" name="TextBox 12"/>
+          <p:cNvSpPr txBox="1"/>
+          <p:nvPr/>
+        </p:nvSpPr>
+        <p:spPr>
+          <a:xfrm>
+            <a:off x="1188720" y="2894076"/>
+            <a:ext cx="10271455" cy="886968"/>
+          </a:xfrm>
+          <a:prstGeom prst="rect">
+            <a:avLst/>
+          </a:prstGeom>
+          <a:noFill/>
+        </p:spPr>
+        <p:txBody>
+          <a:bodyPr wrap="square" anchor="ctr"/>
+          <a:lstStyle/>
+          <a:p>
+            <a:r>
+              <a:rPr sz="1500" b="1" i="0">
+                <a:solidFill>
+                  <a:srgbClr val="095292"/>
+                </a:solidFill>
+                <a:latin typeface="Calibri"/>
+              </a:rPr>
+              <a:t>Traduce con IA</a:t>
             </a:r>
           </a:p>
           <a:p>
             <a:pPr>
               <a:spcBef>
-                <a:spcPts val="400"/>
+                <a:spcPts val="200"/>
               </a:spcBef>
             </a:pPr>
             <a:r>
-              <a:rPr sz="1400" b="0" i="0">
+              <a:rPr sz="1300" b="0" i="0">
                 <a:solidFill>
                   <a:srgbClr val="333333"/>
                 </a:solidFill>
                 <a:latin typeface="Calibri"/>
               </a:rPr>
-              <a:t>Entregable: .github/workflows/ci.yml + sección Monitoreo/CI del informe</a:t>
-            </a:r>
-          </a:p>
-        </p:txBody>
-      </p:sp>
-      <p:sp>
-        <p:nvSpPr>
-          <p:cNvPr id="8" name="Rounded Rectangle 7"/>
+              <a:t>Copia o describe tu boceto a una IA y pidele el codigo Mermaid: «convierte este diagrama a Mermaid usando flowchart». Revisa el resultado: la IA acierta la sintaxis, no tu modelo.</a:t>
+            </a:r>
+          </a:p>
+        </p:txBody>
+      </p:sp>
+      <p:sp>
+        <p:nvSpPr>
+          <p:cNvPr id="14" name="Rounded Rectangle 13"/>
           <p:cNvSpPr/>
           <p:nvPr/>
         </p:nvSpPr>
         <p:spPr>
           <a:xfrm>
-            <a:off x="457200" y="2478024"/>
+            <a:off x="457200" y="3945636"/>
             <a:ext cx="11277295" cy="1051560"/>
           </a:xfrm>
           <a:prstGeom prst="roundRect">
@@ -3734,7 +3974,7 @@
             </a:avLst>
           </a:prstGeom>
           <a:solidFill>
-            <a:srgbClr val="FFF8E1"/>
+            <a:srgbClr val="F2F2F2"/>
           </a:solidFill>
           <a:ln>
             <a:noFill/>
@@ -3764,20 +4004,22 @@
       </p:sp>
       <p:sp>
         <p:nvSpPr>
-          <p:cNvPr id="9" name="Rectangle 8"/>
+          <p:cNvPr id="15" name="Rounded Rectangle 14"/>
           <p:cNvSpPr/>
           <p:nvPr/>
         </p:nvSpPr>
         <p:spPr>
           <a:xfrm>
-            <a:off x="457200" y="2478024"/>
-            <a:ext cx="128016" cy="1051560"/>
-          </a:xfrm>
-          <a:prstGeom prst="rect">
-            <a:avLst/>
+            <a:off x="594360" y="4251960"/>
+            <a:ext cx="438912" cy="438912"/>
+          </a:xfrm>
+          <a:prstGeom prst="roundRect">
+            <a:avLst>
+              <a:gd name="adj" fmla="val 12000"/>
+            </a:avLst>
           </a:prstGeom>
           <a:solidFill>
-            <a:srgbClr val="FFD000"/>
+            <a:srgbClr val="095292"/>
           </a:solidFill>
           <a:ln>
             <a:noFill/>
@@ -3807,14 +4049,14 @@
       </p:sp>
       <p:sp>
         <p:nvSpPr>
-          <p:cNvPr id="10" name="TextBox 9"/>
+          <p:cNvPr id="16" name="TextBox 15"/>
           <p:cNvSpPr txBox="1"/>
           <p:nvPr/>
         </p:nvSpPr>
         <p:spPr>
           <a:xfrm>
-            <a:off x="777240" y="2615184"/>
-            <a:ext cx="10774375" cy="822959"/>
+            <a:off x="594360" y="4251960"/>
+            <a:ext cx="438912" cy="438912"/>
           </a:xfrm>
           <a:prstGeom prst="rect">
             <a:avLst/>
@@ -3822,48 +4064,79 @@
           <a:noFill/>
         </p:spPr>
         <p:txBody>
-          <a:bodyPr wrap="square">
-            <a:spAutoFit/>
-          </a:bodyPr>
-          <a:lstStyle/>
-          <a:p>
-            <a:r>
-              <a:rPr sz="1200" b="1" i="0">
-                <a:solidFill>
-                  <a:srgbClr val="FFD000"/>
-                </a:solidFill>
-                <a:latin typeface="Calibri"/>
-              </a:rPr>
-              <a:t>Aclaración</a:t>
+          <a:bodyPr wrap="square" anchor="ctr"/>
+          <a:lstStyle/>
+          <a:p>
+            <a:pPr algn="ctr"/>
+            <a:r>
+              <a:rPr sz="1600" b="1" i="0">
+                <a:solidFill>
+                  <a:srgbClr val="FFFFFF"/>
+                </a:solidFill>
+                <a:latin typeface="Calibri"/>
+              </a:rPr>
+              <a:t>3</a:t>
+            </a:r>
+          </a:p>
+        </p:txBody>
+      </p:sp>
+      <p:sp>
+        <p:nvSpPr>
+          <p:cNvPr id="17" name="TextBox 16"/>
+          <p:cNvSpPr txBox="1"/>
+          <p:nvPr/>
+        </p:nvSpPr>
+        <p:spPr>
+          <a:xfrm>
+            <a:off x="1188720" y="4037076"/>
+            <a:ext cx="10271455" cy="886968"/>
+          </a:xfrm>
+          <a:prstGeom prst="rect">
+            <a:avLst/>
+          </a:prstGeom>
+          <a:noFill/>
+        </p:spPr>
+        <p:txBody>
+          <a:bodyPr wrap="square" anchor="ctr"/>
+          <a:lstStyle/>
+          <a:p>
+            <a:r>
+              <a:rPr sz="1500" b="1" i="0">
+                <a:solidFill>
+                  <a:srgbClr val="095292"/>
+                </a:solidFill>
+                <a:latin typeface="Calibri"/>
+              </a:rPr>
+              <a:t>Pega y renderiza en ExamLab</a:t>
             </a:r>
           </a:p>
           <a:p>
             <a:pPr>
               <a:spcBef>
-                <a:spcPts val="400"/>
+                <a:spcPts val="200"/>
               </a:spcBef>
             </a:pPr>
             <a:r>
-              <a:rPr sz="1400" b="0" i="0">
+              <a:rPr sz="1300" b="0" i="0">
                 <a:solidFill>
                   <a:srgbClr val="333333"/>
                 </a:solidFill>
                 <a:latin typeface="Calibri"/>
               </a:rPr>
-              <a:t>Subir evidencias al paquete CloudLite (Drive/repo) y a ExamLab (https://uniaj.examlab.workers.dev/) domingo 23:59.</a:t>
-            </a:r>
-          </a:p>
-        </p:txBody>
-      </p:sp>
-      <p:sp>
-        <p:nvSpPr>
-          <p:cNvPr id="11" name="Rounded Rectangle 10"/>
+              <a:t>Pega ese codigo en la caja de texto de la pregunta y mira como lo dibuja la plataforma. Si no renderiza, corrige ahi mismo: lo que se califica es el diagrama renderizado dentro de ExamLab.</a:t>
+            </a:r>
+          </a:p>
+        </p:txBody>
+      </p:sp>
+      <p:sp>
+        <p:nvSpPr>
+          <p:cNvPr id="18" name="Rounded Rectangle 17"/>
           <p:cNvSpPr/>
           <p:nvPr/>
         </p:nvSpPr>
         <p:spPr>
           <a:xfrm>
-            <a:off x="457200" y="3694176"/>
+            <a:off x="457200" y="5088636"/>
             <a:ext cx="11277295" cy="1051560"/>
           </a:xfrm>
           <a:prstGeom prst="roundRect">
@@ -3872,7 +4145,7 @@
             </a:avLst>
           </a:prstGeom>
           <a:solidFill>
-            <a:srgbClr val="FBE4E4"/>
+            <a:srgbClr val="E8F4FA"/>
           </a:solidFill>
           <a:ln>
             <a:noFill/>
@@ -3902,20 +4175,22 @@
       </p:sp>
       <p:sp>
         <p:nvSpPr>
-          <p:cNvPr id="12" name="Rectangle 11"/>
+          <p:cNvPr id="19" name="Rounded Rectangle 18"/>
           <p:cNvSpPr/>
           <p:nvPr/>
         </p:nvSpPr>
         <p:spPr>
           <a:xfrm>
-            <a:off x="457200" y="3694176"/>
-            <a:ext cx="128016" cy="1051560"/>
-          </a:xfrm>
-          <a:prstGeom prst="rect">
-            <a:avLst/>
+            <a:off x="594360" y="5394960"/>
+            <a:ext cx="438912" cy="438912"/>
+          </a:xfrm>
+          <a:prstGeom prst="roundRect">
+            <a:avLst>
+              <a:gd name="adj" fmla="val 12000"/>
+            </a:avLst>
           </a:prstGeom>
           <a:solidFill>
-            <a:srgbClr val="A02030"/>
+            <a:srgbClr val="095292"/>
           </a:solidFill>
           <a:ln>
             <a:noFill/>
@@ -3945,14 +4220,14 @@
       </p:sp>
       <p:sp>
         <p:nvSpPr>
-          <p:cNvPr id="13" name="TextBox 12"/>
+          <p:cNvPr id="20" name="TextBox 19"/>
           <p:cNvSpPr txBox="1"/>
           <p:nvPr/>
         </p:nvSpPr>
         <p:spPr>
           <a:xfrm>
-            <a:off x="777240" y="3831336"/>
-            <a:ext cx="10774375" cy="822959"/>
+            <a:off x="594360" y="5394960"/>
+            <a:ext cx="438912" cy="438912"/>
           </a:xfrm>
           <a:prstGeom prst="rect">
             <a:avLst/>
@@ -3960,42 +4235,73 @@
           <a:noFill/>
         </p:spPr>
         <p:txBody>
-          <a:bodyPr wrap="square">
-            <a:spAutoFit/>
-          </a:bodyPr>
-          <a:lstStyle/>
-          <a:p>
-            <a:r>
-              <a:rPr sz="1200" b="1" i="0">
-                <a:solidFill>
-                  <a:srgbClr val="A02030"/>
-                </a:solidFill>
-                <a:latin typeface="Calibri"/>
-              </a:rPr>
-              <a:t>Atención</a:t>
+          <a:bodyPr wrap="square" anchor="ctr"/>
+          <a:lstStyle/>
+          <a:p>
+            <a:pPr algn="ctr"/>
+            <a:r>
+              <a:rPr sz="1600" b="1" i="0">
+                <a:solidFill>
+                  <a:srgbClr val="FFFFFF"/>
+                </a:solidFill>
+                <a:latin typeface="Calibri"/>
+              </a:rPr>
+              <a:t>4</a:t>
+            </a:r>
+          </a:p>
+        </p:txBody>
+      </p:sp>
+      <p:sp>
+        <p:nvSpPr>
+          <p:cNvPr id="21" name="TextBox 20"/>
+          <p:cNvSpPr txBox="1"/>
+          <p:nvPr/>
+        </p:nvSpPr>
+        <p:spPr>
+          <a:xfrm>
+            <a:off x="1188720" y="5180076"/>
+            <a:ext cx="10271455" cy="886968"/>
+          </a:xfrm>
+          <a:prstGeom prst="rect">
+            <a:avLst/>
+          </a:prstGeom>
+          <a:noFill/>
+        </p:spPr>
+        <p:txBody>
+          <a:bodyPr wrap="square" anchor="ctr"/>
+          <a:lstStyle/>
+          <a:p>
+            <a:r>
+              <a:rPr sz="1500" b="1" i="0">
+                <a:solidFill>
+                  <a:srgbClr val="095292"/>
+                </a:solidFill>
+                <a:latin typeface="Calibri"/>
+              </a:rPr>
+              <a:t>Guarda el PNG para tu PI</a:t>
             </a:r>
           </a:p>
           <a:p>
             <a:pPr>
               <a:spcBef>
-                <a:spcPts val="400"/>
+                <a:spcPts val="200"/>
               </a:spcBef>
             </a:pPr>
             <a:r>
-              <a:rPr sz="1400" b="0" i="0">
+              <a:rPr sz="1300" b="0" i="0">
                 <a:solidFill>
                   <a:srgbClr val="333333"/>
                 </a:solidFill>
                 <a:latin typeface="Calibri"/>
               </a:rPr>
-              <a:t>Sin cloud de pago ni instalaciones obligatorias de hipervisores/Docker Desktop.</a:t>
-            </a:r>
-          </a:p>
-        </p:txBody>
-      </p:sp>
-      <p:sp>
-        <p:nvSpPr>
-          <p:cNvPr id="14" name="TextBox 13"/>
+              <a:t>Exporta tambien la imagen a la carpeta de tu Proyecto Integrador. Esa copia es para tu informe; no reemplaza la respuesta en la plataforma.</a:t>
+            </a:r>
+          </a:p>
+        </p:txBody>
+      </p:sp>
+      <p:sp>
+        <p:nvSpPr>
+          <p:cNvPr id="22" name="TextBox 21"/>
           <p:cNvSpPr txBox="1"/>
           <p:nvPr/>
         </p:nvSpPr>
@@ -4037,6 +4343,966 @@
 </file>
 
 <file path=ppt/slides/slide11.xml><?xml version="1.0" encoding="utf-8"?>
+<p:sld xmlns:a="http://schemas.openxmlformats.org/drawingml/2006/main" xmlns:p="http://schemas.openxmlformats.org/presentationml/2006/main" xmlns:r="http://schemas.openxmlformats.org/officeDocument/2006/relationships">
+  <p:cSld>
+    <p:bg>
+      <p:bgPr>
+        <a:solidFill>
+          <a:srgbClr val="FFFFFF"/>
+        </a:solidFill>
+        <a:effectLst/>
+      </p:bgPr>
+    </p:bg>
+    <p:spTree>
+      <p:nvGrpSpPr>
+        <p:cNvPr id="1" name=""/>
+        <p:cNvGrpSpPr/>
+        <p:nvPr/>
+      </p:nvGrpSpPr>
+      <p:grpSpPr/>
+      <p:sp>
+        <p:nvSpPr>
+          <p:cNvPr id="2" name="Rectangle 1"/>
+          <p:cNvSpPr/>
+          <p:nvPr/>
+        </p:nvSpPr>
+        <p:spPr>
+          <a:xfrm>
+            <a:off x="0" y="0"/>
+            <a:ext cx="12191695" cy="960120"/>
+          </a:xfrm>
+          <a:prstGeom prst="rect">
+            <a:avLst/>
+          </a:prstGeom>
+          <a:solidFill>
+            <a:srgbClr val="095292"/>
+          </a:solidFill>
+          <a:ln>
+            <a:noFill/>
+          </a:ln>
+        </p:spPr>
+        <p:style>
+          <a:lnRef idx="1">
+            <a:schemeClr val="accent1"/>
+          </a:lnRef>
+          <a:fillRef idx="3">
+            <a:schemeClr val="accent1"/>
+          </a:fillRef>
+          <a:effectRef idx="2">
+            <a:schemeClr val="accent1"/>
+          </a:effectRef>
+          <a:fontRef idx="minor">
+            <a:schemeClr val="lt1"/>
+          </a:fontRef>
+        </p:style>
+        <p:txBody>
+          <a:bodyPr rtlCol="0" anchor="ctr"/>
+          <a:lstStyle/>
+          <a:p>
+            <a:pPr algn="ctr"/>
+          </a:p>
+        </p:txBody>
+      </p:sp>
+      <p:sp>
+        <p:nvSpPr>
+          <p:cNvPr id="3" name="Rectangle 2"/>
+          <p:cNvSpPr/>
+          <p:nvPr/>
+        </p:nvSpPr>
+        <p:spPr>
+          <a:xfrm>
+            <a:off x="0" y="960120"/>
+            <a:ext cx="12191695" cy="41148"/>
+          </a:xfrm>
+          <a:prstGeom prst="rect">
+            <a:avLst/>
+          </a:prstGeom>
+          <a:solidFill>
+            <a:srgbClr val="FFD000"/>
+          </a:solidFill>
+          <a:ln>
+            <a:noFill/>
+          </a:ln>
+        </p:spPr>
+        <p:style>
+          <a:lnRef idx="1">
+            <a:schemeClr val="accent1"/>
+          </a:lnRef>
+          <a:fillRef idx="3">
+            <a:schemeClr val="accent1"/>
+          </a:fillRef>
+          <a:effectRef idx="2">
+            <a:schemeClr val="accent1"/>
+          </a:effectRef>
+          <a:fontRef idx="minor">
+            <a:schemeClr val="lt1"/>
+          </a:fontRef>
+        </p:style>
+        <p:txBody>
+          <a:bodyPr rtlCol="0" anchor="ctr"/>
+          <a:lstStyle/>
+          <a:p>
+            <a:pPr algn="ctr"/>
+          </a:p>
+        </p:txBody>
+      </p:sp>
+      <p:sp>
+        <p:nvSpPr>
+          <p:cNvPr id="4" name="TextBox 3"/>
+          <p:cNvSpPr txBox="1"/>
+          <p:nvPr/>
+        </p:nvSpPr>
+        <p:spPr>
+          <a:xfrm>
+            <a:off x="457200" y="164592"/>
+            <a:ext cx="11277295" cy="502920"/>
+          </a:xfrm>
+          <a:prstGeom prst="rect">
+            <a:avLst/>
+          </a:prstGeom>
+          <a:noFill/>
+        </p:spPr>
+        <p:txBody>
+          <a:bodyPr wrap="square">
+            <a:spAutoFit/>
+          </a:bodyPr>
+          <a:lstStyle/>
+          <a:p>
+            <a:r>
+              <a:rPr sz="2600" b="1" i="0">
+                <a:solidFill>
+                  <a:srgbClr val="FFFFFF"/>
+                </a:solidFill>
+                <a:latin typeface="Calibri"/>
+              </a:rPr>
+              <a:t>Taller PI (paso a paso)</a:t>
+            </a:r>
+          </a:p>
+        </p:txBody>
+      </p:sp>
+      <p:sp>
+        <p:nvSpPr>
+          <p:cNvPr id="5" name="TextBox 4"/>
+          <p:cNvSpPr txBox="1"/>
+          <p:nvPr/>
+        </p:nvSpPr>
+        <p:spPr>
+          <a:xfrm>
+            <a:off x="457200" y="1170432"/>
+            <a:ext cx="11277295" cy="5230368"/>
+          </a:xfrm>
+          <a:prstGeom prst="rect">
+            <a:avLst/>
+          </a:prstGeom>
+          <a:noFill/>
+        </p:spPr>
+        <p:txBody>
+          <a:bodyPr wrap="square">
+            <a:spAutoFit/>
+          </a:bodyPr>
+          <a:lstStyle/>
+          <a:p>
+            <a:pPr>
+              <a:spcAft>
+                <a:spcPts val="800"/>
+              </a:spcAft>
+            </a:pPr>
+            <a:r>
+              <a:rPr sz="1600" b="1" i="0">
+                <a:solidFill>
+                  <a:srgbClr val="333333"/>
+                </a:solidFill>
+                <a:latin typeface="Calibri"/>
+              </a:rPr>
+              <a:t>1.</a:t>
+            </a:r>
+            <a:r>
+              <a:rPr sz="1600" b="0" i="0">
+                <a:solidFill>
+                  <a:srgbClr val="333333"/>
+                </a:solidFill>
+                <a:latin typeface="Calibri"/>
+              </a:rPr>
+              <a:t> Paso 1: cree o reutilice su repositorio gratuito del proyecto con el stub de la Clase 3 y al menos 3 pruebas automatizadas que verifiquen la ruta de salud, un caso valido y un caso de error de negocio, verificando con una ejecucion local o en el lab que las 3 pruebas pasan antes de tocar el pipeline; el enlace del repositorio queda en la portada del informe.</a:t>
+            </a:r>
+          </a:p>
+          <a:p>
+            <a:pPr>
+              <a:spcAft>
+                <a:spcPts val="800"/>
+              </a:spcAft>
+            </a:pPr>
+            <a:r>
+              <a:rPr sz="1600" b="0" i="0">
+                <a:solidFill>
+                  <a:srgbClr val="333333"/>
+                </a:solidFill>
+                <a:latin typeface="Calibri"/>
+              </a:rPr>
+              <a:t>–   </a:t>
+            </a:r>
+            <a:r>
+              <a:rPr sz="1600" b="1" i="0">
+                <a:solidFill>
+                  <a:srgbClr val="333333"/>
+                </a:solidFill>
+                <a:latin typeface="Calibri"/>
+              </a:rPr>
+              <a:t>2.</a:t>
+            </a:r>
+            <a:r>
+              <a:rPr sz="1600" b="0" i="0">
+                <a:solidFill>
+                  <a:srgbClr val="333333"/>
+                </a:solidFill>
+                <a:latin typeface="Calibri"/>
+              </a:rPr>
+              <a:t> Paso 2: agreguen el archivo .github/workflows/ci.yml con 4 jobs encadenados (build, test, package y deploy simulado), disparadores en push y pull_request sobre la rama principal, y publicacion de artefacto, verificando que ningun paso imprima secretos y que el job de deploy diga explicitamente en su log que es un despliegue simulado.</a:t>
+            </a:r>
+          </a:p>
+          <a:p>
+            <a:pPr>
+              <a:spcAft>
+                <a:spcPts val="800"/>
+              </a:spcAft>
+            </a:pPr>
+            <a:r>
+              <a:rPr sz="1600" b="0" i="0">
+                <a:solidFill>
+                  <a:srgbClr val="333333"/>
+                </a:solidFill>
+                <a:latin typeface="Calibri"/>
+              </a:rPr>
+              <a:t>–   </a:t>
+            </a:r>
+            <a:r>
+              <a:rPr sz="1600" b="1" i="0">
+                <a:solidFill>
+                  <a:srgbClr val="333333"/>
+                </a:solidFill>
+                <a:latin typeface="Calibri"/>
+              </a:rPr>
+              <a:t>3.</a:t>
+            </a:r>
+            <a:r>
+              <a:rPr sz="1600" b="0" i="0">
+                <a:solidFill>
+                  <a:srgbClr val="333333"/>
+                </a:solidFill>
+                <a:latin typeface="Calibri"/>
+              </a:rPr>
+              <a:t> Paso 3: ejecuten el workflow con un push real, esperen el run completo y capturen el enlace del run verde mas el nombre del artefacto descargable, verificando que los 4 jobs aparezcan en verde y que el artefacto pese mas de 0 bytes; si Actions falla por cuota, dejen registrado el mensaje textual del error y la explicacion, que es el plan B aceptado.</a:t>
+            </a:r>
+          </a:p>
+          <a:p>
+            <a:pPr>
+              <a:spcAft>
+                <a:spcPts val="800"/>
+              </a:spcAft>
+            </a:pPr>
+            <a:r>
+              <a:rPr sz="1600" b="0" i="0">
+                <a:solidFill>
+                  <a:srgbClr val="333333"/>
+                </a:solidFill>
+                <a:latin typeface="Calibri"/>
+              </a:rPr>
+              <a:t>–   </a:t>
+            </a:r>
+            <a:r>
+              <a:rPr sz="1600" b="1" i="0">
+                <a:solidFill>
+                  <a:srgbClr val="333333"/>
+                </a:solidFill>
+                <a:latin typeface="Calibri"/>
+              </a:rPr>
+              <a:t>4.</a:t>
+            </a:r>
+            <a:r>
+              <a:rPr sz="1600" b="0" i="0">
+                <a:solidFill>
+                  <a:srgbClr val="333333"/>
+                </a:solidFill>
+                <a:latin typeface="Calibri"/>
+              </a:rPr>
+              <a:t> Paso 4: escriban en ExamLab el diagrama Mermaid del pipeline con los 4 jobs dentro de un subgrafo, la compuerta de decision y las dos salidas (despliegue simulado y bloqueo del pull request), verificando al renderizar que los nombres de los jobs sean exactamente los del ci.yml.</a:t>
+            </a:r>
+          </a:p>
+          <a:p>
+            <a:pPr>
+              <a:spcAft>
+                <a:spcPts val="800"/>
+              </a:spcAft>
+            </a:pPr>
+            <a:r>
+              <a:rPr sz="1600" b="0" i="0">
+                <a:solidFill>
+                  <a:srgbClr val="333333"/>
+                </a:solidFill>
+                <a:latin typeface="Calibri"/>
+              </a:rPr>
+              <a:t>–   </a:t>
+            </a:r>
+            <a:r>
+              <a:rPr sz="1600" b="1" i="0">
+                <a:solidFill>
+                  <a:srgbClr val="333333"/>
+                </a:solidFill>
+                <a:latin typeface="Calibri"/>
+              </a:rPr>
+              <a:t>5.</a:t>
+            </a:r>
+            <a:r>
+              <a:rPr sz="1600" b="0" i="0">
+                <a:solidFill>
+                  <a:srgbClr val="333333"/>
+                </a:solidFill>
+                <a:latin typeface="Calibri"/>
+              </a:rPr>
+              <a:t> Paso 5: completen la tabla de 5 senales de monitoreo con umbral y accion, actualicen las secciones CI/CD y Monitoreo del informe y suban las 5 preguntas a ExamLab (modulo Talleres) antes del domingo 23:59, verificando que el enlace del run verde abra sin pedir permisos y que cada senal se pueda medir en el diseno que ya dibujaron.</a:t>
+            </a:r>
+          </a:p>
+        </p:txBody>
+      </p:sp>
+      <p:sp>
+        <p:nvSpPr>
+          <p:cNvPr id="6" name="TextBox 5"/>
+          <p:cNvSpPr txBox="1"/>
+          <p:nvPr/>
+        </p:nvSpPr>
+        <p:spPr>
+          <a:xfrm>
+            <a:off x="11185855" y="6473952"/>
+            <a:ext cx="640080" cy="274320"/>
+          </a:xfrm>
+          <a:prstGeom prst="rect">
+            <a:avLst/>
+          </a:prstGeom>
+          <a:noFill/>
+        </p:spPr>
+        <p:txBody>
+          <a:bodyPr wrap="square">
+            <a:spAutoFit/>
+          </a:bodyPr>
+          <a:lstStyle/>
+          <a:p>
+            <a:pPr algn="r"/>
+            <a:r>
+              <a:rPr sz="1100" b="0" i="0">
+                <a:solidFill>
+                  <a:srgbClr val="666666"/>
+                </a:solidFill>
+                <a:latin typeface="Calibri"/>
+              </a:rPr>
+              <a:t>11</a:t>
+            </a:r>
+          </a:p>
+        </p:txBody>
+      </p:sp>
+    </p:spTree>
+  </p:cSld>
+  <p:clrMapOvr>
+    <a:masterClrMapping/>
+  </p:clrMapOvr>
+</p:sld>
+</file>
+
+<file path=ppt/slides/slide12.xml><?xml version="1.0" encoding="utf-8"?>
+<p:sld xmlns:a="http://schemas.openxmlformats.org/drawingml/2006/main" xmlns:p="http://schemas.openxmlformats.org/presentationml/2006/main" xmlns:r="http://schemas.openxmlformats.org/officeDocument/2006/relationships">
+  <p:cSld>
+    <p:bg>
+      <p:bgPr>
+        <a:solidFill>
+          <a:srgbClr val="FFFFFF"/>
+        </a:solidFill>
+        <a:effectLst/>
+      </p:bgPr>
+    </p:bg>
+    <p:spTree>
+      <p:nvGrpSpPr>
+        <p:cNvPr id="1" name=""/>
+        <p:cNvGrpSpPr/>
+        <p:nvPr/>
+      </p:nvGrpSpPr>
+      <p:grpSpPr/>
+      <p:sp>
+        <p:nvSpPr>
+          <p:cNvPr id="2" name="Rectangle 1"/>
+          <p:cNvSpPr/>
+          <p:nvPr/>
+        </p:nvSpPr>
+        <p:spPr>
+          <a:xfrm>
+            <a:off x="0" y="0"/>
+            <a:ext cx="12191695" cy="960120"/>
+          </a:xfrm>
+          <a:prstGeom prst="rect">
+            <a:avLst/>
+          </a:prstGeom>
+          <a:solidFill>
+            <a:srgbClr val="095292"/>
+          </a:solidFill>
+          <a:ln>
+            <a:noFill/>
+          </a:ln>
+        </p:spPr>
+        <p:style>
+          <a:lnRef idx="1">
+            <a:schemeClr val="accent1"/>
+          </a:lnRef>
+          <a:fillRef idx="3">
+            <a:schemeClr val="accent1"/>
+          </a:fillRef>
+          <a:effectRef idx="2">
+            <a:schemeClr val="accent1"/>
+          </a:effectRef>
+          <a:fontRef idx="minor">
+            <a:schemeClr val="lt1"/>
+          </a:fontRef>
+        </p:style>
+        <p:txBody>
+          <a:bodyPr rtlCol="0" anchor="ctr"/>
+          <a:lstStyle/>
+          <a:p>
+            <a:pPr algn="ctr"/>
+          </a:p>
+        </p:txBody>
+      </p:sp>
+      <p:sp>
+        <p:nvSpPr>
+          <p:cNvPr id="3" name="Rectangle 2"/>
+          <p:cNvSpPr/>
+          <p:nvPr/>
+        </p:nvSpPr>
+        <p:spPr>
+          <a:xfrm>
+            <a:off x="0" y="960120"/>
+            <a:ext cx="12191695" cy="41148"/>
+          </a:xfrm>
+          <a:prstGeom prst="rect">
+            <a:avLst/>
+          </a:prstGeom>
+          <a:solidFill>
+            <a:srgbClr val="FFD000"/>
+          </a:solidFill>
+          <a:ln>
+            <a:noFill/>
+          </a:ln>
+        </p:spPr>
+        <p:style>
+          <a:lnRef idx="1">
+            <a:schemeClr val="accent1"/>
+          </a:lnRef>
+          <a:fillRef idx="3">
+            <a:schemeClr val="accent1"/>
+          </a:fillRef>
+          <a:effectRef idx="2">
+            <a:schemeClr val="accent1"/>
+          </a:effectRef>
+          <a:fontRef idx="minor">
+            <a:schemeClr val="lt1"/>
+          </a:fontRef>
+        </p:style>
+        <p:txBody>
+          <a:bodyPr rtlCol="0" anchor="ctr"/>
+          <a:lstStyle/>
+          <a:p>
+            <a:pPr algn="ctr"/>
+          </a:p>
+        </p:txBody>
+      </p:sp>
+      <p:sp>
+        <p:nvSpPr>
+          <p:cNvPr id="4" name="TextBox 3"/>
+          <p:cNvSpPr txBox="1"/>
+          <p:nvPr/>
+        </p:nvSpPr>
+        <p:spPr>
+          <a:xfrm>
+            <a:off x="457200" y="164592"/>
+            <a:ext cx="11277295" cy="502920"/>
+          </a:xfrm>
+          <a:prstGeom prst="rect">
+            <a:avLst/>
+          </a:prstGeom>
+          <a:noFill/>
+        </p:spPr>
+        <p:txBody>
+          <a:bodyPr wrap="square">
+            <a:spAutoFit/>
+          </a:bodyPr>
+          <a:lstStyle/>
+          <a:p>
+            <a:r>
+              <a:rPr sz="2600" b="1" i="0">
+                <a:solidFill>
+                  <a:srgbClr val="FFFFFF"/>
+                </a:solidFill>
+                <a:latin typeface="Calibri"/>
+              </a:rPr>
+              <a:t>Para continuar (PI)</a:t>
+            </a:r>
+          </a:p>
+        </p:txBody>
+      </p:sp>
+      <p:sp>
+        <p:nvSpPr>
+          <p:cNvPr id="5" name="Rounded Rectangle 4"/>
+          <p:cNvSpPr/>
+          <p:nvPr/>
+        </p:nvSpPr>
+        <p:spPr>
+          <a:xfrm>
+            <a:off x="457200" y="1261872"/>
+            <a:ext cx="11277295" cy="1051560"/>
+          </a:xfrm>
+          <a:prstGeom prst="roundRect">
+            <a:avLst>
+              <a:gd name="adj" fmla="val 12000"/>
+            </a:avLst>
+          </a:prstGeom>
+          <a:solidFill>
+            <a:srgbClr val="E8F4FA"/>
+          </a:solidFill>
+          <a:ln>
+            <a:noFill/>
+          </a:ln>
+        </p:spPr>
+        <p:style>
+          <a:lnRef idx="1">
+            <a:schemeClr val="accent1"/>
+          </a:lnRef>
+          <a:fillRef idx="3">
+            <a:schemeClr val="accent1"/>
+          </a:fillRef>
+          <a:effectRef idx="2">
+            <a:schemeClr val="accent1"/>
+          </a:effectRef>
+          <a:fontRef idx="minor">
+            <a:schemeClr val="lt1"/>
+          </a:fontRef>
+        </p:style>
+        <p:txBody>
+          <a:bodyPr rtlCol="0" anchor="ctr"/>
+          <a:lstStyle/>
+          <a:p>
+            <a:pPr algn="ctr"/>
+          </a:p>
+        </p:txBody>
+      </p:sp>
+      <p:sp>
+        <p:nvSpPr>
+          <p:cNvPr id="6" name="Rectangle 5"/>
+          <p:cNvSpPr/>
+          <p:nvPr/>
+        </p:nvSpPr>
+        <p:spPr>
+          <a:xfrm>
+            <a:off x="457200" y="1261872"/>
+            <a:ext cx="128016" cy="1051560"/>
+          </a:xfrm>
+          <a:prstGeom prst="rect">
+            <a:avLst/>
+          </a:prstGeom>
+          <a:solidFill>
+            <a:srgbClr val="269CCB"/>
+          </a:solidFill>
+          <a:ln>
+            <a:noFill/>
+          </a:ln>
+        </p:spPr>
+        <p:style>
+          <a:lnRef idx="1">
+            <a:schemeClr val="accent1"/>
+          </a:lnRef>
+          <a:fillRef idx="3">
+            <a:schemeClr val="accent1"/>
+          </a:fillRef>
+          <a:effectRef idx="2">
+            <a:schemeClr val="accent1"/>
+          </a:effectRef>
+          <a:fontRef idx="minor">
+            <a:schemeClr val="lt1"/>
+          </a:fontRef>
+        </p:style>
+        <p:txBody>
+          <a:bodyPr rtlCol="0" anchor="ctr"/>
+          <a:lstStyle/>
+          <a:p>
+            <a:pPr algn="ctr"/>
+          </a:p>
+        </p:txBody>
+      </p:sp>
+      <p:sp>
+        <p:nvSpPr>
+          <p:cNvPr id="7" name="TextBox 6"/>
+          <p:cNvSpPr txBox="1"/>
+          <p:nvPr/>
+        </p:nvSpPr>
+        <p:spPr>
+          <a:xfrm>
+            <a:off x="777240" y="1399031"/>
+            <a:ext cx="10774375" cy="822959"/>
+          </a:xfrm>
+          <a:prstGeom prst="rect">
+            <a:avLst/>
+          </a:prstGeom>
+          <a:noFill/>
+        </p:spPr>
+        <p:txBody>
+          <a:bodyPr wrap="square">
+            <a:spAutoFit/>
+          </a:bodyPr>
+          <a:lstStyle/>
+          <a:p>
+            <a:r>
+              <a:rPr sz="1200" b="1" i="0">
+                <a:solidFill>
+                  <a:srgbClr val="269CCB"/>
+                </a:solidFill>
+                <a:latin typeface="Calibri"/>
+              </a:rPr>
+              <a:t>Info</a:t>
+            </a:r>
+          </a:p>
+          <a:p>
+            <a:pPr>
+              <a:spcBef>
+                <a:spcPts val="400"/>
+              </a:spcBef>
+            </a:pPr>
+            <a:r>
+              <a:rPr sz="1400" b="0" i="0">
+                <a:solidFill>
+                  <a:srgbClr val="333333"/>
+                </a:solidFill>
+                <a:latin typeface="Calibri"/>
+              </a:rPr>
+              <a:t>Entregable: .github/workflows/ci.yml + sección Monitoreo/CI del informe</a:t>
+            </a:r>
+          </a:p>
+        </p:txBody>
+      </p:sp>
+      <p:sp>
+        <p:nvSpPr>
+          <p:cNvPr id="8" name="Rounded Rectangle 7"/>
+          <p:cNvSpPr/>
+          <p:nvPr/>
+        </p:nvSpPr>
+        <p:spPr>
+          <a:xfrm>
+            <a:off x="457200" y="2478024"/>
+            <a:ext cx="11277295" cy="1051560"/>
+          </a:xfrm>
+          <a:prstGeom prst="roundRect">
+            <a:avLst>
+              <a:gd name="adj" fmla="val 12000"/>
+            </a:avLst>
+          </a:prstGeom>
+          <a:solidFill>
+            <a:srgbClr val="FFF8E1"/>
+          </a:solidFill>
+          <a:ln>
+            <a:noFill/>
+          </a:ln>
+        </p:spPr>
+        <p:style>
+          <a:lnRef idx="1">
+            <a:schemeClr val="accent1"/>
+          </a:lnRef>
+          <a:fillRef idx="3">
+            <a:schemeClr val="accent1"/>
+          </a:fillRef>
+          <a:effectRef idx="2">
+            <a:schemeClr val="accent1"/>
+          </a:effectRef>
+          <a:fontRef idx="minor">
+            <a:schemeClr val="lt1"/>
+          </a:fontRef>
+        </p:style>
+        <p:txBody>
+          <a:bodyPr rtlCol="0" anchor="ctr"/>
+          <a:lstStyle/>
+          <a:p>
+            <a:pPr algn="ctr"/>
+          </a:p>
+        </p:txBody>
+      </p:sp>
+      <p:sp>
+        <p:nvSpPr>
+          <p:cNvPr id="9" name="Rectangle 8"/>
+          <p:cNvSpPr/>
+          <p:nvPr/>
+        </p:nvSpPr>
+        <p:spPr>
+          <a:xfrm>
+            <a:off x="457200" y="2478024"/>
+            <a:ext cx="128016" cy="1051560"/>
+          </a:xfrm>
+          <a:prstGeom prst="rect">
+            <a:avLst/>
+          </a:prstGeom>
+          <a:solidFill>
+            <a:srgbClr val="FFD000"/>
+          </a:solidFill>
+          <a:ln>
+            <a:noFill/>
+          </a:ln>
+        </p:spPr>
+        <p:style>
+          <a:lnRef idx="1">
+            <a:schemeClr val="accent1"/>
+          </a:lnRef>
+          <a:fillRef idx="3">
+            <a:schemeClr val="accent1"/>
+          </a:fillRef>
+          <a:effectRef idx="2">
+            <a:schemeClr val="accent1"/>
+          </a:effectRef>
+          <a:fontRef idx="minor">
+            <a:schemeClr val="lt1"/>
+          </a:fontRef>
+        </p:style>
+        <p:txBody>
+          <a:bodyPr rtlCol="0" anchor="ctr"/>
+          <a:lstStyle/>
+          <a:p>
+            <a:pPr algn="ctr"/>
+          </a:p>
+        </p:txBody>
+      </p:sp>
+      <p:sp>
+        <p:nvSpPr>
+          <p:cNvPr id="10" name="TextBox 9"/>
+          <p:cNvSpPr txBox="1"/>
+          <p:nvPr/>
+        </p:nvSpPr>
+        <p:spPr>
+          <a:xfrm>
+            <a:off x="777240" y="2615184"/>
+            <a:ext cx="10774375" cy="822959"/>
+          </a:xfrm>
+          <a:prstGeom prst="rect">
+            <a:avLst/>
+          </a:prstGeom>
+          <a:noFill/>
+        </p:spPr>
+        <p:txBody>
+          <a:bodyPr wrap="square">
+            <a:spAutoFit/>
+          </a:bodyPr>
+          <a:lstStyle/>
+          <a:p>
+            <a:r>
+              <a:rPr sz="1200" b="1" i="0">
+                <a:solidFill>
+                  <a:srgbClr val="FFD000"/>
+                </a:solidFill>
+                <a:latin typeface="Calibri"/>
+              </a:rPr>
+              <a:t>Aclaración</a:t>
+            </a:r>
+          </a:p>
+          <a:p>
+            <a:pPr>
+              <a:spcBef>
+                <a:spcPts val="400"/>
+              </a:spcBef>
+            </a:pPr>
+            <a:r>
+              <a:rPr sz="1400" b="0" i="0">
+                <a:solidFill>
+                  <a:srgbClr val="333333"/>
+                </a:solidFill>
+                <a:latin typeface="Calibri"/>
+              </a:rPr>
+              <a:t>Subir evidencias al paquete CloudLite (Drive/repo) y a ExamLab (https://uniaj.examlab.workers.dev/) domingo 23:59.</a:t>
+            </a:r>
+          </a:p>
+        </p:txBody>
+      </p:sp>
+      <p:sp>
+        <p:nvSpPr>
+          <p:cNvPr id="11" name="Rounded Rectangle 10"/>
+          <p:cNvSpPr/>
+          <p:nvPr/>
+        </p:nvSpPr>
+        <p:spPr>
+          <a:xfrm>
+            <a:off x="457200" y="3694176"/>
+            <a:ext cx="11277295" cy="1051560"/>
+          </a:xfrm>
+          <a:prstGeom prst="roundRect">
+            <a:avLst>
+              <a:gd name="adj" fmla="val 12000"/>
+            </a:avLst>
+          </a:prstGeom>
+          <a:solidFill>
+            <a:srgbClr val="FBE4E4"/>
+          </a:solidFill>
+          <a:ln>
+            <a:noFill/>
+          </a:ln>
+        </p:spPr>
+        <p:style>
+          <a:lnRef idx="1">
+            <a:schemeClr val="accent1"/>
+          </a:lnRef>
+          <a:fillRef idx="3">
+            <a:schemeClr val="accent1"/>
+          </a:fillRef>
+          <a:effectRef idx="2">
+            <a:schemeClr val="accent1"/>
+          </a:effectRef>
+          <a:fontRef idx="minor">
+            <a:schemeClr val="lt1"/>
+          </a:fontRef>
+        </p:style>
+        <p:txBody>
+          <a:bodyPr rtlCol="0" anchor="ctr"/>
+          <a:lstStyle/>
+          <a:p>
+            <a:pPr algn="ctr"/>
+          </a:p>
+        </p:txBody>
+      </p:sp>
+      <p:sp>
+        <p:nvSpPr>
+          <p:cNvPr id="12" name="Rectangle 11"/>
+          <p:cNvSpPr/>
+          <p:nvPr/>
+        </p:nvSpPr>
+        <p:spPr>
+          <a:xfrm>
+            <a:off x="457200" y="3694176"/>
+            <a:ext cx="128016" cy="1051560"/>
+          </a:xfrm>
+          <a:prstGeom prst="rect">
+            <a:avLst/>
+          </a:prstGeom>
+          <a:solidFill>
+            <a:srgbClr val="A02030"/>
+          </a:solidFill>
+          <a:ln>
+            <a:noFill/>
+          </a:ln>
+        </p:spPr>
+        <p:style>
+          <a:lnRef idx="1">
+            <a:schemeClr val="accent1"/>
+          </a:lnRef>
+          <a:fillRef idx="3">
+            <a:schemeClr val="accent1"/>
+          </a:fillRef>
+          <a:effectRef idx="2">
+            <a:schemeClr val="accent1"/>
+          </a:effectRef>
+          <a:fontRef idx="minor">
+            <a:schemeClr val="lt1"/>
+          </a:fontRef>
+        </p:style>
+        <p:txBody>
+          <a:bodyPr rtlCol="0" anchor="ctr"/>
+          <a:lstStyle/>
+          <a:p>
+            <a:pPr algn="ctr"/>
+          </a:p>
+        </p:txBody>
+      </p:sp>
+      <p:sp>
+        <p:nvSpPr>
+          <p:cNvPr id="13" name="TextBox 12"/>
+          <p:cNvSpPr txBox="1"/>
+          <p:nvPr/>
+        </p:nvSpPr>
+        <p:spPr>
+          <a:xfrm>
+            <a:off x="777240" y="3831336"/>
+            <a:ext cx="10774375" cy="822959"/>
+          </a:xfrm>
+          <a:prstGeom prst="rect">
+            <a:avLst/>
+          </a:prstGeom>
+          <a:noFill/>
+        </p:spPr>
+        <p:txBody>
+          <a:bodyPr wrap="square">
+            <a:spAutoFit/>
+          </a:bodyPr>
+          <a:lstStyle/>
+          <a:p>
+            <a:r>
+              <a:rPr sz="1200" b="1" i="0">
+                <a:solidFill>
+                  <a:srgbClr val="A02030"/>
+                </a:solidFill>
+                <a:latin typeface="Calibri"/>
+              </a:rPr>
+              <a:t>Atención</a:t>
+            </a:r>
+          </a:p>
+          <a:p>
+            <a:pPr>
+              <a:spcBef>
+                <a:spcPts val="400"/>
+              </a:spcBef>
+            </a:pPr>
+            <a:r>
+              <a:rPr sz="1400" b="0" i="0">
+                <a:solidFill>
+                  <a:srgbClr val="333333"/>
+                </a:solidFill>
+                <a:latin typeface="Calibri"/>
+              </a:rPr>
+              <a:t>Sin cloud de pago ni instalaciones obligatorias de hipervisores/Docker Desktop.</a:t>
+            </a:r>
+          </a:p>
+        </p:txBody>
+      </p:sp>
+      <p:sp>
+        <p:nvSpPr>
+          <p:cNvPr id="14" name="TextBox 13"/>
+          <p:cNvSpPr txBox="1"/>
+          <p:nvPr/>
+        </p:nvSpPr>
+        <p:spPr>
+          <a:xfrm>
+            <a:off x="11185855" y="6473952"/>
+            <a:ext cx="640080" cy="274320"/>
+          </a:xfrm>
+          <a:prstGeom prst="rect">
+            <a:avLst/>
+          </a:prstGeom>
+          <a:noFill/>
+        </p:spPr>
+        <p:txBody>
+          <a:bodyPr wrap="square">
+            <a:spAutoFit/>
+          </a:bodyPr>
+          <a:lstStyle/>
+          <a:p>
+            <a:pPr algn="r"/>
+            <a:r>
+              <a:rPr sz="1100" b="0" i="0">
+                <a:solidFill>
+                  <a:srgbClr val="666666"/>
+                </a:solidFill>
+                <a:latin typeface="Calibri"/>
+              </a:rPr>
+              <a:t>12</a:t>
+            </a:r>
+          </a:p>
+        </p:txBody>
+      </p:sp>
+    </p:spTree>
+  </p:cSld>
+  <p:clrMapOvr>
+    <a:masterClrMapping/>
+  </p:clrMapOvr>
+</p:sld>
+</file>
+
+<file path=ppt/slides/slide13.xml><?xml version="1.0" encoding="utf-8"?>
 <p:sld xmlns:a="http://schemas.openxmlformats.org/drawingml/2006/main" xmlns:p="http://schemas.openxmlformats.org/presentationml/2006/main" xmlns:r="http://schemas.openxmlformats.org/officeDocument/2006/relationships">
   <p:cSld>
     <p:bg>
@@ -6556,7 +7822,7 @@
         <p:spPr>
           <a:xfrm>
             <a:off x="0" y="0"/>
-            <a:ext cx="12191695" cy="960120"/>
+            <a:ext cx="12191695" cy="1170432"/>
           </a:xfrm>
           <a:prstGeom prst="rect">
             <a:avLst/>
@@ -6598,7 +7864,7 @@
         </p:nvSpPr>
         <p:spPr>
           <a:xfrm>
-            <a:off x="0" y="960120"/>
+            <a:off x="0" y="1170432"/>
             <a:ext cx="12191695" cy="41148"/>
           </a:xfrm>
           <a:prstGeom prst="rect">
@@ -6642,7 +7908,7 @@
         <p:spPr>
           <a:xfrm>
             <a:off x="457200" y="164592"/>
-            <a:ext cx="11277295" cy="502920"/>
+            <a:ext cx="11277295" cy="384048"/>
           </a:xfrm>
           <a:prstGeom prst="rect">
             <a:avLst/>
@@ -6662,7 +7928,7 @@
                 </a:solidFill>
                 <a:latin typeface="Calibri"/>
               </a:rPr>
-              <a:t>Taller PI (paso a paso)</a:t>
+              <a:t>Herramientas de hoy</a:t>
             </a:r>
           </a:p>
         </p:txBody>
@@ -6675,8 +7941,8 @@
         </p:nvSpPr>
         <p:spPr>
           <a:xfrm>
-            <a:off x="457200" y="1170432"/>
-            <a:ext cx="11277295" cy="5230368"/>
+            <a:off x="457200" y="566928"/>
+            <a:ext cx="11277295" cy="411480"/>
           </a:xfrm>
           <a:prstGeom prst="rect">
             <a:avLst/>
@@ -6689,171 +7955,837 @@
           </a:bodyPr>
           <a:lstStyle/>
           <a:p>
-            <a:pPr>
-              <a:spcAft>
-                <a:spcPts val="800"/>
-              </a:spcAft>
+            <a:r>
+              <a:rPr sz="1400" b="0" i="0">
+                <a:solidFill>
+                  <a:srgbClr val="B8D8EE"/>
+                </a:solidFill>
+                <a:latin typeface="Calibri"/>
+              </a:rPr>
+              <a:t>Gratis · navegador o free tier · sin cuenta de pago</a:t>
+            </a:r>
+          </a:p>
+        </p:txBody>
+      </p:sp>
+      <p:sp>
+        <p:nvSpPr>
+          <p:cNvPr id="6" name="Rounded Rectangle 5"/>
+          <p:cNvSpPr/>
+          <p:nvPr/>
+        </p:nvSpPr>
+        <p:spPr>
+          <a:xfrm>
+            <a:off x="457200" y="1591056"/>
+            <a:ext cx="3624986" cy="2299716"/>
+          </a:xfrm>
+          <a:prstGeom prst="roundRect">
+            <a:avLst>
+              <a:gd name="adj" fmla="val 12000"/>
+            </a:avLst>
+          </a:prstGeom>
+          <a:solidFill>
+            <a:srgbClr val="F2F2F2"/>
+          </a:solidFill>
+          <a:ln>
+            <a:noFill/>
+          </a:ln>
+        </p:spPr>
+        <p:style>
+          <a:lnRef idx="1">
+            <a:schemeClr val="accent1"/>
+          </a:lnRef>
+          <a:fillRef idx="3">
+            <a:schemeClr val="accent1"/>
+          </a:fillRef>
+          <a:effectRef idx="2">
+            <a:schemeClr val="accent1"/>
+          </a:effectRef>
+          <a:fontRef idx="minor">
+            <a:schemeClr val="lt1"/>
+          </a:fontRef>
+        </p:style>
+        <p:txBody>
+          <a:bodyPr rtlCol="0" anchor="ctr"/>
+          <a:lstStyle/>
+          <a:p>
+            <a:pPr algn="ctr"/>
+          </a:p>
+        </p:txBody>
+      </p:sp>
+      <p:sp>
+        <p:nvSpPr>
+          <p:cNvPr id="7" name="Rectangle 6"/>
+          <p:cNvSpPr/>
+          <p:nvPr/>
+        </p:nvSpPr>
+        <p:spPr>
+          <a:xfrm>
+            <a:off x="457200" y="1591056"/>
+            <a:ext cx="3624986" cy="64008"/>
+          </a:xfrm>
+          <a:prstGeom prst="rect">
+            <a:avLst/>
+          </a:prstGeom>
+          <a:solidFill>
+            <a:srgbClr val="095292"/>
+          </a:solidFill>
+          <a:ln>
+            <a:noFill/>
+          </a:ln>
+        </p:spPr>
+        <p:style>
+          <a:lnRef idx="1">
+            <a:schemeClr val="accent1"/>
+          </a:lnRef>
+          <a:fillRef idx="3">
+            <a:schemeClr val="accent1"/>
+          </a:fillRef>
+          <a:effectRef idx="2">
+            <a:schemeClr val="accent1"/>
+          </a:effectRef>
+          <a:fontRef idx="minor">
+            <a:schemeClr val="lt1"/>
+          </a:fontRef>
+        </p:style>
+        <p:txBody>
+          <a:bodyPr rtlCol="0" anchor="ctr"/>
+          <a:lstStyle/>
+          <a:p>
+            <a:pPr algn="ctr"/>
+          </a:p>
+        </p:txBody>
+      </p:sp>
+      <p:sp>
+        <p:nvSpPr>
+          <p:cNvPr id="8" name="Rectangle 7"/>
+          <p:cNvSpPr/>
+          <p:nvPr/>
+        </p:nvSpPr>
+        <p:spPr>
+          <a:xfrm>
+            <a:off x="457200" y="1655064"/>
+            <a:ext cx="3624986" cy="27432"/>
+          </a:xfrm>
+          <a:prstGeom prst="rect">
+            <a:avLst/>
+          </a:prstGeom>
+          <a:solidFill>
+            <a:srgbClr val="FFD000"/>
+          </a:solidFill>
+          <a:ln>
+            <a:noFill/>
+          </a:ln>
+        </p:spPr>
+        <p:style>
+          <a:lnRef idx="1">
+            <a:schemeClr val="accent1"/>
+          </a:lnRef>
+          <a:fillRef idx="3">
+            <a:schemeClr val="accent1"/>
+          </a:fillRef>
+          <a:effectRef idx="2">
+            <a:schemeClr val="accent1"/>
+          </a:effectRef>
+          <a:fontRef idx="minor">
+            <a:schemeClr val="lt1"/>
+          </a:fontRef>
+        </p:style>
+        <p:txBody>
+          <a:bodyPr rtlCol="0" anchor="ctr"/>
+          <a:lstStyle/>
+          <a:p>
+            <a:pPr algn="ctr"/>
+          </a:p>
+        </p:txBody>
+      </p:sp>
+      <p:pic>
+        <p:nvPicPr>
+          <p:cNvPr id="9" name="Picture 8" descr="github_actions.png"/>
+          <p:cNvPicPr>
+            <a:picLocks noChangeAspect="1"/>
+          </p:cNvPicPr>
+          <p:nvPr/>
+        </p:nvPicPr>
+        <p:blipFill>
+          <a:blip r:embed="rId2"/>
+          <a:stretch>
+            <a:fillRect/>
+          </a:stretch>
+        </p:blipFill>
+        <p:spPr>
+          <a:xfrm>
+            <a:off x="1659331" y="1847087"/>
+            <a:ext cx="1220724" cy="1220724"/>
+          </a:xfrm>
+          <a:prstGeom prst="rect">
+            <a:avLst/>
+          </a:prstGeom>
+        </p:spPr>
+      </p:pic>
+      <p:sp>
+        <p:nvSpPr>
+          <p:cNvPr id="10" name="TextBox 9"/>
+          <p:cNvSpPr txBox="1"/>
+          <p:nvPr/>
+        </p:nvSpPr>
+        <p:spPr>
+          <a:xfrm>
+            <a:off x="530352" y="3159251"/>
+            <a:ext cx="3478682" cy="621792"/>
+          </a:xfrm>
+          <a:prstGeom prst="rect">
+            <a:avLst/>
+          </a:prstGeom>
+          <a:noFill/>
+        </p:spPr>
+        <p:txBody>
+          <a:bodyPr wrap="square" anchor="t"/>
+          <a:lstStyle/>
+          <a:p>
+            <a:pPr algn="ctr"/>
+            <a:r>
+              <a:rPr sz="1300" b="1" i="0">
+                <a:solidFill>
+                  <a:srgbClr val="095292"/>
+                </a:solidFill>
+                <a:latin typeface="Calibri"/>
+              </a:rPr>
+              <a:t>GitHub Actions</a:t>
+            </a:r>
+          </a:p>
+          <a:p>
+            <a:pPr algn="ctr">
+              <a:spcBef>
+                <a:spcPts val="200"/>
+              </a:spcBef>
             </a:pPr>
             <a:r>
-              <a:rPr sz="1600" b="1" i="0">
-                <a:solidFill>
-                  <a:srgbClr val="333333"/>
-                </a:solidFill>
-                <a:latin typeface="Calibri"/>
-              </a:rPr>
-              <a:t>1.</a:t>
-            </a:r>
-            <a:r>
-              <a:rPr sz="1600" b="0" i="0">
-                <a:solidFill>
-                  <a:srgbClr val="333333"/>
-                </a:solidFill>
-                <a:latin typeface="Calibri"/>
-              </a:rPr>
-              <a:t> Paso 1: cree o reutilice su repositorio gratuito del proyecto con el stub de la Clase 3 y al menos 3 pruebas automatizadas que verifiquen la ruta de salud, un caso valido y un caso de error de negocio, verificando con una ejecucion local o en el lab que las 3 pruebas pasan antes de tocar el pipeline; el enlace del repositorio queda en la portada del informe.</a:t>
-            </a:r>
-          </a:p>
-          <a:p>
-            <a:pPr>
-              <a:spcAft>
-                <a:spcPts val="800"/>
-              </a:spcAft>
+              <a:rPr sz="1000" b="0" i="0">
+                <a:solidFill>
+                  <a:srgbClr val="666666"/>
+                </a:solidFill>
+                <a:latin typeface="Calibri"/>
+              </a:rPr>
+              <a:t>CI del PI</a:t>
+            </a:r>
+          </a:p>
+        </p:txBody>
+      </p:sp>
+      <p:sp>
+        <p:nvSpPr>
+          <p:cNvPr id="11" name="Rounded Rectangle 10"/>
+          <p:cNvSpPr/>
+          <p:nvPr/>
+        </p:nvSpPr>
+        <p:spPr>
+          <a:xfrm>
+            <a:off x="4283354" y="1591056"/>
+            <a:ext cx="3624986" cy="2299716"/>
+          </a:xfrm>
+          <a:prstGeom prst="roundRect">
+            <a:avLst>
+              <a:gd name="adj" fmla="val 12000"/>
+            </a:avLst>
+          </a:prstGeom>
+          <a:solidFill>
+            <a:srgbClr val="F2F2F2"/>
+          </a:solidFill>
+          <a:ln>
+            <a:noFill/>
+          </a:ln>
+        </p:spPr>
+        <p:style>
+          <a:lnRef idx="1">
+            <a:schemeClr val="accent1"/>
+          </a:lnRef>
+          <a:fillRef idx="3">
+            <a:schemeClr val="accent1"/>
+          </a:fillRef>
+          <a:effectRef idx="2">
+            <a:schemeClr val="accent1"/>
+          </a:effectRef>
+          <a:fontRef idx="minor">
+            <a:schemeClr val="lt1"/>
+          </a:fontRef>
+        </p:style>
+        <p:txBody>
+          <a:bodyPr rtlCol="0" anchor="ctr"/>
+          <a:lstStyle/>
+          <a:p>
+            <a:pPr algn="ctr"/>
+          </a:p>
+        </p:txBody>
+      </p:sp>
+      <p:sp>
+        <p:nvSpPr>
+          <p:cNvPr id="12" name="Rectangle 11"/>
+          <p:cNvSpPr/>
+          <p:nvPr/>
+        </p:nvSpPr>
+        <p:spPr>
+          <a:xfrm>
+            <a:off x="4283354" y="1591056"/>
+            <a:ext cx="3624986" cy="64008"/>
+          </a:xfrm>
+          <a:prstGeom prst="rect">
+            <a:avLst/>
+          </a:prstGeom>
+          <a:solidFill>
+            <a:srgbClr val="095292"/>
+          </a:solidFill>
+          <a:ln>
+            <a:noFill/>
+          </a:ln>
+        </p:spPr>
+        <p:style>
+          <a:lnRef idx="1">
+            <a:schemeClr val="accent1"/>
+          </a:lnRef>
+          <a:fillRef idx="3">
+            <a:schemeClr val="accent1"/>
+          </a:fillRef>
+          <a:effectRef idx="2">
+            <a:schemeClr val="accent1"/>
+          </a:effectRef>
+          <a:fontRef idx="minor">
+            <a:schemeClr val="lt1"/>
+          </a:fontRef>
+        </p:style>
+        <p:txBody>
+          <a:bodyPr rtlCol="0" anchor="ctr"/>
+          <a:lstStyle/>
+          <a:p>
+            <a:pPr algn="ctr"/>
+          </a:p>
+        </p:txBody>
+      </p:sp>
+      <p:sp>
+        <p:nvSpPr>
+          <p:cNvPr id="13" name="Rectangle 12"/>
+          <p:cNvSpPr/>
+          <p:nvPr/>
+        </p:nvSpPr>
+        <p:spPr>
+          <a:xfrm>
+            <a:off x="4283354" y="1655064"/>
+            <a:ext cx="3624986" cy="27432"/>
+          </a:xfrm>
+          <a:prstGeom prst="rect">
+            <a:avLst/>
+          </a:prstGeom>
+          <a:solidFill>
+            <a:srgbClr val="FFD000"/>
+          </a:solidFill>
+          <a:ln>
+            <a:noFill/>
+          </a:ln>
+        </p:spPr>
+        <p:style>
+          <a:lnRef idx="1">
+            <a:schemeClr val="accent1"/>
+          </a:lnRef>
+          <a:fillRef idx="3">
+            <a:schemeClr val="accent1"/>
+          </a:fillRef>
+          <a:effectRef idx="2">
+            <a:schemeClr val="accent1"/>
+          </a:effectRef>
+          <a:fontRef idx="minor">
+            <a:schemeClr val="lt1"/>
+          </a:fontRef>
+        </p:style>
+        <p:txBody>
+          <a:bodyPr rtlCol="0" anchor="ctr"/>
+          <a:lstStyle/>
+          <a:p>
+            <a:pPr algn="ctr"/>
+          </a:p>
+        </p:txBody>
+      </p:sp>
+      <p:pic>
+        <p:nvPicPr>
+          <p:cNvPr id="14" name="Picture 13" descr="google_docs.png"/>
+          <p:cNvPicPr>
+            <a:picLocks noChangeAspect="1"/>
+          </p:cNvPicPr>
+          <p:nvPr/>
+        </p:nvPicPr>
+        <p:blipFill>
+          <a:blip r:embed="rId3"/>
+          <a:stretch>
+            <a:fillRect/>
+          </a:stretch>
+        </p:blipFill>
+        <p:spPr>
+          <a:xfrm>
+            <a:off x="5485485" y="1847087"/>
+            <a:ext cx="1220724" cy="1220724"/>
+          </a:xfrm>
+          <a:prstGeom prst="rect">
+            <a:avLst/>
+          </a:prstGeom>
+        </p:spPr>
+      </p:pic>
+      <p:sp>
+        <p:nvSpPr>
+          <p:cNvPr id="15" name="TextBox 14"/>
+          <p:cNvSpPr txBox="1"/>
+          <p:nvPr/>
+        </p:nvSpPr>
+        <p:spPr>
+          <a:xfrm>
+            <a:off x="4356506" y="3159251"/>
+            <a:ext cx="3478682" cy="621792"/>
+          </a:xfrm>
+          <a:prstGeom prst="rect">
+            <a:avLst/>
+          </a:prstGeom>
+          <a:noFill/>
+        </p:spPr>
+        <p:txBody>
+          <a:bodyPr wrap="square" anchor="t"/>
+          <a:lstStyle/>
+          <a:p>
+            <a:pPr algn="ctr"/>
+            <a:r>
+              <a:rPr sz="1300" b="1" i="0">
+                <a:solidFill>
+                  <a:srgbClr val="095292"/>
+                </a:solidFill>
+                <a:latin typeface="Calibri"/>
+              </a:rPr>
+              <a:t>Google Docs</a:t>
+            </a:r>
+          </a:p>
+          <a:p>
+            <a:pPr algn="ctr">
+              <a:spcBef>
+                <a:spcPts val="200"/>
+              </a:spcBef>
             </a:pPr>
             <a:r>
-              <a:rPr sz="1600" b="0" i="0">
-                <a:solidFill>
-                  <a:srgbClr val="333333"/>
-                </a:solidFill>
-                <a:latin typeface="Calibri"/>
-              </a:rPr>
-              <a:t>–   </a:t>
-            </a:r>
-            <a:r>
-              <a:rPr sz="1600" b="1" i="0">
-                <a:solidFill>
-                  <a:srgbClr val="333333"/>
-                </a:solidFill>
-                <a:latin typeface="Calibri"/>
-              </a:rPr>
-              <a:t>2.</a:t>
-            </a:r>
-            <a:r>
-              <a:rPr sz="1600" b="0" i="0">
-                <a:solidFill>
-                  <a:srgbClr val="333333"/>
-                </a:solidFill>
-                <a:latin typeface="Calibri"/>
-              </a:rPr>
-              <a:t> Paso 2: agreguen el archivo .github/workflows/ci.yml con 4 jobs encadenados (build, test, package y deploy simulado), disparadores en push y pull_request sobre la rama principal, y publicacion de artefacto, verificando que ningun paso imprima secretos y que el job de deploy diga explicitamente en su log que es un despliegue simulado.</a:t>
-            </a:r>
-          </a:p>
-          <a:p>
-            <a:pPr>
-              <a:spcAft>
-                <a:spcPts val="800"/>
-              </a:spcAft>
+              <a:rPr sz="1000" b="0" i="0">
+                <a:solidFill>
+                  <a:srgbClr val="666666"/>
+                </a:solidFill>
+                <a:latin typeface="Calibri"/>
+              </a:rPr>
+              <a:t>Informe PI</a:t>
+            </a:r>
+          </a:p>
+        </p:txBody>
+      </p:sp>
+      <p:sp>
+        <p:nvSpPr>
+          <p:cNvPr id="16" name="Rounded Rectangle 15"/>
+          <p:cNvSpPr/>
+          <p:nvPr/>
+        </p:nvSpPr>
+        <p:spPr>
+          <a:xfrm>
+            <a:off x="8109508" y="1591056"/>
+            <a:ext cx="3624986" cy="2299716"/>
+          </a:xfrm>
+          <a:prstGeom prst="roundRect">
+            <a:avLst>
+              <a:gd name="adj" fmla="val 12000"/>
+            </a:avLst>
+          </a:prstGeom>
+          <a:solidFill>
+            <a:srgbClr val="F2F2F2"/>
+          </a:solidFill>
+          <a:ln>
+            <a:noFill/>
+          </a:ln>
+        </p:spPr>
+        <p:style>
+          <a:lnRef idx="1">
+            <a:schemeClr val="accent1"/>
+          </a:lnRef>
+          <a:fillRef idx="3">
+            <a:schemeClr val="accent1"/>
+          </a:fillRef>
+          <a:effectRef idx="2">
+            <a:schemeClr val="accent1"/>
+          </a:effectRef>
+          <a:fontRef idx="minor">
+            <a:schemeClr val="lt1"/>
+          </a:fontRef>
+        </p:style>
+        <p:txBody>
+          <a:bodyPr rtlCol="0" anchor="ctr"/>
+          <a:lstStyle/>
+          <a:p>
+            <a:pPr algn="ctr"/>
+          </a:p>
+        </p:txBody>
+      </p:sp>
+      <p:sp>
+        <p:nvSpPr>
+          <p:cNvPr id="17" name="Rectangle 16"/>
+          <p:cNvSpPr/>
+          <p:nvPr/>
+        </p:nvSpPr>
+        <p:spPr>
+          <a:xfrm>
+            <a:off x="8109508" y="1591056"/>
+            <a:ext cx="3624986" cy="64008"/>
+          </a:xfrm>
+          <a:prstGeom prst="rect">
+            <a:avLst/>
+          </a:prstGeom>
+          <a:solidFill>
+            <a:srgbClr val="095292"/>
+          </a:solidFill>
+          <a:ln>
+            <a:noFill/>
+          </a:ln>
+        </p:spPr>
+        <p:style>
+          <a:lnRef idx="1">
+            <a:schemeClr val="accent1"/>
+          </a:lnRef>
+          <a:fillRef idx="3">
+            <a:schemeClr val="accent1"/>
+          </a:fillRef>
+          <a:effectRef idx="2">
+            <a:schemeClr val="accent1"/>
+          </a:effectRef>
+          <a:fontRef idx="minor">
+            <a:schemeClr val="lt1"/>
+          </a:fontRef>
+        </p:style>
+        <p:txBody>
+          <a:bodyPr rtlCol="0" anchor="ctr"/>
+          <a:lstStyle/>
+          <a:p>
+            <a:pPr algn="ctr"/>
+          </a:p>
+        </p:txBody>
+      </p:sp>
+      <p:sp>
+        <p:nvSpPr>
+          <p:cNvPr id="18" name="Rectangle 17"/>
+          <p:cNvSpPr/>
+          <p:nvPr/>
+        </p:nvSpPr>
+        <p:spPr>
+          <a:xfrm>
+            <a:off x="8109508" y="1655064"/>
+            <a:ext cx="3624986" cy="27432"/>
+          </a:xfrm>
+          <a:prstGeom prst="rect">
+            <a:avLst/>
+          </a:prstGeom>
+          <a:solidFill>
+            <a:srgbClr val="FFD000"/>
+          </a:solidFill>
+          <a:ln>
+            <a:noFill/>
+          </a:ln>
+        </p:spPr>
+        <p:style>
+          <a:lnRef idx="1">
+            <a:schemeClr val="accent1"/>
+          </a:lnRef>
+          <a:fillRef idx="3">
+            <a:schemeClr val="accent1"/>
+          </a:fillRef>
+          <a:effectRef idx="2">
+            <a:schemeClr val="accent1"/>
+          </a:effectRef>
+          <a:fontRef idx="minor">
+            <a:schemeClr val="lt1"/>
+          </a:fontRef>
+        </p:style>
+        <p:txBody>
+          <a:bodyPr rtlCol="0" anchor="ctr"/>
+          <a:lstStyle/>
+          <a:p>
+            <a:pPr algn="ctr"/>
+          </a:p>
+        </p:txBody>
+      </p:sp>
+      <p:pic>
+        <p:nvPicPr>
+          <p:cNvPr id="19" name="Picture 18" descr="mermaid.png"/>
+          <p:cNvPicPr>
+            <a:picLocks noChangeAspect="1"/>
+          </p:cNvPicPr>
+          <p:nvPr/>
+        </p:nvPicPr>
+        <p:blipFill>
+          <a:blip r:embed="rId4"/>
+          <a:stretch>
+            <a:fillRect/>
+          </a:stretch>
+        </p:blipFill>
+        <p:spPr>
+          <a:xfrm>
+            <a:off x="9311640" y="1847087"/>
+            <a:ext cx="1220724" cy="1220724"/>
+          </a:xfrm>
+          <a:prstGeom prst="rect">
+            <a:avLst/>
+          </a:prstGeom>
+        </p:spPr>
+      </p:pic>
+      <p:sp>
+        <p:nvSpPr>
+          <p:cNvPr id="20" name="TextBox 19"/>
+          <p:cNvSpPr txBox="1"/>
+          <p:nvPr/>
+        </p:nvSpPr>
+        <p:spPr>
+          <a:xfrm>
+            <a:off x="8182660" y="3159251"/>
+            <a:ext cx="3478682" cy="621792"/>
+          </a:xfrm>
+          <a:prstGeom prst="rect">
+            <a:avLst/>
+          </a:prstGeom>
+          <a:noFill/>
+        </p:spPr>
+        <p:txBody>
+          <a:bodyPr wrap="square" anchor="t"/>
+          <a:lstStyle/>
+          <a:p>
+            <a:pPr algn="ctr"/>
+            <a:r>
+              <a:rPr sz="1300" b="1" i="0">
+                <a:solidFill>
+                  <a:srgbClr val="095292"/>
+                </a:solidFill>
+                <a:latin typeface="Calibri"/>
+              </a:rPr>
+              <a:t>Mermaid</a:t>
+            </a:r>
+          </a:p>
+          <a:p>
+            <a:pPr algn="ctr">
+              <a:spcBef>
+                <a:spcPts val="200"/>
+              </a:spcBef>
             </a:pPr>
             <a:r>
-              <a:rPr sz="1600" b="0" i="0">
-                <a:solidFill>
-                  <a:srgbClr val="333333"/>
-                </a:solidFill>
-                <a:latin typeface="Calibri"/>
-              </a:rPr>
-              <a:t>–   </a:t>
-            </a:r>
-            <a:r>
-              <a:rPr sz="1600" b="1" i="0">
-                <a:solidFill>
-                  <a:srgbClr val="333333"/>
-                </a:solidFill>
-                <a:latin typeface="Calibri"/>
-              </a:rPr>
-              <a:t>3.</a:t>
-            </a:r>
-            <a:r>
-              <a:rPr sz="1600" b="0" i="0">
-                <a:solidFill>
-                  <a:srgbClr val="333333"/>
-                </a:solidFill>
-                <a:latin typeface="Calibri"/>
-              </a:rPr>
-              <a:t> Paso 3: ejecuten el workflow con un push real, esperen el run completo y capturen el enlace del run verde mas el nombre del artefacto descargable, verificando que los 4 jobs aparezcan en verde y que el artefacto pese mas de 0 bytes; si Actions falla por cuota, dejen registrado el mensaje textual del error y la explicacion, que es el plan B aceptado.</a:t>
-            </a:r>
-          </a:p>
-          <a:p>
-            <a:pPr>
-              <a:spcAft>
-                <a:spcPts val="800"/>
-              </a:spcAft>
+              <a:rPr sz="1000" b="0" i="0">
+                <a:solidFill>
+                  <a:srgbClr val="666666"/>
+                </a:solidFill>
+                <a:latin typeface="Calibri"/>
+              </a:rPr>
+              <a:t>Codigo del diagrama</a:t>
+            </a:r>
+          </a:p>
+        </p:txBody>
+      </p:sp>
+      <p:sp>
+        <p:nvSpPr>
+          <p:cNvPr id="21" name="Rounded Rectangle 20"/>
+          <p:cNvSpPr/>
+          <p:nvPr/>
+        </p:nvSpPr>
+        <p:spPr>
+          <a:xfrm>
+            <a:off x="4283354" y="4055364"/>
+            <a:ext cx="3624986" cy="2299716"/>
+          </a:xfrm>
+          <a:prstGeom prst="roundRect">
+            <a:avLst>
+              <a:gd name="adj" fmla="val 12000"/>
+            </a:avLst>
+          </a:prstGeom>
+          <a:solidFill>
+            <a:srgbClr val="F2F2F2"/>
+          </a:solidFill>
+          <a:ln>
+            <a:noFill/>
+          </a:ln>
+        </p:spPr>
+        <p:style>
+          <a:lnRef idx="1">
+            <a:schemeClr val="accent1"/>
+          </a:lnRef>
+          <a:fillRef idx="3">
+            <a:schemeClr val="accent1"/>
+          </a:fillRef>
+          <a:effectRef idx="2">
+            <a:schemeClr val="accent1"/>
+          </a:effectRef>
+          <a:fontRef idx="minor">
+            <a:schemeClr val="lt1"/>
+          </a:fontRef>
+        </p:style>
+        <p:txBody>
+          <a:bodyPr rtlCol="0" anchor="ctr"/>
+          <a:lstStyle/>
+          <a:p>
+            <a:pPr algn="ctr"/>
+          </a:p>
+        </p:txBody>
+      </p:sp>
+      <p:sp>
+        <p:nvSpPr>
+          <p:cNvPr id="22" name="Rectangle 21"/>
+          <p:cNvSpPr/>
+          <p:nvPr/>
+        </p:nvSpPr>
+        <p:spPr>
+          <a:xfrm>
+            <a:off x="4283354" y="4055364"/>
+            <a:ext cx="3624986" cy="64008"/>
+          </a:xfrm>
+          <a:prstGeom prst="rect">
+            <a:avLst/>
+          </a:prstGeom>
+          <a:solidFill>
+            <a:srgbClr val="095292"/>
+          </a:solidFill>
+          <a:ln>
+            <a:noFill/>
+          </a:ln>
+        </p:spPr>
+        <p:style>
+          <a:lnRef idx="1">
+            <a:schemeClr val="accent1"/>
+          </a:lnRef>
+          <a:fillRef idx="3">
+            <a:schemeClr val="accent1"/>
+          </a:fillRef>
+          <a:effectRef idx="2">
+            <a:schemeClr val="accent1"/>
+          </a:effectRef>
+          <a:fontRef idx="minor">
+            <a:schemeClr val="lt1"/>
+          </a:fontRef>
+        </p:style>
+        <p:txBody>
+          <a:bodyPr rtlCol="0" anchor="ctr"/>
+          <a:lstStyle/>
+          <a:p>
+            <a:pPr algn="ctr"/>
+          </a:p>
+        </p:txBody>
+      </p:sp>
+      <p:sp>
+        <p:nvSpPr>
+          <p:cNvPr id="23" name="Rectangle 22"/>
+          <p:cNvSpPr/>
+          <p:nvPr/>
+        </p:nvSpPr>
+        <p:spPr>
+          <a:xfrm>
+            <a:off x="4283354" y="4119372"/>
+            <a:ext cx="3624986" cy="27432"/>
+          </a:xfrm>
+          <a:prstGeom prst="rect">
+            <a:avLst/>
+          </a:prstGeom>
+          <a:solidFill>
+            <a:srgbClr val="FFD000"/>
+          </a:solidFill>
+          <a:ln>
+            <a:noFill/>
+          </a:ln>
+        </p:spPr>
+        <p:style>
+          <a:lnRef idx="1">
+            <a:schemeClr val="accent1"/>
+          </a:lnRef>
+          <a:fillRef idx="3">
+            <a:schemeClr val="accent1"/>
+          </a:fillRef>
+          <a:effectRef idx="2">
+            <a:schemeClr val="accent1"/>
+          </a:effectRef>
+          <a:fontRef idx="minor">
+            <a:schemeClr val="lt1"/>
+          </a:fontRef>
+        </p:style>
+        <p:txBody>
+          <a:bodyPr rtlCol="0" anchor="ctr"/>
+          <a:lstStyle/>
+          <a:p>
+            <a:pPr algn="ctr"/>
+          </a:p>
+        </p:txBody>
+      </p:sp>
+      <p:pic>
+        <p:nvPicPr>
+          <p:cNvPr id="24" name="Picture 23" descr="examlab.png"/>
+          <p:cNvPicPr>
+            <a:picLocks noChangeAspect="1"/>
+          </p:cNvPicPr>
+          <p:nvPr/>
+        </p:nvPicPr>
+        <p:blipFill>
+          <a:blip r:embed="rId5"/>
+          <a:stretch>
+            <a:fillRect/>
+          </a:stretch>
+        </p:blipFill>
+        <p:spPr>
+          <a:xfrm>
+            <a:off x="5485485" y="4311396"/>
+            <a:ext cx="1220724" cy="1220724"/>
+          </a:xfrm>
+          <a:prstGeom prst="rect">
+            <a:avLst/>
+          </a:prstGeom>
+        </p:spPr>
+      </p:pic>
+      <p:sp>
+        <p:nvSpPr>
+          <p:cNvPr id="25" name="TextBox 24"/>
+          <p:cNvSpPr txBox="1"/>
+          <p:nvPr/>
+        </p:nvSpPr>
+        <p:spPr>
+          <a:xfrm>
+            <a:off x="4356506" y="5623560"/>
+            <a:ext cx="3478682" cy="621792"/>
+          </a:xfrm>
+          <a:prstGeom prst="rect">
+            <a:avLst/>
+          </a:prstGeom>
+          <a:noFill/>
+        </p:spPr>
+        <p:txBody>
+          <a:bodyPr wrap="square" anchor="t"/>
+          <a:lstStyle/>
+          <a:p>
+            <a:pPr algn="ctr"/>
+            <a:r>
+              <a:rPr sz="1300" b="1" i="0">
+                <a:solidFill>
+                  <a:srgbClr val="095292"/>
+                </a:solidFill>
+                <a:latin typeface="Calibri"/>
+              </a:rPr>
+              <a:t>ExamLab</a:t>
+            </a:r>
+          </a:p>
+          <a:p>
+            <a:pPr algn="ctr">
+              <a:spcBef>
+                <a:spcPts val="200"/>
+              </a:spcBef>
             </a:pPr>
             <a:r>
-              <a:rPr sz="1600" b="0" i="0">
-                <a:solidFill>
-                  <a:srgbClr val="333333"/>
-                </a:solidFill>
-                <a:latin typeface="Calibri"/>
-              </a:rPr>
-              <a:t>–   </a:t>
-            </a:r>
-            <a:r>
-              <a:rPr sz="1600" b="1" i="0">
-                <a:solidFill>
-                  <a:srgbClr val="333333"/>
-                </a:solidFill>
-                <a:latin typeface="Calibri"/>
-              </a:rPr>
-              <a:t>4.</a:t>
-            </a:r>
-            <a:r>
-              <a:rPr sz="1600" b="0" i="0">
-                <a:solidFill>
-                  <a:srgbClr val="333333"/>
-                </a:solidFill>
-                <a:latin typeface="Calibri"/>
-              </a:rPr>
-              <a:t> Paso 4: escriban en ExamLab el diagrama Mermaid del pipeline con los 4 jobs dentro de un subgrafo, la compuerta de decision y las dos salidas (despliegue simulado y bloqueo del pull request), verificando al renderizar que los nombres de los jobs sean exactamente los del ci.yml.</a:t>
-            </a:r>
-          </a:p>
-          <a:p>
-            <a:pPr>
-              <a:spcAft>
-                <a:spcPts val="800"/>
-              </a:spcAft>
-            </a:pPr>
-            <a:r>
-              <a:rPr sz="1600" b="0" i="0">
-                <a:solidFill>
-                  <a:srgbClr val="333333"/>
-                </a:solidFill>
-                <a:latin typeface="Calibri"/>
-              </a:rPr>
-              <a:t>–   </a:t>
-            </a:r>
-            <a:r>
-              <a:rPr sz="1600" b="1" i="0">
-                <a:solidFill>
-                  <a:srgbClr val="333333"/>
-                </a:solidFill>
-                <a:latin typeface="Calibri"/>
-              </a:rPr>
-              <a:t>5.</a:t>
-            </a:r>
-            <a:r>
-              <a:rPr sz="1600" b="0" i="0">
-                <a:solidFill>
-                  <a:srgbClr val="333333"/>
-                </a:solidFill>
-                <a:latin typeface="Calibri"/>
-              </a:rPr>
-              <a:t> Paso 5: completen la tabla de 5 senales de monitoreo con umbral y accion, actualicen las secciones CI/CD y Monitoreo del informe y suban las 5 preguntas a ExamLab (modulo Talleres) antes del domingo 23:59, verificando que el enlace del run verde abra sin pedir permisos y que cada senal se pueda medir en el diseno que ya dibujaron.</a:t>
-            </a:r>
-          </a:p>
-        </p:txBody>
-      </p:sp>
-      <p:sp>
-        <p:nvSpPr>
-          <p:cNvPr id="6" name="TextBox 5"/>
+              <a:rPr sz="1000" b="0" i="0">
+                <a:solidFill>
+                  <a:srgbClr val="666666"/>
+                </a:solidFill>
+                <a:latin typeface="Calibri"/>
+              </a:rPr>
+              <a:t>Donde se entrega</a:t>
+            </a:r>
+          </a:p>
+        </p:txBody>
+      </p:sp>
+      <p:sp>
+        <p:nvSpPr>
+          <p:cNvPr id="26" name="TextBox 25"/>
           <p:cNvSpPr txBox="1"/>
           <p:nvPr/>
         </p:nvSpPr>

--- a/Arquitectura de Sistemas Computacionales/Clases/Clase 8 - Monitoreo optimizacion y CI-CD/Presentacion.pptx
+++ b/Arquitectura de Sistemas Computacionales/Clases/Clase 8 - Monitoreo optimizacion y CI-CD/Presentacion.pptx
@@ -17,7 +17,6 @@
     <p:sldId id="265" r:id="rId16"/>
     <p:sldId id="266" r:id="rId17"/>
     <p:sldId id="267" r:id="rId18"/>
-    <p:sldId id="268" r:id="rId19"/>
   </p:sldIdLst>
   <p:sldSz cx="12191695" cy="6858000" type="screen4x3"/>
   <p:notesSz cx="6858000" cy="9144000"/>
@@ -3470,7 +3469,7 @@
         <p:spPr>
           <a:xfrm>
             <a:off x="0" y="0"/>
-            <a:ext cx="12191695" cy="1170432"/>
+            <a:ext cx="12191695" cy="960120"/>
           </a:xfrm>
           <a:prstGeom prst="rect">
             <a:avLst/>
@@ -3512,7 +3511,7 @@
         </p:nvSpPr>
         <p:spPr>
           <a:xfrm>
-            <a:off x="0" y="1170432"/>
+            <a:off x="0" y="960120"/>
             <a:ext cx="12191695" cy="41148"/>
           </a:xfrm>
           <a:prstGeom prst="rect">
@@ -3556,7 +3555,7 @@
         <p:spPr>
           <a:xfrm>
             <a:off x="457200" y="164592"/>
-            <a:ext cx="11277295" cy="384048"/>
+            <a:ext cx="11277295" cy="502920"/>
           </a:xfrm>
           <a:prstGeom prst="rect">
             <a:avLst/>
@@ -3576,7 +3575,7 @@
                 </a:solidFill>
                 <a:latin typeface="Calibri"/>
               </a:rPr>
-              <a:t>Del boceto a ExamLab (diagrama)</a:t>
+              <a:t>Taller PI (paso a paso)</a:t>
             </a:r>
           </a:p>
         </p:txBody>
@@ -3589,8 +3588,8 @@
         </p:nvSpPr>
         <p:spPr>
           <a:xfrm>
-            <a:off x="457200" y="566928"/>
-            <a:ext cx="11277295" cy="411480"/>
+            <a:off x="457200" y="1170432"/>
+            <a:ext cx="11277295" cy="5230368"/>
           </a:xfrm>
           <a:prstGeom prst="rect">
             <a:avLst/>
@@ -3603,705 +3602,137 @@
           </a:bodyPr>
           <a:lstStyle/>
           <a:p>
-            <a:r>
-              <a:rPr sz="1400" b="0" i="0">
-                <a:solidFill>
-                  <a:srgbClr val="B8D8EE"/>
-                </a:solidFill>
-                <a:latin typeface="Calibri"/>
-              </a:rPr>
-              <a:t>El diagrama se entrega como código Mermaid dentro de ExamLab, no como imagen</a:t>
-            </a:r>
-          </a:p>
-        </p:txBody>
-      </p:sp>
-      <p:sp>
-        <p:nvSpPr>
-          <p:cNvPr id="6" name="Rounded Rectangle 5"/>
-          <p:cNvSpPr/>
-          <p:nvPr/>
-        </p:nvSpPr>
-        <p:spPr>
-          <a:xfrm>
-            <a:off x="457200" y="1659636"/>
-            <a:ext cx="11277295" cy="1051560"/>
-          </a:xfrm>
-          <a:prstGeom prst="roundRect">
-            <a:avLst>
-              <a:gd name="adj" fmla="val 12000"/>
-            </a:avLst>
-          </a:prstGeom>
-          <a:solidFill>
-            <a:srgbClr val="F2F2F2"/>
-          </a:solidFill>
-          <a:ln>
-            <a:noFill/>
-          </a:ln>
-        </p:spPr>
-        <p:style>
-          <a:lnRef idx="1">
-            <a:schemeClr val="accent1"/>
-          </a:lnRef>
-          <a:fillRef idx="3">
-            <a:schemeClr val="accent1"/>
-          </a:fillRef>
-          <a:effectRef idx="2">
-            <a:schemeClr val="accent1"/>
-          </a:effectRef>
-          <a:fontRef idx="minor">
-            <a:schemeClr val="lt1"/>
-          </a:fontRef>
-        </p:style>
-        <p:txBody>
-          <a:bodyPr rtlCol="0" anchor="ctr"/>
-          <a:lstStyle/>
-          <a:p>
-            <a:pPr algn="ctr"/>
-          </a:p>
-        </p:txBody>
-      </p:sp>
-      <p:sp>
-        <p:nvSpPr>
-          <p:cNvPr id="7" name="Rounded Rectangle 6"/>
-          <p:cNvSpPr/>
-          <p:nvPr/>
-        </p:nvSpPr>
-        <p:spPr>
-          <a:xfrm>
-            <a:off x="594360" y="1965960"/>
-            <a:ext cx="438912" cy="438912"/>
-          </a:xfrm>
-          <a:prstGeom prst="roundRect">
-            <a:avLst>
-              <a:gd name="adj" fmla="val 12000"/>
-            </a:avLst>
-          </a:prstGeom>
-          <a:solidFill>
-            <a:srgbClr val="095292"/>
-          </a:solidFill>
-          <a:ln>
-            <a:noFill/>
-          </a:ln>
-        </p:spPr>
-        <p:style>
-          <a:lnRef idx="1">
-            <a:schemeClr val="accent1"/>
-          </a:lnRef>
-          <a:fillRef idx="3">
-            <a:schemeClr val="accent1"/>
-          </a:fillRef>
-          <a:effectRef idx="2">
-            <a:schemeClr val="accent1"/>
-          </a:effectRef>
-          <a:fontRef idx="minor">
-            <a:schemeClr val="lt1"/>
-          </a:fontRef>
-        </p:style>
-        <p:txBody>
-          <a:bodyPr rtlCol="0" anchor="ctr"/>
-          <a:lstStyle/>
-          <a:p>
-            <a:pPr algn="ctr"/>
-          </a:p>
-        </p:txBody>
-      </p:sp>
-      <p:sp>
-        <p:nvSpPr>
-          <p:cNvPr id="8" name="TextBox 7"/>
-          <p:cNvSpPr txBox="1"/>
-          <p:nvPr/>
-        </p:nvSpPr>
-        <p:spPr>
-          <a:xfrm>
-            <a:off x="594360" y="1965960"/>
-            <a:ext cx="438912" cy="438912"/>
-          </a:xfrm>
-          <a:prstGeom prst="rect">
-            <a:avLst/>
-          </a:prstGeom>
-          <a:noFill/>
-        </p:spPr>
-        <p:txBody>
-          <a:bodyPr wrap="square" anchor="ctr"/>
-          <a:lstStyle/>
-          <a:p>
-            <a:pPr algn="ctr"/>
+            <a:pPr>
+              <a:spcAft>
+                <a:spcPts val="800"/>
+              </a:spcAft>
+            </a:pPr>
             <a:r>
               <a:rPr sz="1600" b="1" i="0">
                 <a:solidFill>
-                  <a:srgbClr val="FFFFFF"/>
-                </a:solidFill>
-                <a:latin typeface="Calibri"/>
-              </a:rPr>
-              <a:t>1</a:t>
-            </a:r>
-          </a:p>
-        </p:txBody>
-      </p:sp>
-      <p:sp>
-        <p:nvSpPr>
-          <p:cNvPr id="9" name="TextBox 8"/>
-          <p:cNvSpPr txBox="1"/>
-          <p:nvPr/>
-        </p:nvSpPr>
-        <p:spPr>
-          <a:xfrm>
-            <a:off x="1188720" y="1751076"/>
-            <a:ext cx="10271455" cy="886968"/>
-          </a:xfrm>
-          <a:prstGeom prst="rect">
-            <a:avLst/>
-          </a:prstGeom>
-          <a:noFill/>
-        </p:spPr>
-        <p:txBody>
-          <a:bodyPr wrap="square" anchor="ctr"/>
-          <a:lstStyle/>
-          <a:p>
-            <a:r>
-              <a:rPr sz="1500" b="1" i="0">
-                <a:solidFill>
-                  <a:srgbClr val="095292"/>
-                </a:solidFill>
-                <a:latin typeface="Calibri"/>
-              </a:rPr>
-              <a:t>Disena visual</a:t>
+                  <a:srgbClr val="333333"/>
+                </a:solidFill>
+                <a:latin typeface="Calibri"/>
+              </a:rPr>
+              <a:t>1.</a:t>
+            </a:r>
+            <a:r>
+              <a:rPr sz="1600" b="0" i="0">
+                <a:solidFill>
+                  <a:srgbClr val="333333"/>
+                </a:solidFill>
+                <a:latin typeface="Calibri"/>
+              </a:rPr>
+              <a:t> Paso 1: escriba en la pregunta 7 el contenido completo del ci.yml con disparadores, entorno y los pasos de construccion, prueba y despliegue simulado, usando la imagen y el puerto del Dockerfile del Corte 1; verifique que ningun secreto quede escrito en claro dentro del YAML.</a:t>
             </a:r>
           </a:p>
           <a:p>
             <a:pPr>
-              <a:spcBef>
-                <a:spcPts val="200"/>
-              </a:spcBef>
+              <a:spcAft>
+                <a:spcPts val="800"/>
+              </a:spcAft>
             </a:pPr>
             <a:r>
-              <a:rPr sz="1300" b="0" i="0">
+              <a:rPr sz="1600" b="0" i="0">
                 <a:solidFill>
                   <a:srgbClr val="333333"/>
                 </a:solidFill>
                 <a:latin typeface="Calibri"/>
               </a:rPr>
-              <a:t>Dibuja el diagrama como quieras en Excalidraw o draw.io: es mas rapido arrastrar cajas que escribir codigo, y ahi es donde piensas el modelo.</a:t>
-            </a:r>
-          </a:p>
-        </p:txBody>
-      </p:sp>
-      <p:sp>
-        <p:nvSpPr>
-          <p:cNvPr id="10" name="Rounded Rectangle 9"/>
-          <p:cNvSpPr/>
-          <p:nvPr/>
-        </p:nvSpPr>
-        <p:spPr>
-          <a:xfrm>
-            <a:off x="457200" y="2802636"/>
-            <a:ext cx="11277295" cy="1051560"/>
-          </a:xfrm>
-          <a:prstGeom prst="roundRect">
-            <a:avLst>
-              <a:gd name="adj" fmla="val 12000"/>
-            </a:avLst>
-          </a:prstGeom>
-          <a:solidFill>
-            <a:srgbClr val="E8F4FA"/>
-          </a:solidFill>
-          <a:ln>
-            <a:noFill/>
-          </a:ln>
-        </p:spPr>
-        <p:style>
-          <a:lnRef idx="1">
-            <a:schemeClr val="accent1"/>
-          </a:lnRef>
-          <a:fillRef idx="3">
-            <a:schemeClr val="accent1"/>
-          </a:fillRef>
-          <a:effectRef idx="2">
-            <a:schemeClr val="accent1"/>
-          </a:effectRef>
-          <a:fontRef idx="minor">
-            <a:schemeClr val="lt1"/>
-          </a:fontRef>
-        </p:style>
-        <p:txBody>
-          <a:bodyPr rtlCol="0" anchor="ctr"/>
-          <a:lstStyle/>
-          <a:p>
-            <a:pPr algn="ctr"/>
-          </a:p>
-        </p:txBody>
-      </p:sp>
-      <p:sp>
-        <p:nvSpPr>
-          <p:cNvPr id="11" name="Rounded Rectangle 10"/>
-          <p:cNvSpPr/>
-          <p:nvPr/>
-        </p:nvSpPr>
-        <p:spPr>
-          <a:xfrm>
-            <a:off x="594360" y="3108960"/>
-            <a:ext cx="438912" cy="438912"/>
-          </a:xfrm>
-          <a:prstGeom prst="roundRect">
-            <a:avLst>
-              <a:gd name="adj" fmla="val 12000"/>
-            </a:avLst>
-          </a:prstGeom>
-          <a:solidFill>
-            <a:srgbClr val="095292"/>
-          </a:solidFill>
-          <a:ln>
-            <a:noFill/>
-          </a:ln>
-        </p:spPr>
-        <p:style>
-          <a:lnRef idx="1">
-            <a:schemeClr val="accent1"/>
-          </a:lnRef>
-          <a:fillRef idx="3">
-            <a:schemeClr val="accent1"/>
-          </a:fillRef>
-          <a:effectRef idx="2">
-            <a:schemeClr val="accent1"/>
-          </a:effectRef>
-          <a:fontRef idx="minor">
-            <a:schemeClr val="lt1"/>
-          </a:fontRef>
-        </p:style>
-        <p:txBody>
-          <a:bodyPr rtlCol="0" anchor="ctr"/>
-          <a:lstStyle/>
-          <a:p>
-            <a:pPr algn="ctr"/>
-          </a:p>
-        </p:txBody>
-      </p:sp>
-      <p:sp>
-        <p:nvSpPr>
-          <p:cNvPr id="12" name="TextBox 11"/>
-          <p:cNvSpPr txBox="1"/>
-          <p:nvPr/>
-        </p:nvSpPr>
-        <p:spPr>
-          <a:xfrm>
-            <a:off x="594360" y="3108960"/>
-            <a:ext cx="438912" cy="438912"/>
-          </a:xfrm>
-          <a:prstGeom prst="rect">
-            <a:avLst/>
-          </a:prstGeom>
-          <a:noFill/>
-        </p:spPr>
-        <p:txBody>
-          <a:bodyPr wrap="square" anchor="ctr"/>
-          <a:lstStyle/>
-          <a:p>
-            <a:pPr algn="ctr"/>
+              <a:t>–   </a:t>
+            </a:r>
             <a:r>
               <a:rPr sz="1600" b="1" i="0">
                 <a:solidFill>
-                  <a:srgbClr val="FFFFFF"/>
-                </a:solidFill>
-                <a:latin typeface="Calibri"/>
-              </a:rPr>
-              <a:t>2</a:t>
-            </a:r>
-          </a:p>
-        </p:txBody>
-      </p:sp>
-      <p:sp>
-        <p:nvSpPr>
-          <p:cNvPr id="13" name="TextBox 12"/>
-          <p:cNvSpPr txBox="1"/>
-          <p:nvPr/>
-        </p:nvSpPr>
-        <p:spPr>
-          <a:xfrm>
-            <a:off x="1188720" y="2894076"/>
-            <a:ext cx="10271455" cy="886968"/>
-          </a:xfrm>
-          <a:prstGeom prst="rect">
-            <a:avLst/>
-          </a:prstGeom>
-          <a:noFill/>
-        </p:spPr>
-        <p:txBody>
-          <a:bodyPr wrap="square" anchor="ctr"/>
-          <a:lstStyle/>
-          <a:p>
-            <a:r>
-              <a:rPr sz="1500" b="1" i="0">
-                <a:solidFill>
-                  <a:srgbClr val="095292"/>
-                </a:solidFill>
-                <a:latin typeface="Calibri"/>
-              </a:rPr>
-              <a:t>Traduce con IA</a:t>
+                  <a:srgbClr val="333333"/>
+                </a:solidFill>
+                <a:latin typeface="Calibri"/>
+              </a:rPr>
+              <a:t>2.</a:t>
+            </a:r>
+            <a:r>
+              <a:rPr sz="1600" b="0" i="0">
+                <a:solidFill>
+                  <a:srgbClr val="333333"/>
+                </a:solidFill>
+                <a:latin typeface="Calibri"/>
+              </a:rPr>
+              <a:t> Paso 2: explique en la pregunta 8 que se compila o instala, que se ejecuta en la prueba y con que condicion el pipeline debe fallar; hagase la prueba mental de que error tendria que introducir para que el check salga rojo, y si no encuentra ninguno, su pipeline todavia no valida nada.</a:t>
             </a:r>
           </a:p>
           <a:p>
             <a:pPr>
-              <a:spcBef>
-                <a:spcPts val="200"/>
-              </a:spcBef>
+              <a:spcAft>
+                <a:spcPts val="800"/>
+              </a:spcAft>
             </a:pPr>
             <a:r>
-              <a:rPr sz="1300" b="0" i="0">
+              <a:rPr sz="1600" b="0" i="0">
                 <a:solidFill>
                   <a:srgbClr val="333333"/>
                 </a:solidFill>
                 <a:latin typeface="Calibri"/>
               </a:rPr>
-              <a:t>Copia o describe tu boceto a una IA y pidele el codigo Mermaid: «convierte este diagrama a Mermaid usando flowchart». Revisa el resultado: la IA acierta la sintaxis, no tu modelo.</a:t>
-            </a:r>
-          </a:p>
-        </p:txBody>
-      </p:sp>
-      <p:sp>
-        <p:nvSpPr>
-          <p:cNvPr id="14" name="Rounded Rectangle 13"/>
-          <p:cNvSpPr/>
-          <p:nvPr/>
-        </p:nvSpPr>
-        <p:spPr>
-          <a:xfrm>
-            <a:off x="457200" y="3945636"/>
-            <a:ext cx="11277295" cy="1051560"/>
-          </a:xfrm>
-          <a:prstGeom prst="roundRect">
-            <a:avLst>
-              <a:gd name="adj" fmla="val 12000"/>
-            </a:avLst>
-          </a:prstGeom>
-          <a:solidFill>
-            <a:srgbClr val="F2F2F2"/>
-          </a:solidFill>
-          <a:ln>
-            <a:noFill/>
-          </a:ln>
-        </p:spPr>
-        <p:style>
-          <a:lnRef idx="1">
-            <a:schemeClr val="accent1"/>
-          </a:lnRef>
-          <a:fillRef idx="3">
-            <a:schemeClr val="accent1"/>
-          </a:fillRef>
-          <a:effectRef idx="2">
-            <a:schemeClr val="accent1"/>
-          </a:effectRef>
-          <a:fontRef idx="minor">
-            <a:schemeClr val="lt1"/>
-          </a:fontRef>
-        </p:style>
-        <p:txBody>
-          <a:bodyPr rtlCol="0" anchor="ctr"/>
-          <a:lstStyle/>
-          <a:p>
-            <a:pPr algn="ctr"/>
-          </a:p>
-        </p:txBody>
-      </p:sp>
-      <p:sp>
-        <p:nvSpPr>
-          <p:cNvPr id="15" name="Rounded Rectangle 14"/>
-          <p:cNvSpPr/>
-          <p:nvPr/>
-        </p:nvSpPr>
-        <p:spPr>
-          <a:xfrm>
-            <a:off x="594360" y="4251960"/>
-            <a:ext cx="438912" cy="438912"/>
-          </a:xfrm>
-          <a:prstGeom prst="roundRect">
-            <a:avLst>
-              <a:gd name="adj" fmla="val 12000"/>
-            </a:avLst>
-          </a:prstGeom>
-          <a:solidFill>
-            <a:srgbClr val="095292"/>
-          </a:solidFill>
-          <a:ln>
-            <a:noFill/>
-          </a:ln>
-        </p:spPr>
-        <p:style>
-          <a:lnRef idx="1">
-            <a:schemeClr val="accent1"/>
-          </a:lnRef>
-          <a:fillRef idx="3">
-            <a:schemeClr val="accent1"/>
-          </a:fillRef>
-          <a:effectRef idx="2">
-            <a:schemeClr val="accent1"/>
-          </a:effectRef>
-          <a:fontRef idx="minor">
-            <a:schemeClr val="lt1"/>
-          </a:fontRef>
-        </p:style>
-        <p:txBody>
-          <a:bodyPr rtlCol="0" anchor="ctr"/>
-          <a:lstStyle/>
-          <a:p>
-            <a:pPr algn="ctr"/>
-          </a:p>
-        </p:txBody>
-      </p:sp>
-      <p:sp>
-        <p:nvSpPr>
-          <p:cNvPr id="16" name="TextBox 15"/>
-          <p:cNvSpPr txBox="1"/>
-          <p:nvPr/>
-        </p:nvSpPr>
-        <p:spPr>
-          <a:xfrm>
-            <a:off x="594360" y="4251960"/>
-            <a:ext cx="438912" cy="438912"/>
-          </a:xfrm>
-          <a:prstGeom prst="rect">
-            <a:avLst/>
-          </a:prstGeom>
-          <a:noFill/>
-        </p:spPr>
-        <p:txBody>
-          <a:bodyPr wrap="square" anchor="ctr"/>
-          <a:lstStyle/>
-          <a:p>
-            <a:pPr algn="ctr"/>
+              <a:t>–   </a:t>
+            </a:r>
             <a:r>
               <a:rPr sz="1600" b="1" i="0">
                 <a:solidFill>
-                  <a:srgbClr val="FFFFFF"/>
-                </a:solidFill>
-                <a:latin typeface="Calibri"/>
-              </a:rPr>
-              <a:t>3</a:t>
-            </a:r>
-          </a:p>
-        </p:txBody>
-      </p:sp>
-      <p:sp>
-        <p:nvSpPr>
-          <p:cNvPr id="17" name="TextBox 16"/>
-          <p:cNvSpPr txBox="1"/>
-          <p:nvPr/>
-        </p:nvSpPr>
-        <p:spPr>
-          <a:xfrm>
-            <a:off x="1188720" y="4037076"/>
-            <a:ext cx="10271455" cy="886968"/>
-          </a:xfrm>
-          <a:prstGeom prst="rect">
-            <a:avLst/>
-          </a:prstGeom>
-          <a:noFill/>
-        </p:spPr>
-        <p:txBody>
-          <a:bodyPr wrap="square" anchor="ctr"/>
-          <a:lstStyle/>
-          <a:p>
-            <a:r>
-              <a:rPr sz="1500" b="1" i="0">
-                <a:solidFill>
-                  <a:srgbClr val="095292"/>
-                </a:solidFill>
-                <a:latin typeface="Calibri"/>
-              </a:rPr>
-              <a:t>Pega y renderiza en ExamLab</a:t>
+                  <a:srgbClr val="333333"/>
+                </a:solidFill>
+                <a:latin typeface="Calibri"/>
+              </a:rPr>
+              <a:t>3.</a:t>
+            </a:r>
+            <a:r>
+              <a:rPr sz="1600" b="0" i="0">
+                <a:solidFill>
+                  <a:srgbClr val="333333"/>
+                </a:solidFill>
+                <a:latin typeface="Calibri"/>
+              </a:rPr>
+              <a:t> Paso 3: distinga en la pregunta 9 que valida CI y que hace CD, ubique cual de los dos construyo y diga que le faltaria para CD real; reconocer que su pipeline llega hasta «listo para desplegar» suma puntos, afirmar que ya tiene CD los resta.</a:t>
             </a:r>
           </a:p>
           <a:p>
             <a:pPr>
-              <a:spcBef>
-                <a:spcPts val="200"/>
-              </a:spcBef>
+              <a:spcAft>
+                <a:spcPts val="800"/>
+              </a:spcAft>
             </a:pPr>
             <a:r>
-              <a:rPr sz="1300" b="0" i="0">
+              <a:rPr sz="1600" b="0" i="0">
                 <a:solidFill>
                   <a:srgbClr val="333333"/>
                 </a:solidFill>
                 <a:latin typeface="Calibri"/>
               </a:rPr>
-              <a:t>Pega ese codigo en la caja de texto de la pregunta y mira como lo dibuja la plataforma. Si no renderiza, corrige ahi mismo: lo que se califica es el diagrama renderizado dentro de ExamLab.</a:t>
-            </a:r>
-          </a:p>
-        </p:txBody>
-      </p:sp>
-      <p:sp>
-        <p:nvSpPr>
-          <p:cNvPr id="18" name="Rounded Rectangle 17"/>
-          <p:cNvSpPr/>
-          <p:nvPr/>
-        </p:nvSpPr>
-        <p:spPr>
-          <a:xfrm>
-            <a:off x="457200" y="5088636"/>
-            <a:ext cx="11277295" cy="1051560"/>
-          </a:xfrm>
-          <a:prstGeom prst="roundRect">
-            <a:avLst>
-              <a:gd name="adj" fmla="val 12000"/>
-            </a:avLst>
-          </a:prstGeom>
-          <a:solidFill>
-            <a:srgbClr val="E8F4FA"/>
-          </a:solidFill>
-          <a:ln>
-            <a:noFill/>
-          </a:ln>
-        </p:spPr>
-        <p:style>
-          <a:lnRef idx="1">
-            <a:schemeClr val="accent1"/>
-          </a:lnRef>
-          <a:fillRef idx="3">
-            <a:schemeClr val="accent1"/>
-          </a:fillRef>
-          <a:effectRef idx="2">
-            <a:schemeClr val="accent1"/>
-          </a:effectRef>
-          <a:fontRef idx="minor">
-            <a:schemeClr val="lt1"/>
-          </a:fontRef>
-        </p:style>
-        <p:txBody>
-          <a:bodyPr rtlCol="0" anchor="ctr"/>
-          <a:lstStyle/>
-          <a:p>
-            <a:pPr algn="ctr"/>
-          </a:p>
-        </p:txBody>
-      </p:sp>
-      <p:sp>
-        <p:nvSpPr>
-          <p:cNvPr id="19" name="Rounded Rectangle 18"/>
-          <p:cNvSpPr/>
-          <p:nvPr/>
-        </p:nvSpPr>
-        <p:spPr>
-          <a:xfrm>
-            <a:off x="594360" y="5394960"/>
-            <a:ext cx="438912" cy="438912"/>
-          </a:xfrm>
-          <a:prstGeom prst="roundRect">
-            <a:avLst>
-              <a:gd name="adj" fmla="val 12000"/>
-            </a:avLst>
-          </a:prstGeom>
-          <a:solidFill>
-            <a:srgbClr val="095292"/>
-          </a:solidFill>
-          <a:ln>
-            <a:noFill/>
-          </a:ln>
-        </p:spPr>
-        <p:style>
-          <a:lnRef idx="1">
-            <a:schemeClr val="accent1"/>
-          </a:lnRef>
-          <a:fillRef idx="3">
-            <a:schemeClr val="accent1"/>
-          </a:fillRef>
-          <a:effectRef idx="2">
-            <a:schemeClr val="accent1"/>
-          </a:effectRef>
-          <a:fontRef idx="minor">
-            <a:schemeClr val="lt1"/>
-          </a:fontRef>
-        </p:style>
-        <p:txBody>
-          <a:bodyPr rtlCol="0" anchor="ctr"/>
-          <a:lstStyle/>
-          <a:p>
-            <a:pPr algn="ctr"/>
-          </a:p>
-        </p:txBody>
-      </p:sp>
-      <p:sp>
-        <p:nvSpPr>
-          <p:cNvPr id="20" name="TextBox 19"/>
-          <p:cNvSpPr txBox="1"/>
-          <p:nvPr/>
-        </p:nvSpPr>
-        <p:spPr>
-          <a:xfrm>
-            <a:off x="594360" y="5394960"/>
-            <a:ext cx="438912" cy="438912"/>
-          </a:xfrm>
-          <a:prstGeom prst="rect">
-            <a:avLst/>
-          </a:prstGeom>
-          <a:noFill/>
-        </p:spPr>
-        <p:txBody>
-          <a:bodyPr wrap="square" anchor="ctr"/>
-          <a:lstStyle/>
-          <a:p>
-            <a:pPr algn="ctr"/>
+              <a:t>–   </a:t>
+            </a:r>
             <a:r>
               <a:rPr sz="1600" b="1" i="0">
                 <a:solidFill>
-                  <a:srgbClr val="FFFFFF"/>
-                </a:solidFill>
-                <a:latin typeface="Calibri"/>
-              </a:rPr>
-              <a:t>4</a:t>
-            </a:r>
-          </a:p>
-        </p:txBody>
-      </p:sp>
-      <p:sp>
-        <p:nvSpPr>
-          <p:cNvPr id="21" name="TextBox 20"/>
-          <p:cNvSpPr txBox="1"/>
-          <p:nvPr/>
-        </p:nvSpPr>
-        <p:spPr>
-          <a:xfrm>
-            <a:off x="1188720" y="5180076"/>
-            <a:ext cx="10271455" cy="886968"/>
-          </a:xfrm>
-          <a:prstGeom prst="rect">
-            <a:avLst/>
-          </a:prstGeom>
-          <a:noFill/>
-        </p:spPr>
-        <p:txBody>
-          <a:bodyPr wrap="square" anchor="ctr"/>
-          <a:lstStyle/>
-          <a:p>
-            <a:r>
-              <a:rPr sz="1500" b="1" i="0">
-                <a:solidFill>
-                  <a:srgbClr val="095292"/>
-                </a:solidFill>
-                <a:latin typeface="Calibri"/>
-              </a:rPr>
-              <a:t>Guarda el PNG para tu PI</a:t>
-            </a:r>
-          </a:p>
-          <a:p>
-            <a:pPr>
-              <a:spcBef>
-                <a:spcPts val="200"/>
-              </a:spcBef>
-            </a:pPr>
-            <a:r>
-              <a:rPr sz="1300" b="0" i="0">
-                <a:solidFill>
                   <a:srgbClr val="333333"/>
                 </a:solidFill>
                 <a:latin typeface="Calibri"/>
               </a:rPr>
-              <a:t>Exporta tambien la imagen a la carpeta de tu Proyecto Integrador. Esa copia es para tu informe; no reemplaza la respuesta en la plataforma.</a:t>
-            </a:r>
-          </a:p>
-        </p:txBody>
-      </p:sp>
-      <p:sp>
-        <p:nvSpPr>
-          <p:cNvPr id="22" name="TextBox 21"/>
+              <a:t>4.</a:t>
+            </a:r>
+            <a:r>
+              <a:rPr sz="1600" b="0" i="0">
+                <a:solidFill>
+                  <a:srgbClr val="333333"/>
+                </a:solidFill>
+                <a:latin typeface="Calibri"/>
+              </a:rPr>
+              <a:t> Paso 4: liste en la pregunta 10 entre 4 y 6 senales con su umbral, atadas a operaciones de su dominio, y verifique que al menos una sea un registro y no una metrica numerica; una senal sin umbral no sirve para operar y no suma.</a:t>
+            </a:r>
+          </a:p>
+        </p:txBody>
+      </p:sp>
+      <p:sp>
+        <p:nvSpPr>
+          <p:cNvPr id="6" name="TextBox 5"/>
           <p:cNvSpPr txBox="1"/>
           <p:nvPr/>
         </p:nvSpPr>
@@ -4475,21 +3906,109 @@
                 </a:solidFill>
                 <a:latin typeface="Calibri"/>
               </a:rPr>
-              <a:t>Taller PI (paso a paso)</a:t>
-            </a:r>
-          </a:p>
-        </p:txBody>
-      </p:sp>
-      <p:sp>
-        <p:nvSpPr>
-          <p:cNvPr id="5" name="TextBox 4"/>
+              <a:t>Para continuar (PI)</a:t>
+            </a:r>
+          </a:p>
+        </p:txBody>
+      </p:sp>
+      <p:sp>
+        <p:nvSpPr>
+          <p:cNvPr id="5" name="Rounded Rectangle 4"/>
+          <p:cNvSpPr/>
+          <p:nvPr/>
+        </p:nvSpPr>
+        <p:spPr>
+          <a:xfrm>
+            <a:off x="457200" y="1261872"/>
+            <a:ext cx="11277295" cy="1051560"/>
+          </a:xfrm>
+          <a:prstGeom prst="roundRect">
+            <a:avLst>
+              <a:gd name="adj" fmla="val 12000"/>
+            </a:avLst>
+          </a:prstGeom>
+          <a:solidFill>
+            <a:srgbClr val="E8F4FA"/>
+          </a:solidFill>
+          <a:ln>
+            <a:noFill/>
+          </a:ln>
+        </p:spPr>
+        <p:style>
+          <a:lnRef idx="1">
+            <a:schemeClr val="accent1"/>
+          </a:lnRef>
+          <a:fillRef idx="3">
+            <a:schemeClr val="accent1"/>
+          </a:fillRef>
+          <a:effectRef idx="2">
+            <a:schemeClr val="accent1"/>
+          </a:effectRef>
+          <a:fontRef idx="minor">
+            <a:schemeClr val="lt1"/>
+          </a:fontRef>
+        </p:style>
+        <p:txBody>
+          <a:bodyPr rtlCol="0" anchor="ctr"/>
+          <a:lstStyle/>
+          <a:p>
+            <a:pPr algn="ctr"/>
+          </a:p>
+        </p:txBody>
+      </p:sp>
+      <p:sp>
+        <p:nvSpPr>
+          <p:cNvPr id="6" name="Rectangle 5"/>
+          <p:cNvSpPr/>
+          <p:nvPr/>
+        </p:nvSpPr>
+        <p:spPr>
+          <a:xfrm>
+            <a:off x="457200" y="1261872"/>
+            <a:ext cx="128016" cy="1051560"/>
+          </a:xfrm>
+          <a:prstGeom prst="rect">
+            <a:avLst/>
+          </a:prstGeom>
+          <a:solidFill>
+            <a:srgbClr val="269CCB"/>
+          </a:solidFill>
+          <a:ln>
+            <a:noFill/>
+          </a:ln>
+        </p:spPr>
+        <p:style>
+          <a:lnRef idx="1">
+            <a:schemeClr val="accent1"/>
+          </a:lnRef>
+          <a:fillRef idx="3">
+            <a:schemeClr val="accent1"/>
+          </a:fillRef>
+          <a:effectRef idx="2">
+            <a:schemeClr val="accent1"/>
+          </a:effectRef>
+          <a:fontRef idx="minor">
+            <a:schemeClr val="lt1"/>
+          </a:fontRef>
+        </p:style>
+        <p:txBody>
+          <a:bodyPr rtlCol="0" anchor="ctr"/>
+          <a:lstStyle/>
+          <a:p>
+            <a:pPr algn="ctr"/>
+          </a:p>
+        </p:txBody>
+      </p:sp>
+      <p:sp>
+        <p:nvSpPr>
+          <p:cNvPr id="7" name="TextBox 6"/>
           <p:cNvSpPr txBox="1"/>
           <p:nvPr/>
         </p:nvSpPr>
         <p:spPr>
           <a:xfrm>
-            <a:off x="457200" y="1170432"/>
-            <a:ext cx="11277295" cy="5230368"/>
+            <a:off x="777240" y="1399031"/>
+            <a:ext cx="10774375" cy="822959"/>
           </a:xfrm>
           <a:prstGeom prst="rect">
             <a:avLst/>
@@ -4502,171 +4021,313 @@
           </a:bodyPr>
           <a:lstStyle/>
           <a:p>
+            <a:r>
+              <a:rPr sz="1200" b="1" i="0">
+                <a:solidFill>
+                  <a:srgbClr val="269CCB"/>
+                </a:solidFill>
+                <a:latin typeface="Calibri"/>
+              </a:rPr>
+              <a:t>Info</a:t>
+            </a:r>
+          </a:p>
+          <a:p>
             <a:pPr>
-              <a:spcAft>
-                <a:spcPts val="800"/>
-              </a:spcAft>
+              <a:spcBef>
+                <a:spcPts val="400"/>
+              </a:spcBef>
             </a:pPr>
             <a:r>
-              <a:rPr sz="1600" b="1" i="0">
+              <a:rPr sz="1400" b="0" i="0">
                 <a:solidFill>
                   <a:srgbClr val="333333"/>
                 </a:solidFill>
                 <a:latin typeface="Calibri"/>
               </a:rPr>
-              <a:t>1.</a:t>
-            </a:r>
-            <a:r>
-              <a:rPr sz="1600" b="0" i="0">
+              <a:t>Entregable: .github/workflows/ci.yml + sección Monitoreo/CI del informe</a:t>
+            </a:r>
+          </a:p>
+        </p:txBody>
+      </p:sp>
+      <p:sp>
+        <p:nvSpPr>
+          <p:cNvPr id="8" name="Rounded Rectangle 7"/>
+          <p:cNvSpPr/>
+          <p:nvPr/>
+        </p:nvSpPr>
+        <p:spPr>
+          <a:xfrm>
+            <a:off x="457200" y="2478024"/>
+            <a:ext cx="11277295" cy="1051560"/>
+          </a:xfrm>
+          <a:prstGeom prst="roundRect">
+            <a:avLst>
+              <a:gd name="adj" fmla="val 12000"/>
+            </a:avLst>
+          </a:prstGeom>
+          <a:solidFill>
+            <a:srgbClr val="FFF8E1"/>
+          </a:solidFill>
+          <a:ln>
+            <a:noFill/>
+          </a:ln>
+        </p:spPr>
+        <p:style>
+          <a:lnRef idx="1">
+            <a:schemeClr val="accent1"/>
+          </a:lnRef>
+          <a:fillRef idx="3">
+            <a:schemeClr val="accent1"/>
+          </a:fillRef>
+          <a:effectRef idx="2">
+            <a:schemeClr val="accent1"/>
+          </a:effectRef>
+          <a:fontRef idx="minor">
+            <a:schemeClr val="lt1"/>
+          </a:fontRef>
+        </p:style>
+        <p:txBody>
+          <a:bodyPr rtlCol="0" anchor="ctr"/>
+          <a:lstStyle/>
+          <a:p>
+            <a:pPr algn="ctr"/>
+          </a:p>
+        </p:txBody>
+      </p:sp>
+      <p:sp>
+        <p:nvSpPr>
+          <p:cNvPr id="9" name="Rectangle 8"/>
+          <p:cNvSpPr/>
+          <p:nvPr/>
+        </p:nvSpPr>
+        <p:spPr>
+          <a:xfrm>
+            <a:off x="457200" y="2478024"/>
+            <a:ext cx="128016" cy="1051560"/>
+          </a:xfrm>
+          <a:prstGeom prst="rect">
+            <a:avLst/>
+          </a:prstGeom>
+          <a:solidFill>
+            <a:srgbClr val="FFD000"/>
+          </a:solidFill>
+          <a:ln>
+            <a:noFill/>
+          </a:ln>
+        </p:spPr>
+        <p:style>
+          <a:lnRef idx="1">
+            <a:schemeClr val="accent1"/>
+          </a:lnRef>
+          <a:fillRef idx="3">
+            <a:schemeClr val="accent1"/>
+          </a:fillRef>
+          <a:effectRef idx="2">
+            <a:schemeClr val="accent1"/>
+          </a:effectRef>
+          <a:fontRef idx="minor">
+            <a:schemeClr val="lt1"/>
+          </a:fontRef>
+        </p:style>
+        <p:txBody>
+          <a:bodyPr rtlCol="0" anchor="ctr"/>
+          <a:lstStyle/>
+          <a:p>
+            <a:pPr algn="ctr"/>
+          </a:p>
+        </p:txBody>
+      </p:sp>
+      <p:sp>
+        <p:nvSpPr>
+          <p:cNvPr id="10" name="TextBox 9"/>
+          <p:cNvSpPr txBox="1"/>
+          <p:nvPr/>
+        </p:nvSpPr>
+        <p:spPr>
+          <a:xfrm>
+            <a:off x="777240" y="2615184"/>
+            <a:ext cx="10774375" cy="822959"/>
+          </a:xfrm>
+          <a:prstGeom prst="rect">
+            <a:avLst/>
+          </a:prstGeom>
+          <a:noFill/>
+        </p:spPr>
+        <p:txBody>
+          <a:bodyPr wrap="square">
+            <a:spAutoFit/>
+          </a:bodyPr>
+          <a:lstStyle/>
+          <a:p>
+            <a:r>
+              <a:rPr sz="1200" b="1" i="0">
+                <a:solidFill>
+                  <a:srgbClr val="FFD000"/>
+                </a:solidFill>
+                <a:latin typeface="Calibri"/>
+              </a:rPr>
+              <a:t>Aclaración</a:t>
+            </a:r>
+          </a:p>
+          <a:p>
+            <a:pPr>
+              <a:spcBef>
+                <a:spcPts val="400"/>
+              </a:spcBef>
+            </a:pPr>
+            <a:r>
+              <a:rPr sz="1400" b="0" i="0">
                 <a:solidFill>
                   <a:srgbClr val="333333"/>
                 </a:solidFill>
                 <a:latin typeface="Calibri"/>
               </a:rPr>
-              <a:t> Paso 1: cree o reutilice su repositorio gratuito del proyecto con el stub de la Clase 3 y al menos 3 pruebas automatizadas que verifiquen la ruta de salud, un caso valido y un caso de error de negocio, verificando con una ejecucion local o en el lab que las 3 pruebas pasan antes de tocar el pipeline; el enlace del repositorio queda en la portada del informe.</a:t>
+              <a:t>Subir evidencias al paquete CloudLite (Drive/repo) y a ExamLab (https://uniaj.examlab.workers.dev/) domingo 23:59.</a:t>
+            </a:r>
+          </a:p>
+        </p:txBody>
+      </p:sp>
+      <p:sp>
+        <p:nvSpPr>
+          <p:cNvPr id="11" name="Rounded Rectangle 10"/>
+          <p:cNvSpPr/>
+          <p:nvPr/>
+        </p:nvSpPr>
+        <p:spPr>
+          <a:xfrm>
+            <a:off x="457200" y="3694176"/>
+            <a:ext cx="11277295" cy="1051560"/>
+          </a:xfrm>
+          <a:prstGeom prst="roundRect">
+            <a:avLst>
+              <a:gd name="adj" fmla="val 12000"/>
+            </a:avLst>
+          </a:prstGeom>
+          <a:solidFill>
+            <a:srgbClr val="FBE4E4"/>
+          </a:solidFill>
+          <a:ln>
+            <a:noFill/>
+          </a:ln>
+        </p:spPr>
+        <p:style>
+          <a:lnRef idx="1">
+            <a:schemeClr val="accent1"/>
+          </a:lnRef>
+          <a:fillRef idx="3">
+            <a:schemeClr val="accent1"/>
+          </a:fillRef>
+          <a:effectRef idx="2">
+            <a:schemeClr val="accent1"/>
+          </a:effectRef>
+          <a:fontRef idx="minor">
+            <a:schemeClr val="lt1"/>
+          </a:fontRef>
+        </p:style>
+        <p:txBody>
+          <a:bodyPr rtlCol="0" anchor="ctr"/>
+          <a:lstStyle/>
+          <a:p>
+            <a:pPr algn="ctr"/>
+          </a:p>
+        </p:txBody>
+      </p:sp>
+      <p:sp>
+        <p:nvSpPr>
+          <p:cNvPr id="12" name="Rectangle 11"/>
+          <p:cNvSpPr/>
+          <p:nvPr/>
+        </p:nvSpPr>
+        <p:spPr>
+          <a:xfrm>
+            <a:off x="457200" y="3694176"/>
+            <a:ext cx="128016" cy="1051560"/>
+          </a:xfrm>
+          <a:prstGeom prst="rect">
+            <a:avLst/>
+          </a:prstGeom>
+          <a:solidFill>
+            <a:srgbClr val="A02030"/>
+          </a:solidFill>
+          <a:ln>
+            <a:noFill/>
+          </a:ln>
+        </p:spPr>
+        <p:style>
+          <a:lnRef idx="1">
+            <a:schemeClr val="accent1"/>
+          </a:lnRef>
+          <a:fillRef idx="3">
+            <a:schemeClr val="accent1"/>
+          </a:fillRef>
+          <a:effectRef idx="2">
+            <a:schemeClr val="accent1"/>
+          </a:effectRef>
+          <a:fontRef idx="minor">
+            <a:schemeClr val="lt1"/>
+          </a:fontRef>
+        </p:style>
+        <p:txBody>
+          <a:bodyPr rtlCol="0" anchor="ctr"/>
+          <a:lstStyle/>
+          <a:p>
+            <a:pPr algn="ctr"/>
+          </a:p>
+        </p:txBody>
+      </p:sp>
+      <p:sp>
+        <p:nvSpPr>
+          <p:cNvPr id="13" name="TextBox 12"/>
+          <p:cNvSpPr txBox="1"/>
+          <p:nvPr/>
+        </p:nvSpPr>
+        <p:spPr>
+          <a:xfrm>
+            <a:off x="777240" y="3831336"/>
+            <a:ext cx="10774375" cy="822959"/>
+          </a:xfrm>
+          <a:prstGeom prst="rect">
+            <a:avLst/>
+          </a:prstGeom>
+          <a:noFill/>
+        </p:spPr>
+        <p:txBody>
+          <a:bodyPr wrap="square">
+            <a:spAutoFit/>
+          </a:bodyPr>
+          <a:lstStyle/>
+          <a:p>
+            <a:r>
+              <a:rPr sz="1200" b="1" i="0">
+                <a:solidFill>
+                  <a:srgbClr val="A02030"/>
+                </a:solidFill>
+                <a:latin typeface="Calibri"/>
+              </a:rPr>
+              <a:t>Atención</a:t>
             </a:r>
           </a:p>
           <a:p>
             <a:pPr>
-              <a:spcAft>
-                <a:spcPts val="800"/>
-              </a:spcAft>
+              <a:spcBef>
+                <a:spcPts val="400"/>
+              </a:spcBef>
             </a:pPr>
             <a:r>
-              <a:rPr sz="1600" b="0" i="0">
+              <a:rPr sz="1400" b="0" i="0">
                 <a:solidFill>
                   <a:srgbClr val="333333"/>
                 </a:solidFill>
                 <a:latin typeface="Calibri"/>
               </a:rPr>
-              <a:t>–   </a:t>
-            </a:r>
-            <a:r>
-              <a:rPr sz="1600" b="1" i="0">
-                <a:solidFill>
-                  <a:srgbClr val="333333"/>
-                </a:solidFill>
-                <a:latin typeface="Calibri"/>
-              </a:rPr>
-              <a:t>2.</a:t>
-            </a:r>
-            <a:r>
-              <a:rPr sz="1600" b="0" i="0">
-                <a:solidFill>
-                  <a:srgbClr val="333333"/>
-                </a:solidFill>
-                <a:latin typeface="Calibri"/>
-              </a:rPr>
-              <a:t> Paso 2: agreguen el archivo .github/workflows/ci.yml con 4 jobs encadenados (build, test, package y deploy simulado), disparadores en push y pull_request sobre la rama principal, y publicacion de artefacto, verificando que ningun paso imprima secretos y que el job de deploy diga explicitamente en su log que es un despliegue simulado.</a:t>
-            </a:r>
-          </a:p>
-          <a:p>
-            <a:pPr>
-              <a:spcAft>
-                <a:spcPts val="800"/>
-              </a:spcAft>
-            </a:pPr>
-            <a:r>
-              <a:rPr sz="1600" b="0" i="0">
-                <a:solidFill>
-                  <a:srgbClr val="333333"/>
-                </a:solidFill>
-                <a:latin typeface="Calibri"/>
-              </a:rPr>
-              <a:t>–   </a:t>
-            </a:r>
-            <a:r>
-              <a:rPr sz="1600" b="1" i="0">
-                <a:solidFill>
-                  <a:srgbClr val="333333"/>
-                </a:solidFill>
-                <a:latin typeface="Calibri"/>
-              </a:rPr>
-              <a:t>3.</a:t>
-            </a:r>
-            <a:r>
-              <a:rPr sz="1600" b="0" i="0">
-                <a:solidFill>
-                  <a:srgbClr val="333333"/>
-                </a:solidFill>
-                <a:latin typeface="Calibri"/>
-              </a:rPr>
-              <a:t> Paso 3: ejecuten el workflow con un push real, esperen el run completo y capturen el enlace del run verde mas el nombre del artefacto descargable, verificando que los 4 jobs aparezcan en verde y que el artefacto pese mas de 0 bytes; si Actions falla por cuota, dejen registrado el mensaje textual del error y la explicacion, que es el plan B aceptado.</a:t>
-            </a:r>
-          </a:p>
-          <a:p>
-            <a:pPr>
-              <a:spcAft>
-                <a:spcPts val="800"/>
-              </a:spcAft>
-            </a:pPr>
-            <a:r>
-              <a:rPr sz="1600" b="0" i="0">
-                <a:solidFill>
-                  <a:srgbClr val="333333"/>
-                </a:solidFill>
-                <a:latin typeface="Calibri"/>
-              </a:rPr>
-              <a:t>–   </a:t>
-            </a:r>
-            <a:r>
-              <a:rPr sz="1600" b="1" i="0">
-                <a:solidFill>
-                  <a:srgbClr val="333333"/>
-                </a:solidFill>
-                <a:latin typeface="Calibri"/>
-              </a:rPr>
-              <a:t>4.</a:t>
-            </a:r>
-            <a:r>
-              <a:rPr sz="1600" b="0" i="0">
-                <a:solidFill>
-                  <a:srgbClr val="333333"/>
-                </a:solidFill>
-                <a:latin typeface="Calibri"/>
-              </a:rPr>
-              <a:t> Paso 4: escriban en ExamLab el diagrama Mermaid del pipeline con los 4 jobs dentro de un subgrafo, la compuerta de decision y las dos salidas (despliegue simulado y bloqueo del pull request), verificando al renderizar que los nombres de los jobs sean exactamente los del ci.yml.</a:t>
-            </a:r>
-          </a:p>
-          <a:p>
-            <a:pPr>
-              <a:spcAft>
-                <a:spcPts val="800"/>
-              </a:spcAft>
-            </a:pPr>
-            <a:r>
-              <a:rPr sz="1600" b="0" i="0">
-                <a:solidFill>
-                  <a:srgbClr val="333333"/>
-                </a:solidFill>
-                <a:latin typeface="Calibri"/>
-              </a:rPr>
-              <a:t>–   </a:t>
-            </a:r>
-            <a:r>
-              <a:rPr sz="1600" b="1" i="0">
-                <a:solidFill>
-                  <a:srgbClr val="333333"/>
-                </a:solidFill>
-                <a:latin typeface="Calibri"/>
-              </a:rPr>
-              <a:t>5.</a:t>
-            </a:r>
-            <a:r>
-              <a:rPr sz="1600" b="0" i="0">
-                <a:solidFill>
-                  <a:srgbClr val="333333"/>
-                </a:solidFill>
-                <a:latin typeface="Calibri"/>
-              </a:rPr>
-              <a:t> Paso 5: completen la tabla de 5 senales de monitoreo con umbral y accion, actualicen las secciones CI/CD y Monitoreo del informe y suban las 5 preguntas a ExamLab (modulo Talleres) antes del domingo 23:59, verificando que el enlace del run verde abra sin pedir permisos y que cada senal se pueda medir en el diseno que ya dibujaron.</a:t>
-            </a:r>
-          </a:p>
-        </p:txBody>
-      </p:sp>
-      <p:sp>
-        <p:nvSpPr>
-          <p:cNvPr id="6" name="TextBox 5"/>
+              <a:t>Sin cloud de pago ni instalaciones obligatorias de hipervisores/Docker Desktop.</a:t>
+            </a:r>
+          </a:p>
+        </p:txBody>
+      </p:sp>
+      <p:sp>
+        <p:nvSpPr>
+          <p:cNvPr id="14" name="TextBox 13"/>
           <p:cNvSpPr txBox="1"/>
           <p:nvPr/>
         </p:nvSpPr>
@@ -4708,601 +4369,6 @@
 </file>
 
 <file path=ppt/slides/slide12.xml><?xml version="1.0" encoding="utf-8"?>
-<p:sld xmlns:a="http://schemas.openxmlformats.org/drawingml/2006/main" xmlns:p="http://schemas.openxmlformats.org/presentationml/2006/main" xmlns:r="http://schemas.openxmlformats.org/officeDocument/2006/relationships">
-  <p:cSld>
-    <p:bg>
-      <p:bgPr>
-        <a:solidFill>
-          <a:srgbClr val="FFFFFF"/>
-        </a:solidFill>
-        <a:effectLst/>
-      </p:bgPr>
-    </p:bg>
-    <p:spTree>
-      <p:nvGrpSpPr>
-        <p:cNvPr id="1" name=""/>
-        <p:cNvGrpSpPr/>
-        <p:nvPr/>
-      </p:nvGrpSpPr>
-      <p:grpSpPr/>
-      <p:sp>
-        <p:nvSpPr>
-          <p:cNvPr id="2" name="Rectangle 1"/>
-          <p:cNvSpPr/>
-          <p:nvPr/>
-        </p:nvSpPr>
-        <p:spPr>
-          <a:xfrm>
-            <a:off x="0" y="0"/>
-            <a:ext cx="12191695" cy="960120"/>
-          </a:xfrm>
-          <a:prstGeom prst="rect">
-            <a:avLst/>
-          </a:prstGeom>
-          <a:solidFill>
-            <a:srgbClr val="095292"/>
-          </a:solidFill>
-          <a:ln>
-            <a:noFill/>
-          </a:ln>
-        </p:spPr>
-        <p:style>
-          <a:lnRef idx="1">
-            <a:schemeClr val="accent1"/>
-          </a:lnRef>
-          <a:fillRef idx="3">
-            <a:schemeClr val="accent1"/>
-          </a:fillRef>
-          <a:effectRef idx="2">
-            <a:schemeClr val="accent1"/>
-          </a:effectRef>
-          <a:fontRef idx="minor">
-            <a:schemeClr val="lt1"/>
-          </a:fontRef>
-        </p:style>
-        <p:txBody>
-          <a:bodyPr rtlCol="0" anchor="ctr"/>
-          <a:lstStyle/>
-          <a:p>
-            <a:pPr algn="ctr"/>
-          </a:p>
-        </p:txBody>
-      </p:sp>
-      <p:sp>
-        <p:nvSpPr>
-          <p:cNvPr id="3" name="Rectangle 2"/>
-          <p:cNvSpPr/>
-          <p:nvPr/>
-        </p:nvSpPr>
-        <p:spPr>
-          <a:xfrm>
-            <a:off x="0" y="960120"/>
-            <a:ext cx="12191695" cy="41148"/>
-          </a:xfrm>
-          <a:prstGeom prst="rect">
-            <a:avLst/>
-          </a:prstGeom>
-          <a:solidFill>
-            <a:srgbClr val="FFD000"/>
-          </a:solidFill>
-          <a:ln>
-            <a:noFill/>
-          </a:ln>
-        </p:spPr>
-        <p:style>
-          <a:lnRef idx="1">
-            <a:schemeClr val="accent1"/>
-          </a:lnRef>
-          <a:fillRef idx="3">
-            <a:schemeClr val="accent1"/>
-          </a:fillRef>
-          <a:effectRef idx="2">
-            <a:schemeClr val="accent1"/>
-          </a:effectRef>
-          <a:fontRef idx="minor">
-            <a:schemeClr val="lt1"/>
-          </a:fontRef>
-        </p:style>
-        <p:txBody>
-          <a:bodyPr rtlCol="0" anchor="ctr"/>
-          <a:lstStyle/>
-          <a:p>
-            <a:pPr algn="ctr"/>
-          </a:p>
-        </p:txBody>
-      </p:sp>
-      <p:sp>
-        <p:nvSpPr>
-          <p:cNvPr id="4" name="TextBox 3"/>
-          <p:cNvSpPr txBox="1"/>
-          <p:nvPr/>
-        </p:nvSpPr>
-        <p:spPr>
-          <a:xfrm>
-            <a:off x="457200" y="164592"/>
-            <a:ext cx="11277295" cy="502920"/>
-          </a:xfrm>
-          <a:prstGeom prst="rect">
-            <a:avLst/>
-          </a:prstGeom>
-          <a:noFill/>
-        </p:spPr>
-        <p:txBody>
-          <a:bodyPr wrap="square">
-            <a:spAutoFit/>
-          </a:bodyPr>
-          <a:lstStyle/>
-          <a:p>
-            <a:r>
-              <a:rPr sz="2600" b="1" i="0">
-                <a:solidFill>
-                  <a:srgbClr val="FFFFFF"/>
-                </a:solidFill>
-                <a:latin typeface="Calibri"/>
-              </a:rPr>
-              <a:t>Para continuar (PI)</a:t>
-            </a:r>
-          </a:p>
-        </p:txBody>
-      </p:sp>
-      <p:sp>
-        <p:nvSpPr>
-          <p:cNvPr id="5" name="Rounded Rectangle 4"/>
-          <p:cNvSpPr/>
-          <p:nvPr/>
-        </p:nvSpPr>
-        <p:spPr>
-          <a:xfrm>
-            <a:off x="457200" y="1261872"/>
-            <a:ext cx="11277295" cy="1051560"/>
-          </a:xfrm>
-          <a:prstGeom prst="roundRect">
-            <a:avLst>
-              <a:gd name="adj" fmla="val 12000"/>
-            </a:avLst>
-          </a:prstGeom>
-          <a:solidFill>
-            <a:srgbClr val="E8F4FA"/>
-          </a:solidFill>
-          <a:ln>
-            <a:noFill/>
-          </a:ln>
-        </p:spPr>
-        <p:style>
-          <a:lnRef idx="1">
-            <a:schemeClr val="accent1"/>
-          </a:lnRef>
-          <a:fillRef idx="3">
-            <a:schemeClr val="accent1"/>
-          </a:fillRef>
-          <a:effectRef idx="2">
-            <a:schemeClr val="accent1"/>
-          </a:effectRef>
-          <a:fontRef idx="minor">
-            <a:schemeClr val="lt1"/>
-          </a:fontRef>
-        </p:style>
-        <p:txBody>
-          <a:bodyPr rtlCol="0" anchor="ctr"/>
-          <a:lstStyle/>
-          <a:p>
-            <a:pPr algn="ctr"/>
-          </a:p>
-        </p:txBody>
-      </p:sp>
-      <p:sp>
-        <p:nvSpPr>
-          <p:cNvPr id="6" name="Rectangle 5"/>
-          <p:cNvSpPr/>
-          <p:nvPr/>
-        </p:nvSpPr>
-        <p:spPr>
-          <a:xfrm>
-            <a:off x="457200" y="1261872"/>
-            <a:ext cx="128016" cy="1051560"/>
-          </a:xfrm>
-          <a:prstGeom prst="rect">
-            <a:avLst/>
-          </a:prstGeom>
-          <a:solidFill>
-            <a:srgbClr val="269CCB"/>
-          </a:solidFill>
-          <a:ln>
-            <a:noFill/>
-          </a:ln>
-        </p:spPr>
-        <p:style>
-          <a:lnRef idx="1">
-            <a:schemeClr val="accent1"/>
-          </a:lnRef>
-          <a:fillRef idx="3">
-            <a:schemeClr val="accent1"/>
-          </a:fillRef>
-          <a:effectRef idx="2">
-            <a:schemeClr val="accent1"/>
-          </a:effectRef>
-          <a:fontRef idx="minor">
-            <a:schemeClr val="lt1"/>
-          </a:fontRef>
-        </p:style>
-        <p:txBody>
-          <a:bodyPr rtlCol="0" anchor="ctr"/>
-          <a:lstStyle/>
-          <a:p>
-            <a:pPr algn="ctr"/>
-          </a:p>
-        </p:txBody>
-      </p:sp>
-      <p:sp>
-        <p:nvSpPr>
-          <p:cNvPr id="7" name="TextBox 6"/>
-          <p:cNvSpPr txBox="1"/>
-          <p:nvPr/>
-        </p:nvSpPr>
-        <p:spPr>
-          <a:xfrm>
-            <a:off x="777240" y="1399031"/>
-            <a:ext cx="10774375" cy="822959"/>
-          </a:xfrm>
-          <a:prstGeom prst="rect">
-            <a:avLst/>
-          </a:prstGeom>
-          <a:noFill/>
-        </p:spPr>
-        <p:txBody>
-          <a:bodyPr wrap="square">
-            <a:spAutoFit/>
-          </a:bodyPr>
-          <a:lstStyle/>
-          <a:p>
-            <a:r>
-              <a:rPr sz="1200" b="1" i="0">
-                <a:solidFill>
-                  <a:srgbClr val="269CCB"/>
-                </a:solidFill>
-                <a:latin typeface="Calibri"/>
-              </a:rPr>
-              <a:t>Info</a:t>
-            </a:r>
-          </a:p>
-          <a:p>
-            <a:pPr>
-              <a:spcBef>
-                <a:spcPts val="400"/>
-              </a:spcBef>
-            </a:pPr>
-            <a:r>
-              <a:rPr sz="1400" b="0" i="0">
-                <a:solidFill>
-                  <a:srgbClr val="333333"/>
-                </a:solidFill>
-                <a:latin typeface="Calibri"/>
-              </a:rPr>
-              <a:t>Entregable: .github/workflows/ci.yml + sección Monitoreo/CI del informe</a:t>
-            </a:r>
-          </a:p>
-        </p:txBody>
-      </p:sp>
-      <p:sp>
-        <p:nvSpPr>
-          <p:cNvPr id="8" name="Rounded Rectangle 7"/>
-          <p:cNvSpPr/>
-          <p:nvPr/>
-        </p:nvSpPr>
-        <p:spPr>
-          <a:xfrm>
-            <a:off x="457200" y="2478024"/>
-            <a:ext cx="11277295" cy="1051560"/>
-          </a:xfrm>
-          <a:prstGeom prst="roundRect">
-            <a:avLst>
-              <a:gd name="adj" fmla="val 12000"/>
-            </a:avLst>
-          </a:prstGeom>
-          <a:solidFill>
-            <a:srgbClr val="FFF8E1"/>
-          </a:solidFill>
-          <a:ln>
-            <a:noFill/>
-          </a:ln>
-        </p:spPr>
-        <p:style>
-          <a:lnRef idx="1">
-            <a:schemeClr val="accent1"/>
-          </a:lnRef>
-          <a:fillRef idx="3">
-            <a:schemeClr val="accent1"/>
-          </a:fillRef>
-          <a:effectRef idx="2">
-            <a:schemeClr val="accent1"/>
-          </a:effectRef>
-          <a:fontRef idx="minor">
-            <a:schemeClr val="lt1"/>
-          </a:fontRef>
-        </p:style>
-        <p:txBody>
-          <a:bodyPr rtlCol="0" anchor="ctr"/>
-          <a:lstStyle/>
-          <a:p>
-            <a:pPr algn="ctr"/>
-          </a:p>
-        </p:txBody>
-      </p:sp>
-      <p:sp>
-        <p:nvSpPr>
-          <p:cNvPr id="9" name="Rectangle 8"/>
-          <p:cNvSpPr/>
-          <p:nvPr/>
-        </p:nvSpPr>
-        <p:spPr>
-          <a:xfrm>
-            <a:off x="457200" y="2478024"/>
-            <a:ext cx="128016" cy="1051560"/>
-          </a:xfrm>
-          <a:prstGeom prst="rect">
-            <a:avLst/>
-          </a:prstGeom>
-          <a:solidFill>
-            <a:srgbClr val="FFD000"/>
-          </a:solidFill>
-          <a:ln>
-            <a:noFill/>
-          </a:ln>
-        </p:spPr>
-        <p:style>
-          <a:lnRef idx="1">
-            <a:schemeClr val="accent1"/>
-          </a:lnRef>
-          <a:fillRef idx="3">
-            <a:schemeClr val="accent1"/>
-          </a:fillRef>
-          <a:effectRef idx="2">
-            <a:schemeClr val="accent1"/>
-          </a:effectRef>
-          <a:fontRef idx="minor">
-            <a:schemeClr val="lt1"/>
-          </a:fontRef>
-        </p:style>
-        <p:txBody>
-          <a:bodyPr rtlCol="0" anchor="ctr"/>
-          <a:lstStyle/>
-          <a:p>
-            <a:pPr algn="ctr"/>
-          </a:p>
-        </p:txBody>
-      </p:sp>
-      <p:sp>
-        <p:nvSpPr>
-          <p:cNvPr id="10" name="TextBox 9"/>
-          <p:cNvSpPr txBox="1"/>
-          <p:nvPr/>
-        </p:nvSpPr>
-        <p:spPr>
-          <a:xfrm>
-            <a:off x="777240" y="2615184"/>
-            <a:ext cx="10774375" cy="822959"/>
-          </a:xfrm>
-          <a:prstGeom prst="rect">
-            <a:avLst/>
-          </a:prstGeom>
-          <a:noFill/>
-        </p:spPr>
-        <p:txBody>
-          <a:bodyPr wrap="square">
-            <a:spAutoFit/>
-          </a:bodyPr>
-          <a:lstStyle/>
-          <a:p>
-            <a:r>
-              <a:rPr sz="1200" b="1" i="0">
-                <a:solidFill>
-                  <a:srgbClr val="FFD000"/>
-                </a:solidFill>
-                <a:latin typeface="Calibri"/>
-              </a:rPr>
-              <a:t>Aclaración</a:t>
-            </a:r>
-          </a:p>
-          <a:p>
-            <a:pPr>
-              <a:spcBef>
-                <a:spcPts val="400"/>
-              </a:spcBef>
-            </a:pPr>
-            <a:r>
-              <a:rPr sz="1400" b="0" i="0">
-                <a:solidFill>
-                  <a:srgbClr val="333333"/>
-                </a:solidFill>
-                <a:latin typeface="Calibri"/>
-              </a:rPr>
-              <a:t>Subir evidencias al paquete CloudLite (Drive/repo) y a ExamLab (https://uniaj.examlab.workers.dev/) domingo 23:59.</a:t>
-            </a:r>
-          </a:p>
-        </p:txBody>
-      </p:sp>
-      <p:sp>
-        <p:nvSpPr>
-          <p:cNvPr id="11" name="Rounded Rectangle 10"/>
-          <p:cNvSpPr/>
-          <p:nvPr/>
-        </p:nvSpPr>
-        <p:spPr>
-          <a:xfrm>
-            <a:off x="457200" y="3694176"/>
-            <a:ext cx="11277295" cy="1051560"/>
-          </a:xfrm>
-          <a:prstGeom prst="roundRect">
-            <a:avLst>
-              <a:gd name="adj" fmla="val 12000"/>
-            </a:avLst>
-          </a:prstGeom>
-          <a:solidFill>
-            <a:srgbClr val="FBE4E4"/>
-          </a:solidFill>
-          <a:ln>
-            <a:noFill/>
-          </a:ln>
-        </p:spPr>
-        <p:style>
-          <a:lnRef idx="1">
-            <a:schemeClr val="accent1"/>
-          </a:lnRef>
-          <a:fillRef idx="3">
-            <a:schemeClr val="accent1"/>
-          </a:fillRef>
-          <a:effectRef idx="2">
-            <a:schemeClr val="accent1"/>
-          </a:effectRef>
-          <a:fontRef idx="minor">
-            <a:schemeClr val="lt1"/>
-          </a:fontRef>
-        </p:style>
-        <p:txBody>
-          <a:bodyPr rtlCol="0" anchor="ctr"/>
-          <a:lstStyle/>
-          <a:p>
-            <a:pPr algn="ctr"/>
-          </a:p>
-        </p:txBody>
-      </p:sp>
-      <p:sp>
-        <p:nvSpPr>
-          <p:cNvPr id="12" name="Rectangle 11"/>
-          <p:cNvSpPr/>
-          <p:nvPr/>
-        </p:nvSpPr>
-        <p:spPr>
-          <a:xfrm>
-            <a:off x="457200" y="3694176"/>
-            <a:ext cx="128016" cy="1051560"/>
-          </a:xfrm>
-          <a:prstGeom prst="rect">
-            <a:avLst/>
-          </a:prstGeom>
-          <a:solidFill>
-            <a:srgbClr val="A02030"/>
-          </a:solidFill>
-          <a:ln>
-            <a:noFill/>
-          </a:ln>
-        </p:spPr>
-        <p:style>
-          <a:lnRef idx="1">
-            <a:schemeClr val="accent1"/>
-          </a:lnRef>
-          <a:fillRef idx="3">
-            <a:schemeClr val="accent1"/>
-          </a:fillRef>
-          <a:effectRef idx="2">
-            <a:schemeClr val="accent1"/>
-          </a:effectRef>
-          <a:fontRef idx="minor">
-            <a:schemeClr val="lt1"/>
-          </a:fontRef>
-        </p:style>
-        <p:txBody>
-          <a:bodyPr rtlCol="0" anchor="ctr"/>
-          <a:lstStyle/>
-          <a:p>
-            <a:pPr algn="ctr"/>
-          </a:p>
-        </p:txBody>
-      </p:sp>
-      <p:sp>
-        <p:nvSpPr>
-          <p:cNvPr id="13" name="TextBox 12"/>
-          <p:cNvSpPr txBox="1"/>
-          <p:nvPr/>
-        </p:nvSpPr>
-        <p:spPr>
-          <a:xfrm>
-            <a:off x="777240" y="3831336"/>
-            <a:ext cx="10774375" cy="822959"/>
-          </a:xfrm>
-          <a:prstGeom prst="rect">
-            <a:avLst/>
-          </a:prstGeom>
-          <a:noFill/>
-        </p:spPr>
-        <p:txBody>
-          <a:bodyPr wrap="square">
-            <a:spAutoFit/>
-          </a:bodyPr>
-          <a:lstStyle/>
-          <a:p>
-            <a:r>
-              <a:rPr sz="1200" b="1" i="0">
-                <a:solidFill>
-                  <a:srgbClr val="A02030"/>
-                </a:solidFill>
-                <a:latin typeface="Calibri"/>
-              </a:rPr>
-              <a:t>Atención</a:t>
-            </a:r>
-          </a:p>
-          <a:p>
-            <a:pPr>
-              <a:spcBef>
-                <a:spcPts val="400"/>
-              </a:spcBef>
-            </a:pPr>
-            <a:r>
-              <a:rPr sz="1400" b="0" i="0">
-                <a:solidFill>
-                  <a:srgbClr val="333333"/>
-                </a:solidFill>
-                <a:latin typeface="Calibri"/>
-              </a:rPr>
-              <a:t>Sin cloud de pago ni instalaciones obligatorias de hipervisores/Docker Desktop.</a:t>
-            </a:r>
-          </a:p>
-        </p:txBody>
-      </p:sp>
-      <p:sp>
-        <p:nvSpPr>
-          <p:cNvPr id="14" name="TextBox 13"/>
-          <p:cNvSpPr txBox="1"/>
-          <p:nvPr/>
-        </p:nvSpPr>
-        <p:spPr>
-          <a:xfrm>
-            <a:off x="11185855" y="6473952"/>
-            <a:ext cx="640080" cy="274320"/>
-          </a:xfrm>
-          <a:prstGeom prst="rect">
-            <a:avLst/>
-          </a:prstGeom>
-          <a:noFill/>
-        </p:spPr>
-        <p:txBody>
-          <a:bodyPr wrap="square">
-            <a:spAutoFit/>
-          </a:bodyPr>
-          <a:lstStyle/>
-          <a:p>
-            <a:pPr algn="r"/>
-            <a:r>
-              <a:rPr sz="1100" b="0" i="0">
-                <a:solidFill>
-                  <a:srgbClr val="666666"/>
-                </a:solidFill>
-                <a:latin typeface="Calibri"/>
-              </a:rPr>
-              <a:t>12</a:t>
-            </a:r>
-          </a:p>
-        </p:txBody>
-      </p:sp>
-    </p:spTree>
-  </p:cSld>
-  <p:clrMapOvr>
-    <a:masterClrMapping/>
-  </p:clrMapOvr>
-</p:sld>
-</file>
-
-<file path=ppt/slides/slide13.xml><?xml version="1.0" encoding="utf-8"?>
 <p:sld xmlns:a="http://schemas.openxmlformats.org/drawingml/2006/main" xmlns:p="http://schemas.openxmlformats.org/presentationml/2006/main" xmlns:r="http://schemas.openxmlformats.org/officeDocument/2006/relationships">
   <p:cSld>
     <p:bg>
@@ -7976,7 +7042,7 @@
         <p:spPr>
           <a:xfrm>
             <a:off x="457200" y="1591056"/>
-            <a:ext cx="3624986" cy="2299716"/>
+            <a:ext cx="3624986" cy="2331720"/>
           </a:xfrm>
           <a:prstGeom prst="roundRect">
             <a:avLst>
@@ -8114,8 +7180,8 @@
         </p:blipFill>
         <p:spPr>
           <a:xfrm>
-            <a:off x="1659331" y="1847087"/>
-            <a:ext cx="1220724" cy="1220724"/>
+            <a:off x="1643329" y="1847087"/>
+            <a:ext cx="1252728" cy="1252728"/>
           </a:xfrm>
           <a:prstGeom prst="rect">
             <a:avLst/>
@@ -8130,7 +7196,7 @@
         </p:nvSpPr>
         <p:spPr>
           <a:xfrm>
-            <a:off x="530352" y="3159251"/>
+            <a:off x="530352" y="3191256"/>
             <a:ext cx="3478682" cy="621792"/>
           </a:xfrm>
           <a:prstGeom prst="rect">
@@ -8180,7 +7246,7 @@
         <p:spPr>
           <a:xfrm>
             <a:off x="4283354" y="1591056"/>
-            <a:ext cx="3624986" cy="2299716"/>
+            <a:ext cx="3624986" cy="2331720"/>
           </a:xfrm>
           <a:prstGeom prst="roundRect">
             <a:avLst>
@@ -8318,8 +7384,8 @@
         </p:blipFill>
         <p:spPr>
           <a:xfrm>
-            <a:off x="5485485" y="1847087"/>
-            <a:ext cx="1220724" cy="1220724"/>
+            <a:off x="5469483" y="1847087"/>
+            <a:ext cx="1252728" cy="1252728"/>
           </a:xfrm>
           <a:prstGeom prst="rect">
             <a:avLst/>
@@ -8334,7 +7400,7 @@
         </p:nvSpPr>
         <p:spPr>
           <a:xfrm>
-            <a:off x="4356506" y="3159251"/>
+            <a:off x="4356506" y="3191256"/>
             <a:ext cx="3478682" cy="621792"/>
           </a:xfrm>
           <a:prstGeom prst="rect">
@@ -8384,7 +7450,7 @@
         <p:spPr>
           <a:xfrm>
             <a:off x="8109508" y="1591056"/>
-            <a:ext cx="3624986" cy="2299716"/>
+            <a:ext cx="3624986" cy="2331720"/>
           </a:xfrm>
           <a:prstGeom prst="roundRect">
             <a:avLst>
@@ -8508,7 +7574,7 @@
       </p:sp>
       <p:pic>
         <p:nvPicPr>
-          <p:cNvPr id="19" name="Picture 18" descr="mermaid.png"/>
+          <p:cNvPr id="19" name="Picture 18" descr="examlab.png"/>
           <p:cNvPicPr>
             <a:picLocks noChangeAspect="1"/>
           </p:cNvPicPr>
@@ -8522,8 +7588,8 @@
         </p:blipFill>
         <p:spPr>
           <a:xfrm>
-            <a:off x="9311640" y="1847087"/>
-            <a:ext cx="1220724" cy="1220724"/>
+            <a:off x="9295638" y="1847087"/>
+            <a:ext cx="1252728" cy="1252728"/>
           </a:xfrm>
           <a:prstGeom prst="rect">
             <a:avLst/>
@@ -8538,7 +7604,7 @@
         </p:nvSpPr>
         <p:spPr>
           <a:xfrm>
-            <a:off x="8182660" y="3159251"/>
+            <a:off x="8182660" y="3191256"/>
             <a:ext cx="3478682" cy="621792"/>
           </a:xfrm>
           <a:prstGeom prst="rect">
@@ -8558,7 +7624,7 @@
                 </a:solidFill>
                 <a:latin typeface="Calibri"/>
               </a:rPr>
-              <a:t>Mermaid</a:t>
+              <a:t>ExamLab</a:t>
             </a:r>
           </a:p>
           <a:p>
@@ -8574,210 +7640,6 @@
                 </a:solidFill>
                 <a:latin typeface="Calibri"/>
               </a:rPr>
-              <a:t>Codigo del diagrama</a:t>
-            </a:r>
-          </a:p>
-        </p:txBody>
-      </p:sp>
-      <p:sp>
-        <p:nvSpPr>
-          <p:cNvPr id="21" name="Rounded Rectangle 20"/>
-          <p:cNvSpPr/>
-          <p:nvPr/>
-        </p:nvSpPr>
-        <p:spPr>
-          <a:xfrm>
-            <a:off x="4283354" y="4055364"/>
-            <a:ext cx="3624986" cy="2299716"/>
-          </a:xfrm>
-          <a:prstGeom prst="roundRect">
-            <a:avLst>
-              <a:gd name="adj" fmla="val 12000"/>
-            </a:avLst>
-          </a:prstGeom>
-          <a:solidFill>
-            <a:srgbClr val="F2F2F2"/>
-          </a:solidFill>
-          <a:ln>
-            <a:noFill/>
-          </a:ln>
-        </p:spPr>
-        <p:style>
-          <a:lnRef idx="1">
-            <a:schemeClr val="accent1"/>
-          </a:lnRef>
-          <a:fillRef idx="3">
-            <a:schemeClr val="accent1"/>
-          </a:fillRef>
-          <a:effectRef idx="2">
-            <a:schemeClr val="accent1"/>
-          </a:effectRef>
-          <a:fontRef idx="minor">
-            <a:schemeClr val="lt1"/>
-          </a:fontRef>
-        </p:style>
-        <p:txBody>
-          <a:bodyPr rtlCol="0" anchor="ctr"/>
-          <a:lstStyle/>
-          <a:p>
-            <a:pPr algn="ctr"/>
-          </a:p>
-        </p:txBody>
-      </p:sp>
-      <p:sp>
-        <p:nvSpPr>
-          <p:cNvPr id="22" name="Rectangle 21"/>
-          <p:cNvSpPr/>
-          <p:nvPr/>
-        </p:nvSpPr>
-        <p:spPr>
-          <a:xfrm>
-            <a:off x="4283354" y="4055364"/>
-            <a:ext cx="3624986" cy="64008"/>
-          </a:xfrm>
-          <a:prstGeom prst="rect">
-            <a:avLst/>
-          </a:prstGeom>
-          <a:solidFill>
-            <a:srgbClr val="095292"/>
-          </a:solidFill>
-          <a:ln>
-            <a:noFill/>
-          </a:ln>
-        </p:spPr>
-        <p:style>
-          <a:lnRef idx="1">
-            <a:schemeClr val="accent1"/>
-          </a:lnRef>
-          <a:fillRef idx="3">
-            <a:schemeClr val="accent1"/>
-          </a:fillRef>
-          <a:effectRef idx="2">
-            <a:schemeClr val="accent1"/>
-          </a:effectRef>
-          <a:fontRef idx="minor">
-            <a:schemeClr val="lt1"/>
-          </a:fontRef>
-        </p:style>
-        <p:txBody>
-          <a:bodyPr rtlCol="0" anchor="ctr"/>
-          <a:lstStyle/>
-          <a:p>
-            <a:pPr algn="ctr"/>
-          </a:p>
-        </p:txBody>
-      </p:sp>
-      <p:sp>
-        <p:nvSpPr>
-          <p:cNvPr id="23" name="Rectangle 22"/>
-          <p:cNvSpPr/>
-          <p:nvPr/>
-        </p:nvSpPr>
-        <p:spPr>
-          <a:xfrm>
-            <a:off x="4283354" y="4119372"/>
-            <a:ext cx="3624986" cy="27432"/>
-          </a:xfrm>
-          <a:prstGeom prst="rect">
-            <a:avLst/>
-          </a:prstGeom>
-          <a:solidFill>
-            <a:srgbClr val="FFD000"/>
-          </a:solidFill>
-          <a:ln>
-            <a:noFill/>
-          </a:ln>
-        </p:spPr>
-        <p:style>
-          <a:lnRef idx="1">
-            <a:schemeClr val="accent1"/>
-          </a:lnRef>
-          <a:fillRef idx="3">
-            <a:schemeClr val="accent1"/>
-          </a:fillRef>
-          <a:effectRef idx="2">
-            <a:schemeClr val="accent1"/>
-          </a:effectRef>
-          <a:fontRef idx="minor">
-            <a:schemeClr val="lt1"/>
-          </a:fontRef>
-        </p:style>
-        <p:txBody>
-          <a:bodyPr rtlCol="0" anchor="ctr"/>
-          <a:lstStyle/>
-          <a:p>
-            <a:pPr algn="ctr"/>
-          </a:p>
-        </p:txBody>
-      </p:sp>
-      <p:pic>
-        <p:nvPicPr>
-          <p:cNvPr id="24" name="Picture 23" descr="examlab.png"/>
-          <p:cNvPicPr>
-            <a:picLocks noChangeAspect="1"/>
-          </p:cNvPicPr>
-          <p:nvPr/>
-        </p:nvPicPr>
-        <p:blipFill>
-          <a:blip r:embed="rId5"/>
-          <a:stretch>
-            <a:fillRect/>
-          </a:stretch>
-        </p:blipFill>
-        <p:spPr>
-          <a:xfrm>
-            <a:off x="5485485" y="4311396"/>
-            <a:ext cx="1220724" cy="1220724"/>
-          </a:xfrm>
-          <a:prstGeom prst="rect">
-            <a:avLst/>
-          </a:prstGeom>
-        </p:spPr>
-      </p:pic>
-      <p:sp>
-        <p:nvSpPr>
-          <p:cNvPr id="25" name="TextBox 24"/>
-          <p:cNvSpPr txBox="1"/>
-          <p:nvPr/>
-        </p:nvSpPr>
-        <p:spPr>
-          <a:xfrm>
-            <a:off x="4356506" y="5623560"/>
-            <a:ext cx="3478682" cy="621792"/>
-          </a:xfrm>
-          <a:prstGeom prst="rect">
-            <a:avLst/>
-          </a:prstGeom>
-          <a:noFill/>
-        </p:spPr>
-        <p:txBody>
-          <a:bodyPr wrap="square" anchor="t"/>
-          <a:lstStyle/>
-          <a:p>
-            <a:pPr algn="ctr"/>
-            <a:r>
-              <a:rPr sz="1300" b="1" i="0">
-                <a:solidFill>
-                  <a:srgbClr val="095292"/>
-                </a:solidFill>
-                <a:latin typeface="Calibri"/>
-              </a:rPr>
-              <a:t>ExamLab</a:t>
-            </a:r>
-          </a:p>
-          <a:p>
-            <a:pPr algn="ctr">
-              <a:spcBef>
-                <a:spcPts val="200"/>
-              </a:spcBef>
-            </a:pPr>
-            <a:r>
-              <a:rPr sz="1000" b="0" i="0">
-                <a:solidFill>
-                  <a:srgbClr val="666666"/>
-                </a:solidFill>
-                <a:latin typeface="Calibri"/>
-              </a:rPr>
               <a:t>Donde se entrega</a:t>
             </a:r>
           </a:p>
@@ -8785,7 +7647,7 @@
       </p:sp>
       <p:sp>
         <p:nvSpPr>
-          <p:cNvPr id="26" name="TextBox 25"/>
+          <p:cNvPr id="21" name="TextBox 20"/>
           <p:cNvSpPr txBox="1"/>
           <p:nvPr/>
         </p:nvSpPr>

--- a/Arquitectura de Sistemas Computacionales/Clases/Clase 8 - Monitoreo optimizacion y CI-CD/Presentacion.pptx
+++ b/Arquitectura de Sistemas Computacionales/Clases/Clase 8 - Monitoreo optimizacion y CI-CD/Presentacion.pptx
@@ -5718,7 +5718,7 @@
                 </a:solidFill>
                 <a:latin typeface="Calibri"/>
               </a:rPr>
-              <a:t>–   GitHub Actions free: runners hosted; YAML en `.github/workflows/`.</a:t>
+              <a:t>–   GitHub Actions free: runners hosted; YAML en «.github/workflows/».</a:t>
             </a:r>
           </a:p>
           <a:p>
@@ -6010,7 +6010,7 @@
                 </a:solidFill>
                 <a:latin typeface="Calibri"/>
               </a:rPr>
-              <a:t>–   Deploy stage: `echo Deploy simulado a entorno lab`.</a:t>
+              <a:t>–   Deploy stage: «echo Deploy simulado a entorno lab».</a:t>
             </a:r>
           </a:p>
         </p:txBody>

--- a/Arquitectura de Sistemas Computacionales/Clases/Clase 8 - Monitoreo optimizacion y CI-CD/Presentacion.pptx
+++ b/Arquitectura de Sistemas Computacionales/Clases/Clase 8 - Monitoreo optimizacion y CI-CD/Presentacion.pptx
@@ -5734,7 +5734,25 @@
                 </a:solidFill>
                 <a:latin typeface="Calibri"/>
               </a:rPr>
-              <a:t>–   Workflow del stub CloudLite.</a:t>
+              <a:t>–   </a:t>
+            </a:r>
+            <a:r>
+              <a:rPr sz="1600" b="1" i="0">
+                <a:solidFill>
+                  <a:srgbClr val="333333"/>
+                </a:solidFill>
+                <a:latin typeface="Calibri"/>
+              </a:rPr>
+              <a:t>«Ya tenemos CD» porque el YAML tiene un paso «deploy» resta puntos.</a:t>
+            </a:r>
+            <a:r>
+              <a:rPr sz="1600" b="0" i="0">
+                <a:solidFill>
+                  <a:srgbClr val="333333"/>
+                </a:solidFill>
+                <a:latin typeface="Calibri"/>
+              </a:rPr>
+              <a:t> Aquí llega a «listo para desplegar».</a:t>
             </a:r>
           </a:p>
         </p:txBody>
@@ -5774,30 +5792,6 @@
           </a:p>
         </p:txBody>
       </p:sp>
-      <p:pic>
-        <p:nvPicPr>
-          <p:cNvPr id="7" name="Picture 6" descr="salida-actions-run.png"/>
-          <p:cNvPicPr>
-            <a:picLocks noChangeAspect="1"/>
-          </p:cNvPicPr>
-          <p:nvPr/>
-        </p:nvPicPr>
-        <p:blipFill>
-          <a:blip r:embed="rId2"/>
-          <a:stretch>
-            <a:fillRect/>
-          </a:stretch>
-        </p:blipFill>
-        <p:spPr>
-          <a:xfrm>
-            <a:off x="8625535" y="5279938"/>
-            <a:ext cx="3108960" cy="1120861"/>
-          </a:xfrm>
-          <a:prstGeom prst="rect">
-            <a:avLst/>
-          </a:prstGeom>
-        </p:spPr>
-      </p:pic>
     </p:spTree>
   </p:cSld>
   <p:clrMapOvr>
@@ -5978,7 +5972,61 @@
                 </a:solidFill>
                 <a:latin typeface="Calibri"/>
               </a:rPr>
-              <a:t>–   on: push · jobs · steps: checkout → setup → test → upload artifact.</a:t>
+              <a:t>–   Tres bloques que se califican: </a:t>
+            </a:r>
+            <a:r>
+              <a:rPr sz="1600" b="1" i="0">
+                <a:solidFill>
+                  <a:srgbClr val="333333"/>
+                </a:solidFill>
+                <a:latin typeface="Calibri"/>
+              </a:rPr>
+              <a:t>disparadores</a:t>
+            </a:r>
+            <a:r>
+              <a:rPr sz="1600" b="0" i="0">
+                <a:solidFill>
+                  <a:srgbClr val="333333"/>
+                </a:solidFill>
+                <a:latin typeface="Calibri"/>
+              </a:rPr>
+              <a:t> («on») · </a:t>
+            </a:r>
+            <a:r>
+              <a:rPr sz="1600" b="1" i="0">
+                <a:solidFill>
+                  <a:srgbClr val="333333"/>
+                </a:solidFill>
+                <a:latin typeface="Calibri"/>
+              </a:rPr>
+              <a:t>entorno</a:t>
+            </a:r>
+            <a:r>
+              <a:rPr sz="1600" b="0" i="0">
+                <a:solidFill>
+                  <a:srgbClr val="333333"/>
+                </a:solidFill>
+                <a:latin typeface="Calibri"/>
+              </a:rPr>
+              <a:t> («runs-on») · </a:t>
+            </a:r>
+            <a:r>
+              <a:rPr sz="1600" b="1" i="0">
+                <a:solidFill>
+                  <a:srgbClr val="333333"/>
+                </a:solidFill>
+                <a:latin typeface="Calibri"/>
+              </a:rPr>
+              <a:t>pasos</a:t>
+            </a:r>
+            <a:r>
+              <a:rPr sz="1600" b="0" i="0">
+                <a:solidFill>
+                  <a:srgbClr val="333333"/>
+                </a:solidFill>
+                <a:latin typeface="Calibri"/>
+              </a:rPr>
+              <a:t>.</a:t>
             </a:r>
           </a:p>
           <a:p>
@@ -5994,7 +6042,61 @@
                 </a:solidFill>
                 <a:latin typeface="Calibri"/>
               </a:rPr>
-              <a:t>–   Secrets solo vía Settings; nunca en el YAML en claro.</a:t>
+              <a:t>–   Los pasos, en este orden: </a:t>
+            </a:r>
+            <a:r>
+              <a:rPr sz="1600" b="1" i="0">
+                <a:solidFill>
+                  <a:srgbClr val="333333"/>
+                </a:solidFill>
+                <a:latin typeface="Calibri"/>
+              </a:rPr>
+              <a:t>construcción</a:t>
+            </a:r>
+            <a:r>
+              <a:rPr sz="1600" b="0" i="0">
+                <a:solidFill>
+                  <a:srgbClr val="333333"/>
+                </a:solidFill>
+                <a:latin typeface="Calibri"/>
+              </a:rPr>
+              <a:t> → </a:t>
+            </a:r>
+            <a:r>
+              <a:rPr sz="1600" b="1" i="0">
+                <a:solidFill>
+                  <a:srgbClr val="333333"/>
+                </a:solidFill>
+                <a:latin typeface="Calibri"/>
+              </a:rPr>
+              <a:t>prueba</a:t>
+            </a:r>
+            <a:r>
+              <a:rPr sz="1600" b="0" i="0">
+                <a:solidFill>
+                  <a:srgbClr val="333333"/>
+                </a:solidFill>
+                <a:latin typeface="Calibri"/>
+              </a:rPr>
+              <a:t> → </a:t>
+            </a:r>
+            <a:r>
+              <a:rPr sz="1600" b="1" i="0">
+                <a:solidFill>
+                  <a:srgbClr val="333333"/>
+                </a:solidFill>
+                <a:latin typeface="Calibri"/>
+              </a:rPr>
+              <a:t>despliegue simulado</a:t>
+            </a:r>
+            <a:r>
+              <a:rPr sz="1600" b="0" i="0">
+                <a:solidFill>
+                  <a:srgbClr val="333333"/>
+                </a:solidFill>
+                <a:latin typeface="Calibri"/>
+              </a:rPr>
+              <a:t>.</a:t>
             </a:r>
           </a:p>
           <a:p>
@@ -6010,7 +6112,59 @@
                 </a:solidFill>
                 <a:latin typeface="Calibri"/>
               </a:rPr>
-              <a:t>–   Deploy stage: «echo Deploy simulado a entorno lab».</a:t>
+              <a:t>–   Secrets solo vía Settings; nunca en el YAML en claro (</a:t>
+            </a:r>
+            <a:r>
+              <a:rPr sz="1600" b="1" i="0">
+                <a:solidFill>
+                  <a:srgbClr val="333333"/>
+                </a:solidFill>
+                <a:latin typeface="Calibri"/>
+              </a:rPr>
+              <a:t>cero en la pregunta si aparece uno</a:t>
+            </a:r>
+            <a:r>
+              <a:rPr sz="1600" b="0" i="0">
+                <a:solidFill>
+                  <a:srgbClr val="333333"/>
+                </a:solidFill>
+                <a:latin typeface="Calibri"/>
+              </a:rPr>
+              <a:t>).</a:t>
+            </a:r>
+          </a:p>
+          <a:p>
+            <a:pPr>
+              <a:spcAft>
+                <a:spcPts val="800"/>
+              </a:spcAft>
+            </a:pPr>
+            <a:r>
+              <a:rPr sz="1600" b="0" i="0">
+                <a:solidFill>
+                  <a:srgbClr val="333333"/>
+                </a:solidFill>
+                <a:latin typeface="Calibri"/>
+              </a:rPr>
+              <a:t>–   </a:t>
+            </a:r>
+            <a:r>
+              <a:rPr sz="1600" b="1" i="0">
+                <a:solidFill>
+                  <a:srgbClr val="333333"/>
+                </a:solidFill>
+                <a:latin typeface="Calibri"/>
+              </a:rPr>
+              <a:t>Un CI que solo imprime «OK» no es CI:</a:t>
+            </a:r>
+            <a:r>
+              <a:rPr sz="1600" b="0" i="0">
+                <a:solidFill>
+                  <a:srgbClr val="333333"/>
+                </a:solidFill>
+                <a:latin typeface="Calibri"/>
+              </a:rPr>
+              <a:t> tienes que poder decir qué error lo pondría rojo.</a:t>
             </a:r>
           </a:p>
         </p:txBody>
@@ -6246,7 +6400,59 @@
                 </a:solidFill>
                 <a:latin typeface="Calibri"/>
               </a:rPr>
-              <a:t>–   Logs estructurados + healthcheck del contenedor.</a:t>
+              <a:t>–   </a:t>
+            </a:r>
+            <a:r>
+              <a:rPr sz="1600" b="1" i="0">
+                <a:solidFill>
+                  <a:srgbClr val="333333"/>
+                </a:solidFill>
+                <a:latin typeface="Calibri"/>
+              </a:rPr>
+              <a:t>Cada señal va con su umbral</a:t>
+            </a:r>
+            <a:r>
+              <a:rPr sz="1600" b="0" i="0">
+                <a:solidFill>
+                  <a:srgbClr val="333333"/>
+                </a:solidFill>
+                <a:latin typeface="Calibri"/>
+              </a:rPr>
+              <a:t>: «medimos la latencia» no permite decidir nada.</a:t>
+            </a:r>
+          </a:p>
+          <a:p>
+            <a:pPr>
+              <a:spcAft>
+                <a:spcPts val="800"/>
+              </a:spcAft>
+            </a:pPr>
+            <a:r>
+              <a:rPr sz="1600" b="0" i="0">
+                <a:solidFill>
+                  <a:srgbClr val="333333"/>
+                </a:solidFill>
+                <a:latin typeface="Calibri"/>
+              </a:rPr>
+              <a:t>–   Al menos una debe ser un </a:t>
+            </a:r>
+            <a:r>
+              <a:rPr sz="1600" b="1" i="0">
+                <a:solidFill>
+                  <a:srgbClr val="333333"/>
+                </a:solidFill>
+                <a:latin typeface="Calibri"/>
+              </a:rPr>
+              <a:t>registro</a:t>
+            </a:r>
+            <a:r>
+              <a:rPr sz="1600" b="0" i="0">
+                <a:solidFill>
+                  <a:srgbClr val="333333"/>
+                </a:solidFill>
+                <a:latin typeface="Calibri"/>
+              </a:rPr>
+              <a:t> (log), no una métrica numérica.</a:t>
             </a:r>
           </a:p>
           <a:p>
@@ -6618,7 +6824,7 @@
                 </a:solidFill>
                 <a:latin typeface="Calibri"/>
               </a:rPr>
-              <a:t>on: [push, pull_request]</a:t>
+              <a:t>on: [push, pull_request]          # 1. disparadores</a:t>
             </a:r>
           </a:p>
           <a:p>
@@ -6666,7 +6872,7 @@
                 </a:solidFill>
                 <a:latin typeface="Calibri"/>
               </a:rPr>
-              <a:t>    runs-on: ubuntu-latest</a:t>
+              <a:t>    runs-on: ubuntu-latest        # 2. entorno de ejecucion</a:t>
             </a:r>
           </a:p>
           <a:p>
@@ -6746,7 +6952,7 @@
                 </a:solidFill>
                 <a:latin typeface="Calibri"/>
               </a:rPr>
-              <a:t>      - run: npm ci</a:t>
+              <a:t>      - name: Construir</a:t>
             </a:r>
           </a:p>
           <a:p>
@@ -6762,7 +6968,7 @@
                 </a:solidFill>
                 <a:latin typeface="Calibri"/>
               </a:rPr>
-              <a:t>      - run: npm test              # &lt;- esto es lo que lo hace CI</a:t>
+              <a:t>        run: npm ci &amp;&amp; docker build -t cloudlite-api:0.1.0 .</a:t>
             </a:r>
           </a:p>
           <a:p>
@@ -6778,7 +6984,55 @@
                 </a:solidFill>
                 <a:latin typeface="Calibri"/>
               </a:rPr>
-              <a:t>      - run: docker build -t cloudlite-api .</a:t>
+              <a:t>      - name: Probar</a:t>
+            </a:r>
+          </a:p>
+          <a:p>
+            <a:pPr>
+              <a:spcAft>
+                <a:spcPts val="400"/>
+              </a:spcAft>
+            </a:pPr>
+            <a:r>
+              <a:rPr sz="1400" b="0" i="0">
+                <a:solidFill>
+                  <a:srgbClr val="FFFFFF"/>
+                </a:solidFill>
+                <a:latin typeface="Calibri"/>
+              </a:rPr>
+              <a:t>        run: npm test              # &lt;- si esto no puede fallar, no es CI</a:t>
+            </a:r>
+          </a:p>
+          <a:p>
+            <a:pPr>
+              <a:spcAft>
+                <a:spcPts val="400"/>
+              </a:spcAft>
+            </a:pPr>
+            <a:r>
+              <a:rPr sz="1400" b="0" i="0">
+                <a:solidFill>
+                  <a:srgbClr val="FFFFFF"/>
+                </a:solidFill>
+                <a:latin typeface="Calibri"/>
+              </a:rPr>
+              <a:t>      - name: Despliegue SIMULADO (no despliega a ningun servidor)</a:t>
+            </a:r>
+          </a:p>
+          <a:p>
+            <a:pPr>
+              <a:spcAft>
+                <a:spcPts val="400"/>
+              </a:spcAft>
+            </a:pPr>
+            <a:r>
+              <a:rPr sz="1400" b="0" i="0">
+                <a:solidFill>
+                  <a:srgbClr val="FFFFFF"/>
+                </a:solidFill>
+                <a:latin typeface="Calibri"/>
+              </a:rPr>
+              <a:t>        run: echo "Artefacto cloudlite-api:0.1.0 listo para desplegar"</a:t>
             </a:r>
           </a:p>
         </p:txBody>
@@ -6813,7 +7067,7 @@
                 </a:solidFill>
                 <a:latin typeface="Calibri"/>
               </a:rPr>
-              <a:t>Secretos con ${{ secrets.NOMBRE }}, NUNCA en claro dentro del YAML.</a:t>
+              <a:t>Los tres pasos, en orden, y el ultimo rotulado como simulado. Secretos con ${{ secrets.NOMBRE }}, NUNCA en claro dentro del YAML.</a:t>
             </a:r>
           </a:p>
         </p:txBody>

--- a/Arquitectura de Sistemas Computacionales/Clases/Clase 8 - Monitoreo optimizacion y CI-CD/Presentacion.pptx
+++ b/Arquitectura de Sistemas Computacionales/Clases/Clase 8 - Monitoreo optimizacion y CI-CD/Presentacion.pptx
@@ -3608,7 +3608,7 @@
               </a:spcAft>
             </a:pPr>
             <a:r>
-              <a:rPr sz="1600" b="1" i="0">
+              <a:rPr sz="2000" b="1" i="0">
                 <a:solidFill>
                   <a:srgbClr val="333333"/>
                 </a:solidFill>
@@ -3617,7 +3617,7 @@
               <a:t>1.</a:t>
             </a:r>
             <a:r>
-              <a:rPr sz="1600" b="0" i="0">
+              <a:rPr sz="2000" b="0" i="0">
                 <a:solidFill>
                   <a:srgbClr val="333333"/>
                 </a:solidFill>
@@ -3633,7 +3633,7 @@
               </a:spcAft>
             </a:pPr>
             <a:r>
-              <a:rPr sz="1600" b="0" i="0">
+              <a:rPr sz="2000" b="0" i="0">
                 <a:solidFill>
                   <a:srgbClr val="333333"/>
                 </a:solidFill>
@@ -3642,7 +3642,7 @@
               <a:t>–   </a:t>
             </a:r>
             <a:r>
-              <a:rPr sz="1600" b="1" i="0">
+              <a:rPr sz="2000" b="1" i="0">
                 <a:solidFill>
                   <a:srgbClr val="333333"/>
                 </a:solidFill>
@@ -3651,7 +3651,7 @@
               <a:t>2.</a:t>
             </a:r>
             <a:r>
-              <a:rPr sz="1600" b="0" i="0">
+              <a:rPr sz="2000" b="0" i="0">
                 <a:solidFill>
                   <a:srgbClr val="333333"/>
                 </a:solidFill>
@@ -3667,7 +3667,7 @@
               </a:spcAft>
             </a:pPr>
             <a:r>
-              <a:rPr sz="1600" b="0" i="0">
+              <a:rPr sz="2000" b="0" i="0">
                 <a:solidFill>
                   <a:srgbClr val="333333"/>
                 </a:solidFill>
@@ -3676,7 +3676,7 @@
               <a:t>–   </a:t>
             </a:r>
             <a:r>
-              <a:rPr sz="1600" b="1" i="0">
+              <a:rPr sz="2000" b="1" i="0">
                 <a:solidFill>
                   <a:srgbClr val="333333"/>
                 </a:solidFill>
@@ -3685,7 +3685,7 @@
               <a:t>3.</a:t>
             </a:r>
             <a:r>
-              <a:rPr sz="1600" b="0" i="0">
+              <a:rPr sz="2000" b="0" i="0">
                 <a:solidFill>
                   <a:srgbClr val="333333"/>
                 </a:solidFill>
@@ -3701,7 +3701,7 @@
               </a:spcAft>
             </a:pPr>
             <a:r>
-              <a:rPr sz="1600" b="0" i="0">
+              <a:rPr sz="2000" b="0" i="0">
                 <a:solidFill>
                   <a:srgbClr val="333333"/>
                 </a:solidFill>
@@ -3710,7 +3710,7 @@
               <a:t>–   </a:t>
             </a:r>
             <a:r>
-              <a:rPr sz="1600" b="1" i="0">
+              <a:rPr sz="2000" b="1" i="0">
                 <a:solidFill>
                   <a:srgbClr val="333333"/>
                 </a:solidFill>
@@ -3719,7 +3719,7 @@
               <a:t>4.</a:t>
             </a:r>
             <a:r>
-              <a:rPr sz="1600" b="0" i="0">
+              <a:rPr sz="2000" b="0" i="0">
                 <a:solidFill>
                   <a:srgbClr val="333333"/>
                 </a:solidFill>
@@ -4766,7 +4766,7 @@
               </a:spcAft>
             </a:pPr>
             <a:r>
-              <a:rPr sz="1600" b="0" i="0">
+              <a:rPr sz="2000" b="0" i="0">
                 <a:solidFill>
                   <a:srgbClr val="333333"/>
                 </a:solidFill>
@@ -4775,7 +4775,7 @@
               <a:t>–   </a:t>
             </a:r>
             <a:r>
-              <a:rPr sz="1600" b="1" i="0">
+              <a:rPr sz="2000" b="1" i="0">
                 <a:solidFill>
                   <a:srgbClr val="333333"/>
                 </a:solidFill>
@@ -4784,7 +4784,7 @@
               <a:t>0–10</a:t>
             </a:r>
             <a:r>
-              <a:rPr sz="1600" b="0" i="0">
+              <a:rPr sz="2000" b="0" i="0">
                 <a:solidFill>
                   <a:srgbClr val="333333"/>
                 </a:solidFill>
@@ -4800,7 +4800,7 @@
               </a:spcAft>
             </a:pPr>
             <a:r>
-              <a:rPr sz="1600" b="1" i="0">
+              <a:rPr sz="2000" b="1" i="0">
                 <a:solidFill>
                   <a:srgbClr val="333333"/>
                 </a:solidFill>
@@ -4809,7 +4809,7 @@
               <a:t>10–40</a:t>
             </a:r>
             <a:r>
-              <a:rPr sz="1600" b="0" i="0">
+              <a:rPr sz="2000" b="0" i="0">
                 <a:solidFill>
                   <a:srgbClr val="333333"/>
                 </a:solidFill>
@@ -4825,7 +4825,7 @@
               </a:spcAft>
             </a:pPr>
             <a:r>
-              <a:rPr sz="1600" b="0" i="0">
+              <a:rPr sz="2000" b="0" i="0">
                 <a:solidFill>
                   <a:srgbClr val="333333"/>
                 </a:solidFill>
@@ -4834,7 +4834,7 @@
               <a:t>–   </a:t>
             </a:r>
             <a:r>
-              <a:rPr sz="1600" b="1" i="0">
+              <a:rPr sz="2000" b="1" i="0">
                 <a:solidFill>
                   <a:srgbClr val="333333"/>
                 </a:solidFill>
@@ -4843,7 +4843,7 @@
               <a:t>40–100</a:t>
             </a:r>
             <a:r>
-              <a:rPr sz="1600" b="0" i="0">
+              <a:rPr sz="2000" b="0" i="0">
                 <a:solidFill>
                   <a:srgbClr val="333333"/>
                 </a:solidFill>
@@ -4859,7 +4859,7 @@
               </a:spcAft>
             </a:pPr>
             <a:r>
-              <a:rPr sz="1600" b="1" i="0">
+              <a:rPr sz="2000" b="1" i="0">
                 <a:solidFill>
                   <a:srgbClr val="333333"/>
                 </a:solidFill>
@@ -4868,7 +4868,7 @@
               <a:t>100–115</a:t>
             </a:r>
             <a:r>
-              <a:rPr sz="1600" b="0" i="0">
+              <a:rPr sz="2000" b="0" i="0">
                 <a:solidFill>
                   <a:srgbClr val="333333"/>
                 </a:solidFill>
@@ -4884,7 +4884,7 @@
               </a:spcAft>
             </a:pPr>
             <a:r>
-              <a:rPr sz="1600" b="1" i="0">
+              <a:rPr sz="2000" b="1" i="0">
                 <a:solidFill>
                   <a:srgbClr val="333333"/>
                 </a:solidFill>
@@ -4893,7 +4893,7 @@
               <a:t>115–120</a:t>
             </a:r>
             <a:r>
-              <a:rPr sz="1600" b="0" i="0">
+              <a:rPr sz="2000" b="0" i="0">
                 <a:solidFill>
                   <a:srgbClr val="333333"/>
                 </a:solidFill>
@@ -5113,7 +5113,7 @@
               </a:spcAft>
             </a:pPr>
             <a:r>
-              <a:rPr sz="1600" b="0" i="0">
+              <a:rPr sz="2000" b="0" i="0">
                 <a:solidFill>
                   <a:srgbClr val="333333"/>
                 </a:solidFill>
@@ -5129,7 +5129,7 @@
               </a:spcAft>
             </a:pPr>
             <a:r>
-              <a:rPr sz="1600" b="0" i="0">
+              <a:rPr sz="2000" b="0" i="0">
                 <a:solidFill>
                   <a:srgbClr val="333333"/>
                 </a:solidFill>
@@ -5145,7 +5145,7 @@
               </a:spcAft>
             </a:pPr>
             <a:r>
-              <a:rPr sz="1600" b="0" i="0">
+              <a:rPr sz="2000" b="0" i="0">
                 <a:solidFill>
                   <a:srgbClr val="333333"/>
                 </a:solidFill>
@@ -5365,7 +5365,7 @@
               </a:spcAft>
             </a:pPr>
             <a:r>
-              <a:rPr sz="1600" b="0" i="0">
+              <a:rPr sz="2000" b="0" i="0">
                 <a:solidFill>
                   <a:srgbClr val="333333"/>
                 </a:solidFill>
@@ -5374,7 +5374,7 @@
               <a:t>–   </a:t>
             </a:r>
             <a:r>
-              <a:rPr sz="1600" b="1" i="0">
+              <a:rPr sz="2000" b="1" i="0">
                 <a:solidFill>
                   <a:srgbClr val="333333"/>
                 </a:solidFill>
@@ -5383,7 +5383,7 @@
               <a:t>Entregable:</a:t>
             </a:r>
             <a:r>
-              <a:rPr sz="1600" b="0" i="0">
+              <a:rPr sz="2000" b="0" i="0">
                 <a:solidFill>
                   <a:srgbClr val="333333"/>
                 </a:solidFill>
@@ -5399,7 +5399,7 @@
               </a:spcAft>
             </a:pPr>
             <a:r>
-              <a:rPr sz="1600" b="0" i="0">
+              <a:rPr sz="2000" b="0" i="0">
                 <a:solidFill>
                   <a:srgbClr val="333333"/>
                 </a:solidFill>
@@ -5408,7 +5408,7 @@
               <a:t>–   Herramienta: </a:t>
             </a:r>
             <a:r>
-              <a:rPr sz="1600" b="1" i="0">
+              <a:rPr sz="2000" b="1" i="0">
                 <a:solidFill>
                   <a:srgbClr val="333333"/>
                 </a:solidFill>
@@ -5424,7 +5424,7 @@
               </a:spcAft>
             </a:pPr>
             <a:r>
-              <a:rPr sz="1600" b="0" i="0">
+              <a:rPr sz="2000" b="0" i="0">
                 <a:solidFill>
                   <a:srgbClr val="333333"/>
                 </a:solidFill>
@@ -5433,7 +5433,7 @@
               <a:t>–   Todo lo que construyan hoy entra al </a:t>
             </a:r>
             <a:r>
-              <a:rPr sz="1600" b="1" i="0">
+              <a:rPr sz="2000" b="1" i="0">
                 <a:solidFill>
                   <a:srgbClr val="333333"/>
                 </a:solidFill>
@@ -5442,7 +5442,7 @@
               <a:t>informe/repo del PI</a:t>
             </a:r>
             <a:r>
-              <a:rPr sz="1600" b="0" i="0">
+              <a:rPr sz="2000" b="0" i="0">
                 <a:solidFill>
                   <a:srgbClr val="333333"/>
                 </a:solidFill>
@@ -5458,7 +5458,7 @@
               </a:spcAft>
             </a:pPr>
             <a:r>
-              <a:rPr sz="1600" b="0" i="0">
+              <a:rPr sz="2000" b="0" i="0">
                 <a:solidFill>
                   <a:srgbClr val="333333"/>
                 </a:solidFill>
@@ -5678,7 +5678,7 @@
               </a:spcAft>
             </a:pPr>
             <a:r>
-              <a:rPr sz="1600" b="0" i="0">
+              <a:rPr sz="2000" b="0" i="0">
                 <a:solidFill>
                   <a:srgbClr val="333333"/>
                 </a:solidFill>
@@ -5687,7 +5687,7 @@
               <a:t>–   CI: build + test en cada push. CD: deploy — aquí </a:t>
             </a:r>
             <a:r>
-              <a:rPr sz="1600" b="1" i="0">
+              <a:rPr sz="2000" b="1" i="0">
                 <a:solidFill>
                   <a:srgbClr val="333333"/>
                 </a:solidFill>
@@ -5696,7 +5696,7 @@
               <a:t>simulado</a:t>
             </a:r>
             <a:r>
-              <a:rPr sz="1600" b="0" i="0">
+              <a:rPr sz="2000" b="0" i="0">
                 <a:solidFill>
                   <a:srgbClr val="333333"/>
                 </a:solidFill>
@@ -5712,7 +5712,7 @@
               </a:spcAft>
             </a:pPr>
             <a:r>
-              <a:rPr sz="1600" b="0" i="0">
+              <a:rPr sz="2000" b="0" i="0">
                 <a:solidFill>
                   <a:srgbClr val="333333"/>
                 </a:solidFill>
@@ -5728,7 +5728,7 @@
               </a:spcAft>
             </a:pPr>
             <a:r>
-              <a:rPr sz="1600" b="0" i="0">
+              <a:rPr sz="2000" b="0" i="0">
                 <a:solidFill>
                   <a:srgbClr val="333333"/>
                 </a:solidFill>
@@ -5737,7 +5737,7 @@
               <a:t>–   </a:t>
             </a:r>
             <a:r>
-              <a:rPr sz="1600" b="1" i="0">
+              <a:rPr sz="2000" b="1" i="0">
                 <a:solidFill>
                   <a:srgbClr val="333333"/>
                 </a:solidFill>
@@ -5746,7 +5746,7 @@
               <a:t>«Ya tenemos CD» porque el YAML tiene un paso «deploy» resta puntos.</a:t>
             </a:r>
             <a:r>
-              <a:rPr sz="1600" b="0" i="0">
+              <a:rPr sz="2000" b="0" i="0">
                 <a:solidFill>
                   <a:srgbClr val="333333"/>
                 </a:solidFill>
@@ -5966,7 +5966,7 @@
               </a:spcAft>
             </a:pPr>
             <a:r>
-              <a:rPr sz="1600" b="0" i="0">
+              <a:rPr sz="2000" b="0" i="0">
                 <a:solidFill>
                   <a:srgbClr val="333333"/>
                 </a:solidFill>
@@ -5975,7 +5975,7 @@
               <a:t>–   Tres bloques que se califican: </a:t>
             </a:r>
             <a:r>
-              <a:rPr sz="1600" b="1" i="0">
+              <a:rPr sz="2000" b="1" i="0">
                 <a:solidFill>
                   <a:srgbClr val="333333"/>
                 </a:solidFill>
@@ -5984,7 +5984,7 @@
               <a:t>disparadores</a:t>
             </a:r>
             <a:r>
-              <a:rPr sz="1600" b="0" i="0">
+              <a:rPr sz="2000" b="0" i="0">
                 <a:solidFill>
                   <a:srgbClr val="333333"/>
                 </a:solidFill>
@@ -5993,7 +5993,7 @@
               <a:t> («on») · </a:t>
             </a:r>
             <a:r>
-              <a:rPr sz="1600" b="1" i="0">
+              <a:rPr sz="2000" b="1" i="0">
                 <a:solidFill>
                   <a:srgbClr val="333333"/>
                 </a:solidFill>
@@ -6002,7 +6002,7 @@
               <a:t>entorno</a:t>
             </a:r>
             <a:r>
-              <a:rPr sz="1600" b="0" i="0">
+              <a:rPr sz="2000" b="0" i="0">
                 <a:solidFill>
                   <a:srgbClr val="333333"/>
                 </a:solidFill>
@@ -6011,7 +6011,7 @@
               <a:t> («runs-on») · </a:t>
             </a:r>
             <a:r>
-              <a:rPr sz="1600" b="1" i="0">
+              <a:rPr sz="2000" b="1" i="0">
                 <a:solidFill>
                   <a:srgbClr val="333333"/>
                 </a:solidFill>
@@ -6020,7 +6020,7 @@
               <a:t>pasos</a:t>
             </a:r>
             <a:r>
-              <a:rPr sz="1600" b="0" i="0">
+              <a:rPr sz="2000" b="0" i="0">
                 <a:solidFill>
                   <a:srgbClr val="333333"/>
                 </a:solidFill>
@@ -6036,7 +6036,7 @@
               </a:spcAft>
             </a:pPr>
             <a:r>
-              <a:rPr sz="1600" b="0" i="0">
+              <a:rPr sz="2000" b="0" i="0">
                 <a:solidFill>
                   <a:srgbClr val="333333"/>
                 </a:solidFill>
@@ -6045,7 +6045,7 @@
               <a:t>–   Los pasos, en este orden: </a:t>
             </a:r>
             <a:r>
-              <a:rPr sz="1600" b="1" i="0">
+              <a:rPr sz="2000" b="1" i="0">
                 <a:solidFill>
                   <a:srgbClr val="333333"/>
                 </a:solidFill>
@@ -6054,7 +6054,7 @@
               <a:t>construcción</a:t>
             </a:r>
             <a:r>
-              <a:rPr sz="1600" b="0" i="0">
+              <a:rPr sz="2000" b="0" i="0">
                 <a:solidFill>
                   <a:srgbClr val="333333"/>
                 </a:solidFill>
@@ -6063,7 +6063,7 @@
               <a:t> → </a:t>
             </a:r>
             <a:r>
-              <a:rPr sz="1600" b="1" i="0">
+              <a:rPr sz="2000" b="1" i="0">
                 <a:solidFill>
                   <a:srgbClr val="333333"/>
                 </a:solidFill>
@@ -6072,7 +6072,7 @@
               <a:t>prueba</a:t>
             </a:r>
             <a:r>
-              <a:rPr sz="1600" b="0" i="0">
+              <a:rPr sz="2000" b="0" i="0">
                 <a:solidFill>
                   <a:srgbClr val="333333"/>
                 </a:solidFill>
@@ -6081,7 +6081,7 @@
               <a:t> → </a:t>
             </a:r>
             <a:r>
-              <a:rPr sz="1600" b="1" i="0">
+              <a:rPr sz="2000" b="1" i="0">
                 <a:solidFill>
                   <a:srgbClr val="333333"/>
                 </a:solidFill>
@@ -6090,7 +6090,7 @@
               <a:t>despliegue simulado</a:t>
             </a:r>
             <a:r>
-              <a:rPr sz="1600" b="0" i="0">
+              <a:rPr sz="2000" b="0" i="0">
                 <a:solidFill>
                   <a:srgbClr val="333333"/>
                 </a:solidFill>
@@ -6106,7 +6106,7 @@
               </a:spcAft>
             </a:pPr>
             <a:r>
-              <a:rPr sz="1600" b="0" i="0">
+              <a:rPr sz="2000" b="0" i="0">
                 <a:solidFill>
                   <a:srgbClr val="333333"/>
                 </a:solidFill>
@@ -6115,7 +6115,7 @@
               <a:t>–   Secrets solo vía Settings; nunca en el YAML en claro (</a:t>
             </a:r>
             <a:r>
-              <a:rPr sz="1600" b="1" i="0">
+              <a:rPr sz="2000" b="1" i="0">
                 <a:solidFill>
                   <a:srgbClr val="333333"/>
                 </a:solidFill>
@@ -6124,7 +6124,7 @@
               <a:t>cero en la pregunta si aparece uno</a:t>
             </a:r>
             <a:r>
-              <a:rPr sz="1600" b="0" i="0">
+              <a:rPr sz="2000" b="0" i="0">
                 <a:solidFill>
                   <a:srgbClr val="333333"/>
                 </a:solidFill>
@@ -6140,7 +6140,7 @@
               </a:spcAft>
             </a:pPr>
             <a:r>
-              <a:rPr sz="1600" b="0" i="0">
+              <a:rPr sz="2000" b="0" i="0">
                 <a:solidFill>
                   <a:srgbClr val="333333"/>
                 </a:solidFill>
@@ -6149,7 +6149,7 @@
               <a:t>–   </a:t>
             </a:r>
             <a:r>
-              <a:rPr sz="1600" b="1" i="0">
+              <a:rPr sz="2000" b="1" i="0">
                 <a:solidFill>
                   <a:srgbClr val="333333"/>
                 </a:solidFill>
@@ -6158,7 +6158,7 @@
               <a:t>Un CI que solo imprime «OK» no es CI:</a:t>
             </a:r>
             <a:r>
-              <a:rPr sz="1600" b="0" i="0">
+              <a:rPr sz="2000" b="0" i="0">
                 <a:solidFill>
                   <a:srgbClr val="333333"/>
                 </a:solidFill>
@@ -6378,7 +6378,7 @@
               </a:spcAft>
             </a:pPr>
             <a:r>
-              <a:rPr sz="1600" b="0" i="0">
+              <a:rPr sz="2000" b="0" i="0">
                 <a:solidFill>
                   <a:srgbClr val="333333"/>
                 </a:solidFill>
@@ -6394,7 +6394,7 @@
               </a:spcAft>
             </a:pPr>
             <a:r>
-              <a:rPr sz="1600" b="0" i="0">
+              <a:rPr sz="2000" b="0" i="0">
                 <a:solidFill>
                   <a:srgbClr val="333333"/>
                 </a:solidFill>
@@ -6403,7 +6403,7 @@
               <a:t>–   </a:t>
             </a:r>
             <a:r>
-              <a:rPr sz="1600" b="1" i="0">
+              <a:rPr sz="2000" b="1" i="0">
                 <a:solidFill>
                   <a:srgbClr val="333333"/>
                 </a:solidFill>
@@ -6412,7 +6412,7 @@
               <a:t>Cada señal va con su umbral</a:t>
             </a:r>
             <a:r>
-              <a:rPr sz="1600" b="0" i="0">
+              <a:rPr sz="2000" b="0" i="0">
                 <a:solidFill>
                   <a:srgbClr val="333333"/>
                 </a:solidFill>
@@ -6428,7 +6428,7 @@
               </a:spcAft>
             </a:pPr>
             <a:r>
-              <a:rPr sz="1600" b="0" i="0">
+              <a:rPr sz="2000" b="0" i="0">
                 <a:solidFill>
                   <a:srgbClr val="333333"/>
                 </a:solidFill>
@@ -6437,7 +6437,7 @@
               <a:t>–   Al menos una debe ser un </a:t>
             </a:r>
             <a:r>
-              <a:rPr sz="1600" b="1" i="0">
+              <a:rPr sz="2000" b="1" i="0">
                 <a:solidFill>
                   <a:srgbClr val="333333"/>
                 </a:solidFill>
@@ -6446,7 +6446,7 @@
               <a:t>registro</a:t>
             </a:r>
             <a:r>
-              <a:rPr sz="1600" b="0" i="0">
+              <a:rPr sz="2000" b="0" i="0">
                 <a:solidFill>
                   <a:srgbClr val="333333"/>
                 </a:solidFill>
@@ -6462,7 +6462,7 @@
               </a:spcAft>
             </a:pPr>
             <a:r>
-              <a:rPr sz="1600" b="0" i="0">
+              <a:rPr sz="2000" b="0" i="0">
                 <a:solidFill>
                   <a:srgbClr val="333333"/>
                 </a:solidFill>

--- a/Arquitectura de Sistemas Computacionales/Clases/Clase 8 - Monitoreo optimizacion y CI-CD/Presentacion.pptx
+++ b/Arquitectura de Sistemas Computacionales/Clases/Clase 8 - Monitoreo optimizacion y CI-CD/Presentacion.pptx
@@ -4182,7 +4182,7 @@
                 </a:solidFill>
                 <a:latin typeface="Calibri"/>
               </a:rPr>
-              <a:t>Subir evidencias al paquete CloudLite (Drive/repo) y a ExamLab (https://uniaj.examlab.workers.dev/) domingo 23:59.</a:t>
+              <a:t>Subir evidencias al paquete CloudLite (Drive/repo) y a la plataforma del curso en la fecha que indique el docente.</a:t>
             </a:r>
           </a:p>
         </p:txBody>
@@ -4899,7 +4899,7 @@
                 </a:solidFill>
                 <a:latin typeface="Calibri"/>
               </a:rPr>
-              <a:t> Cierre: criterio de éxito + plazo domingo 23:59.</a:t>
+              <a:t> Cierre: criterio de éxito + plazo en la fecha que indique el docente.</a:t>
             </a:r>
           </a:p>
         </p:txBody>
@@ -5464,7 +5464,7 @@
                 </a:solidFill>
                 <a:latin typeface="Calibri"/>
               </a:rPr>
-              <a:t>–   Individual por defecto · el docente puede autorizar equipos de 2–3; la entrega en ExamLab siempre es individual.</a:t>
+              <a:t>–   Individual por defecto · el docente puede autorizar equipos de 2–3; la entrega en la plataforma del curso siempre es individual.</a:t>
             </a:r>
           </a:p>
         </p:txBody>
@@ -6968,7 +6968,7 @@
                 </a:solidFill>
                 <a:latin typeface="Calibri"/>
               </a:rPr>
-              <a:t>        run: npm ci &amp;&amp; docker build -t cloudlite-api:0.1.0 .</a:t>
+              <a:t>        run: npm ci &amp;&amp; docker build -t cloudlite-api:0.1.0.</a:t>
             </a:r>
           </a:p>
           <a:p>
@@ -7878,7 +7878,7 @@
                 </a:solidFill>
                 <a:latin typeface="Calibri"/>
               </a:rPr>
-              <a:t>ExamLab</a:t>
+              <a:t>la plataforma del curso</a:t>
             </a:r>
           </a:p>
           <a:p>

--- a/Arquitectura de Sistemas Computacionales/Clases/Clase 8 - Monitoreo optimizacion y CI-CD/Presentacion.pptx
+++ b/Arquitectura de Sistemas Computacionales/Clases/Clase 8 - Monitoreo optimizacion y CI-CD/Presentacion.pptx
@@ -3575,7 +3575,7 @@
                 </a:solidFill>
                 <a:latin typeface="Calibri"/>
               </a:rPr>
-              <a:t>Taller PI (paso a paso)</a:t>
+              <a:t>Manos a la obra (paso a paso)</a:t>
             </a:r>
           </a:p>
         </p:txBody>
@@ -4849,7 +4849,7 @@
                 </a:solidFill>
                 <a:latin typeface="Calibri"/>
               </a:rPr>
-              <a:t> Taller guiado PI (demo en vivo + avance individual).</a:t>
+              <a:t> Trabajo guiado del PI (demo en vivo + avance individual).</a:t>
             </a:r>
           </a:p>
           <a:p>
@@ -5332,7 +5332,7 @@
                 </a:solidFill>
                 <a:latin typeface="Calibri"/>
               </a:rPr>
-              <a:t>PI CloudLite — entregable de hoy</a:t>
+              <a:t>CI/CD sin tarjeta</a:t>
             </a:r>
           </a:p>
         </p:txBody>
@@ -5371,7 +5371,7 @@
                 </a:solidFill>
                 <a:latin typeface="Calibri"/>
               </a:rPr>
-              <a:t>–   </a:t>
+              <a:t>–   CI: build + test en cada push. CD: deploy — aquí </a:t>
             </a:r>
             <a:r>
               <a:rPr sz="2000" b="1" i="0">
@@ -5380,7 +5380,7 @@
                 </a:solidFill>
                 <a:latin typeface="Calibri"/>
               </a:rPr>
-              <a:t>Entregable:</a:t>
+              <a:t>simulado</a:t>
             </a:r>
             <a:r>
               <a:rPr sz="2000" b="0" i="0">
@@ -5389,7 +5389,7 @@
                 </a:solidFill>
                 <a:latin typeface="Calibri"/>
               </a:rPr>
-              <a:t> .github/workflows/ci.yml + sección Monitoreo/CI del informe</a:t>
+              <a:t> (echo/artifact).</a:t>
             </a:r>
           </a:p>
           <a:p>
@@ -5405,16 +5405,7 @@
                 </a:solidFill>
                 <a:latin typeface="Calibri"/>
               </a:rPr>
-              <a:t>–   Herramienta: </a:t>
-            </a:r>
-            <a:r>
-              <a:rPr sz="2000" b="1" i="0">
-                <a:solidFill>
-                  <a:srgbClr val="333333"/>
-                </a:solidFill>
-                <a:latin typeface="Calibri"/>
-              </a:rPr>
-              <a:t>GitHub Actions · Google Docs</a:t>
+              <a:t>–   GitHub Actions free: runners hosted; YAML en «.github/workflows/».</a:t>
             </a:r>
           </a:p>
           <a:p>
@@ -5430,7 +5421,7 @@
                 </a:solidFill>
                 <a:latin typeface="Calibri"/>
               </a:rPr>
-              <a:t>–   Todo lo que construyan hoy entra al </a:t>
+              <a:t>–   </a:t>
             </a:r>
             <a:r>
               <a:rPr sz="2000" b="1" i="0">
@@ -5439,7 +5430,7 @@
                 </a:solidFill>
                 <a:latin typeface="Calibri"/>
               </a:rPr>
-              <a:t>informe/repo del PI</a:t>
+              <a:t>«Ya tenemos CD» porque el YAML tiene un paso «deploy» resta puntos.</a:t>
             </a:r>
             <a:r>
               <a:rPr sz="2000" b="0" i="0">
@@ -5448,23 +5439,7 @@
                 </a:solidFill>
                 <a:latin typeface="Calibri"/>
               </a:rPr>
-              <a:t> (no es lab suelto).</a:t>
-            </a:r>
-          </a:p>
-          <a:p>
-            <a:pPr>
-              <a:spcAft>
-                <a:spcPts val="800"/>
-              </a:spcAft>
-            </a:pPr>
-            <a:r>
-              <a:rPr sz="2000" b="0" i="0">
-                <a:solidFill>
-                  <a:srgbClr val="333333"/>
-                </a:solidFill>
-                <a:latin typeface="Calibri"/>
-              </a:rPr>
-              <a:t>–   Individual por defecto · el docente puede autorizar equipos de 2–3; la entrega en la plataforma del curso siempre es individual.</a:t>
+              <a:t> Aquí llega a «listo para desplegar».</a:t>
             </a:r>
           </a:p>
         </p:txBody>
@@ -5645,7 +5620,7 @@
                 </a:solidFill>
                 <a:latin typeface="Calibri"/>
               </a:rPr>
-              <a:t>CI/CD sin tarjeta</a:t>
+              <a:t>YAML mínimo</a:t>
             </a:r>
           </a:p>
         </p:txBody>
@@ -5684,7 +5659,7 @@
                 </a:solidFill>
                 <a:latin typeface="Calibri"/>
               </a:rPr>
-              <a:t>–   CI: build + test en cada push. CD: deploy — aquí </a:t>
+              <a:t>–   Tres bloques que se califican: </a:t>
             </a:r>
             <a:r>
               <a:rPr sz="2000" b="1" i="0">
@@ -5693,7 +5668,7 @@
                 </a:solidFill>
                 <a:latin typeface="Calibri"/>
               </a:rPr>
-              <a:t>simulado</a:t>
+              <a:t>disparadores</a:t>
             </a:r>
             <a:r>
               <a:rPr sz="2000" b="0" i="0">
@@ -5702,7 +5677,43 @@
                 </a:solidFill>
                 <a:latin typeface="Calibri"/>
               </a:rPr>
-              <a:t> (echo/artifact).</a:t>
+              <a:t> («on») · </a:t>
+            </a:r>
+            <a:r>
+              <a:rPr sz="2000" b="1" i="0">
+                <a:solidFill>
+                  <a:srgbClr val="333333"/>
+                </a:solidFill>
+                <a:latin typeface="Calibri"/>
+              </a:rPr>
+              <a:t>entorno</a:t>
+            </a:r>
+            <a:r>
+              <a:rPr sz="2000" b="0" i="0">
+                <a:solidFill>
+                  <a:srgbClr val="333333"/>
+                </a:solidFill>
+                <a:latin typeface="Calibri"/>
+              </a:rPr>
+              <a:t> («runs-on») · </a:t>
+            </a:r>
+            <a:r>
+              <a:rPr sz="2000" b="1" i="0">
+                <a:solidFill>
+                  <a:srgbClr val="333333"/>
+                </a:solidFill>
+                <a:latin typeface="Calibri"/>
+              </a:rPr>
+              <a:t>pasos</a:t>
+            </a:r>
+            <a:r>
+              <a:rPr sz="2000" b="0" i="0">
+                <a:solidFill>
+                  <a:srgbClr val="333333"/>
+                </a:solidFill>
+                <a:latin typeface="Calibri"/>
+              </a:rPr>
+              <a:t>.</a:t>
             </a:r>
           </a:p>
           <a:p>
@@ -5718,7 +5729,61 @@
                 </a:solidFill>
                 <a:latin typeface="Calibri"/>
               </a:rPr>
-              <a:t>–   GitHub Actions free: runners hosted; YAML en «.github/workflows/».</a:t>
+              <a:t>–   Los pasos, en este orden: </a:t>
+            </a:r>
+            <a:r>
+              <a:rPr sz="2000" b="1" i="0">
+                <a:solidFill>
+                  <a:srgbClr val="333333"/>
+                </a:solidFill>
+                <a:latin typeface="Calibri"/>
+              </a:rPr>
+              <a:t>construcción</a:t>
+            </a:r>
+            <a:r>
+              <a:rPr sz="2000" b="0" i="0">
+                <a:solidFill>
+                  <a:srgbClr val="333333"/>
+                </a:solidFill>
+                <a:latin typeface="Calibri"/>
+              </a:rPr>
+              <a:t> → </a:t>
+            </a:r>
+            <a:r>
+              <a:rPr sz="2000" b="1" i="0">
+                <a:solidFill>
+                  <a:srgbClr val="333333"/>
+                </a:solidFill>
+                <a:latin typeface="Calibri"/>
+              </a:rPr>
+              <a:t>prueba</a:t>
+            </a:r>
+            <a:r>
+              <a:rPr sz="2000" b="0" i="0">
+                <a:solidFill>
+                  <a:srgbClr val="333333"/>
+                </a:solidFill>
+                <a:latin typeface="Calibri"/>
+              </a:rPr>
+              <a:t> → </a:t>
+            </a:r>
+            <a:r>
+              <a:rPr sz="2000" b="1" i="0">
+                <a:solidFill>
+                  <a:srgbClr val="333333"/>
+                </a:solidFill>
+                <a:latin typeface="Calibri"/>
+              </a:rPr>
+              <a:t>despliegue simulado</a:t>
+            </a:r>
+            <a:r>
+              <a:rPr sz="2000" b="0" i="0">
+                <a:solidFill>
+                  <a:srgbClr val="333333"/>
+                </a:solidFill>
+                <a:latin typeface="Calibri"/>
+              </a:rPr>
+              <a:t>.</a:t>
             </a:r>
           </a:p>
           <a:p>
@@ -5734,6 +5799,40 @@
                 </a:solidFill>
                 <a:latin typeface="Calibri"/>
               </a:rPr>
+              <a:t>–   Secrets solo vía Settings; nunca en el YAML en claro (</a:t>
+            </a:r>
+            <a:r>
+              <a:rPr sz="2000" b="1" i="0">
+                <a:solidFill>
+                  <a:srgbClr val="333333"/>
+                </a:solidFill>
+                <a:latin typeface="Calibri"/>
+              </a:rPr>
+              <a:t>cero en la pregunta si aparece uno</a:t>
+            </a:r>
+            <a:r>
+              <a:rPr sz="2000" b="0" i="0">
+                <a:solidFill>
+                  <a:srgbClr val="333333"/>
+                </a:solidFill>
+                <a:latin typeface="Calibri"/>
+              </a:rPr>
+              <a:t>).</a:t>
+            </a:r>
+          </a:p>
+          <a:p>
+            <a:pPr>
+              <a:spcAft>
+                <a:spcPts val="800"/>
+              </a:spcAft>
+            </a:pPr>
+            <a:r>
+              <a:rPr sz="2000" b="0" i="0">
+                <a:solidFill>
+                  <a:srgbClr val="333333"/>
+                </a:solidFill>
+                <a:latin typeface="Calibri"/>
+              </a:rPr>
               <a:t>–   </a:t>
             </a:r>
             <a:r>
@@ -5743,7 +5842,7 @@
                 </a:solidFill>
                 <a:latin typeface="Calibri"/>
               </a:rPr>
-              <a:t>«Ya tenemos CD» porque el YAML tiene un paso «deploy» resta puntos.</a:t>
+              <a:t>Un CI que solo imprime «OK» no es CI:</a:t>
             </a:r>
             <a:r>
               <a:rPr sz="2000" b="0" i="0">
@@ -5752,7 +5851,7 @@
                 </a:solidFill>
                 <a:latin typeface="Calibri"/>
               </a:rPr>
-              <a:t> Aquí llega a «listo para desplegar».</a:t>
+              <a:t> tienes que poder decir qué error lo pondría rojo.</a:t>
             </a:r>
           </a:p>
         </p:txBody>
@@ -5933,7 +6032,7 @@
                 </a:solidFill>
                 <a:latin typeface="Calibri"/>
               </a:rPr>
-              <a:t>YAML mínimo</a:t>
+              <a:t>Monitoreo y optimización</a:t>
             </a:r>
           </a:p>
         </p:txBody>
@@ -5972,61 +6071,7 @@
                 </a:solidFill>
                 <a:latin typeface="Calibri"/>
               </a:rPr>
-              <a:t>–   Tres bloques que se califican: </a:t>
-            </a:r>
-            <a:r>
-              <a:rPr sz="2000" b="1" i="0">
-                <a:solidFill>
-                  <a:srgbClr val="333333"/>
-                </a:solidFill>
-                <a:latin typeface="Calibri"/>
-              </a:rPr>
-              <a:t>disparadores</a:t>
-            </a:r>
-            <a:r>
-              <a:rPr sz="2000" b="0" i="0">
-                <a:solidFill>
-                  <a:srgbClr val="333333"/>
-                </a:solidFill>
-                <a:latin typeface="Calibri"/>
-              </a:rPr>
-              <a:t> («on») · </a:t>
-            </a:r>
-            <a:r>
-              <a:rPr sz="2000" b="1" i="0">
-                <a:solidFill>
-                  <a:srgbClr val="333333"/>
-                </a:solidFill>
-                <a:latin typeface="Calibri"/>
-              </a:rPr>
-              <a:t>entorno</a:t>
-            </a:r>
-            <a:r>
-              <a:rPr sz="2000" b="0" i="0">
-                <a:solidFill>
-                  <a:srgbClr val="333333"/>
-                </a:solidFill>
-                <a:latin typeface="Calibri"/>
-              </a:rPr>
-              <a:t> («runs-on») · </a:t>
-            </a:r>
-            <a:r>
-              <a:rPr sz="2000" b="1" i="0">
-                <a:solidFill>
-                  <a:srgbClr val="333333"/>
-                </a:solidFill>
-                <a:latin typeface="Calibri"/>
-              </a:rPr>
-              <a:t>pasos</a:t>
-            </a:r>
-            <a:r>
-              <a:rPr sz="2000" b="0" i="0">
-                <a:solidFill>
-                  <a:srgbClr val="333333"/>
-                </a:solidFill>
-                <a:latin typeface="Calibri"/>
-              </a:rPr>
-              <a:t>.</a:t>
+              <a:t>–   Golden signals-lite: latencia, tráfico, errores, saturación.</a:t>
             </a:r>
           </a:p>
           <a:p>
@@ -6042,7 +6087,7 @@
                 </a:solidFill>
                 <a:latin typeface="Calibri"/>
               </a:rPr>
-              <a:t>–   Los pasos, en este orden: </a:t>
+              <a:t>–   </a:t>
             </a:r>
             <a:r>
               <a:rPr sz="2000" b="1" i="0">
@@ -6051,7 +6096,7 @@
                 </a:solidFill>
                 <a:latin typeface="Calibri"/>
               </a:rPr>
-              <a:t>construcción</a:t>
+              <a:t>Cada señal va con su umbral</a:t>
             </a:r>
             <a:r>
               <a:rPr sz="2000" b="0" i="0">
@@ -6060,43 +6105,7 @@
                 </a:solidFill>
                 <a:latin typeface="Calibri"/>
               </a:rPr>
-              <a:t> → </a:t>
-            </a:r>
-            <a:r>
-              <a:rPr sz="2000" b="1" i="0">
-                <a:solidFill>
-                  <a:srgbClr val="333333"/>
-                </a:solidFill>
-                <a:latin typeface="Calibri"/>
-              </a:rPr>
-              <a:t>prueba</a:t>
-            </a:r>
-            <a:r>
-              <a:rPr sz="2000" b="0" i="0">
-                <a:solidFill>
-                  <a:srgbClr val="333333"/>
-                </a:solidFill>
-                <a:latin typeface="Calibri"/>
-              </a:rPr>
-              <a:t> → </a:t>
-            </a:r>
-            <a:r>
-              <a:rPr sz="2000" b="1" i="0">
-                <a:solidFill>
-                  <a:srgbClr val="333333"/>
-                </a:solidFill>
-                <a:latin typeface="Calibri"/>
-              </a:rPr>
-              <a:t>despliegue simulado</a:t>
-            </a:r>
-            <a:r>
-              <a:rPr sz="2000" b="0" i="0">
-                <a:solidFill>
-                  <a:srgbClr val="333333"/>
-                </a:solidFill>
-                <a:latin typeface="Calibri"/>
-              </a:rPr>
-              <a:t>.</a:t>
+              <a:t>: «medimos la latencia» no permite decidir nada.</a:t>
             </a:r>
           </a:p>
           <a:p>
@@ -6112,7 +6121,7 @@
                 </a:solidFill>
                 <a:latin typeface="Calibri"/>
               </a:rPr>
-              <a:t>–   Secrets solo vía Settings; nunca en el YAML en claro (</a:t>
+              <a:t>–   Al menos una debe ser un </a:t>
             </a:r>
             <a:r>
               <a:rPr sz="2000" b="1" i="0">
@@ -6121,7 +6130,7 @@
                 </a:solidFill>
                 <a:latin typeface="Calibri"/>
               </a:rPr>
-              <a:t>cero en la pregunta si aparece uno</a:t>
+              <a:t>registro</a:t>
             </a:r>
             <a:r>
               <a:rPr sz="2000" b="0" i="0">
@@ -6130,7 +6139,7 @@
                 </a:solidFill>
                 <a:latin typeface="Calibri"/>
               </a:rPr>
-              <a:t>).</a:t>
+              <a:t> (log), no una métrica numérica.</a:t>
             </a:r>
           </a:p>
           <a:p>
@@ -6146,25 +6155,7 @@
                 </a:solidFill>
                 <a:latin typeface="Calibri"/>
               </a:rPr>
-              <a:t>–   </a:t>
-            </a:r>
-            <a:r>
-              <a:rPr sz="2000" b="1" i="0">
-                <a:solidFill>
-                  <a:srgbClr val="333333"/>
-                </a:solidFill>
-                <a:latin typeface="Calibri"/>
-              </a:rPr>
-              <a:t>Un CI que solo imprime «OK» no es CI:</a:t>
-            </a:r>
-            <a:r>
-              <a:rPr sz="2000" b="0" i="0">
-                <a:solidFill>
-                  <a:srgbClr val="333333"/>
-                </a:solidFill>
-                <a:latin typeface="Calibri"/>
-              </a:rPr>
-              <a:t> tienes que poder decir qué error lo pondría rojo.</a:t>
+              <a:t>–   Optimización: caché conceptual, paginación, límites de rate (anotar en informe).</a:t>
             </a:r>
           </a:p>
         </p:txBody>
@@ -6345,21 +6336,141 @@
                 </a:solidFill>
                 <a:latin typeface="Calibri"/>
               </a:rPr>
-              <a:t>Monitoreo y optimización</a:t>
-            </a:r>
-          </a:p>
-        </p:txBody>
-      </p:sp>
-      <p:sp>
-        <p:nvSpPr>
-          <p:cNvPr id="5" name="TextBox 4"/>
+              <a:t>.github/workflows/ci.yml — CI real, no un echo</a:t>
+            </a:r>
+          </a:p>
+        </p:txBody>
+      </p:sp>
+      <p:sp>
+        <p:nvSpPr>
+          <p:cNvPr id="5" name="Rounded Rectangle 4"/>
+          <p:cNvSpPr/>
+          <p:nvPr/>
+        </p:nvSpPr>
+        <p:spPr>
+          <a:xfrm>
+            <a:off x="457200" y="1261872"/>
+            <a:ext cx="11277295" cy="4773168"/>
+          </a:xfrm>
+          <a:prstGeom prst="roundRect">
+            <a:avLst>
+              <a:gd name="adj" fmla="val 12000"/>
+            </a:avLst>
+          </a:prstGeom>
+          <a:solidFill>
+            <a:srgbClr val="1E2A38"/>
+          </a:solidFill>
+          <a:ln>
+            <a:noFill/>
+          </a:ln>
+        </p:spPr>
+        <p:style>
+          <a:lnRef idx="1">
+            <a:schemeClr val="accent1"/>
+          </a:lnRef>
+          <a:fillRef idx="3">
+            <a:schemeClr val="accent1"/>
+          </a:fillRef>
+          <a:effectRef idx="2">
+            <a:schemeClr val="accent1"/>
+          </a:effectRef>
+          <a:fontRef idx="minor">
+            <a:schemeClr val="lt1"/>
+          </a:fontRef>
+        </p:style>
+        <p:txBody>
+          <a:bodyPr rtlCol="0" anchor="ctr"/>
+          <a:lstStyle/>
+          <a:p>
+            <a:pPr algn="ctr"/>
+          </a:p>
+        </p:txBody>
+      </p:sp>
+      <p:sp>
+        <p:nvSpPr>
+          <p:cNvPr id="6" name="Rectangle 5"/>
+          <p:cNvSpPr/>
+          <p:nvPr/>
+        </p:nvSpPr>
+        <p:spPr>
+          <a:xfrm>
+            <a:off x="457200" y="1261872"/>
+            <a:ext cx="11277295" cy="320040"/>
+          </a:xfrm>
+          <a:prstGeom prst="rect">
+            <a:avLst/>
+          </a:prstGeom>
+          <a:solidFill>
+            <a:srgbClr val="095292"/>
+          </a:solidFill>
+          <a:ln>
+            <a:noFill/>
+          </a:ln>
+        </p:spPr>
+        <p:style>
+          <a:lnRef idx="1">
+            <a:schemeClr val="accent1"/>
+          </a:lnRef>
+          <a:fillRef idx="3">
+            <a:schemeClr val="accent1"/>
+          </a:fillRef>
+          <a:effectRef idx="2">
+            <a:schemeClr val="accent1"/>
+          </a:effectRef>
+          <a:fontRef idx="minor">
+            <a:schemeClr val="lt1"/>
+          </a:fontRef>
+        </p:style>
+        <p:txBody>
+          <a:bodyPr rtlCol="0" anchor="ctr"/>
+          <a:lstStyle/>
+          <a:p>
+            <a:pPr algn="ctr"/>
+          </a:p>
+        </p:txBody>
+      </p:sp>
+      <p:sp>
+        <p:nvSpPr>
+          <p:cNvPr id="7" name="TextBox 6"/>
           <p:cNvSpPr txBox="1"/>
           <p:nvPr/>
         </p:nvSpPr>
         <p:spPr>
           <a:xfrm>
-            <a:off x="457200" y="1170432"/>
-            <a:ext cx="11277295" cy="5230368"/>
+            <a:off x="685800" y="1307592"/>
+            <a:ext cx="10820095" cy="256032"/>
+          </a:xfrm>
+          <a:prstGeom prst="rect">
+            <a:avLst/>
+          </a:prstGeom>
+          <a:noFill/>
+        </p:spPr>
+        <p:txBody>
+          <a:bodyPr wrap="square" anchor="ctr"/>
+          <a:lstStyle/>
+          <a:p>
+            <a:r>
+              <a:rPr sz="1000" b="1" i="0">
+                <a:solidFill>
+                  <a:srgbClr val="269CCB"/>
+                </a:solidFill>
+                <a:latin typeface="Calibri"/>
+              </a:rPr>
+              <a:t>● ● ●</a:t>
+            </a:r>
+          </a:p>
+        </p:txBody>
+      </p:sp>
+      <p:sp>
+        <p:nvSpPr>
+          <p:cNvPr id="8" name="TextBox 7"/>
+          <p:cNvSpPr txBox="1"/>
+          <p:nvPr/>
+        </p:nvSpPr>
+        <p:spPr>
+          <a:xfrm>
+            <a:off x="777240" y="1719072"/>
+            <a:ext cx="10637215" cy="4133087"/>
           </a:xfrm>
           <a:prstGeom prst="rect">
             <a:avLst/>
@@ -6374,108 +6485,283 @@
           <a:p>
             <a:pPr>
               <a:spcAft>
-                <a:spcPts val="800"/>
+                <a:spcPts val="400"/>
               </a:spcAft>
             </a:pPr>
             <a:r>
-              <a:rPr sz="2000" b="0" i="0">
-                <a:solidFill>
-                  <a:srgbClr val="333333"/>
-                </a:solidFill>
-                <a:latin typeface="Calibri"/>
-              </a:rPr>
-              <a:t>–   Golden signals-lite: latencia, tráfico, errores, saturación.</a:t>
+              <a:rPr sz="1400" b="0" i="0">
+                <a:solidFill>
+                  <a:srgbClr val="FFFFFF"/>
+                </a:solidFill>
+                <a:latin typeface="Calibri"/>
+              </a:rPr>
+              <a:t>name: CI</a:t>
             </a:r>
           </a:p>
           <a:p>
             <a:pPr>
               <a:spcAft>
-                <a:spcPts val="800"/>
+                <a:spcPts val="400"/>
               </a:spcAft>
             </a:pPr>
             <a:r>
-              <a:rPr sz="2000" b="0" i="0">
-                <a:solidFill>
-                  <a:srgbClr val="333333"/>
-                </a:solidFill>
-                <a:latin typeface="Calibri"/>
-              </a:rPr>
-              <a:t>–   </a:t>
-            </a:r>
-            <a:r>
-              <a:rPr sz="2000" b="1" i="0">
-                <a:solidFill>
-                  <a:srgbClr val="333333"/>
-                </a:solidFill>
-                <a:latin typeface="Calibri"/>
-              </a:rPr>
-              <a:t>Cada señal va con su umbral</a:t>
-            </a:r>
-            <a:r>
-              <a:rPr sz="2000" b="0" i="0">
-                <a:solidFill>
-                  <a:srgbClr val="333333"/>
-                </a:solidFill>
-                <a:latin typeface="Calibri"/>
-              </a:rPr>
-              <a:t>: «medimos la latencia» no permite decidir nada.</a:t>
+              <a:rPr sz="1400" b="0" i="0">
+                <a:solidFill>
+                  <a:srgbClr val="FFFFFF"/>
+                </a:solidFill>
+                <a:latin typeface="Calibri"/>
+              </a:rPr>
+              <a:t>on: [push, pull_request]          # 1. disparadores</a:t>
             </a:r>
           </a:p>
           <a:p>
             <a:pPr>
               <a:spcAft>
-                <a:spcPts val="800"/>
+                <a:spcPts val="400"/>
               </a:spcAft>
             </a:pPr>
             <a:r>
-              <a:rPr sz="2000" b="0" i="0">
-                <a:solidFill>
-                  <a:srgbClr val="333333"/>
-                </a:solidFill>
-                <a:latin typeface="Calibri"/>
-              </a:rPr>
-              <a:t>–   Al menos una debe ser un </a:t>
-            </a:r>
-            <a:r>
-              <a:rPr sz="2000" b="1" i="0">
-                <a:solidFill>
-                  <a:srgbClr val="333333"/>
-                </a:solidFill>
-                <a:latin typeface="Calibri"/>
-              </a:rPr>
-              <a:t>registro</a:t>
-            </a:r>
-            <a:r>
-              <a:rPr sz="2000" b="0" i="0">
-                <a:solidFill>
-                  <a:srgbClr val="333333"/>
-                </a:solidFill>
-                <a:latin typeface="Calibri"/>
-              </a:rPr>
-              <a:t> (log), no una métrica numérica.</a:t>
+              <a:rPr sz="1400" b="0" i="0">
+                <a:solidFill>
+                  <a:srgbClr val="FFFFFF"/>
+                </a:solidFill>
+                <a:latin typeface="Calibri"/>
+              </a:rPr>
+              <a:t>jobs:</a:t>
             </a:r>
           </a:p>
           <a:p>
             <a:pPr>
               <a:spcAft>
-                <a:spcPts val="800"/>
+                <a:spcPts val="400"/>
               </a:spcAft>
             </a:pPr>
             <a:r>
-              <a:rPr sz="2000" b="0" i="0">
-                <a:solidFill>
-                  <a:srgbClr val="333333"/>
-                </a:solidFill>
-                <a:latin typeface="Calibri"/>
-              </a:rPr>
-              <a:t>–   Optimización: caché conceptual, paginación, límites de rate (anotar en informe).</a:t>
-            </a:r>
-          </a:p>
-        </p:txBody>
-      </p:sp>
-      <p:sp>
-        <p:nvSpPr>
-          <p:cNvPr id="6" name="TextBox 5"/>
+              <a:rPr sz="1400" b="0" i="0">
+                <a:solidFill>
+                  <a:srgbClr val="FFFFFF"/>
+                </a:solidFill>
+                <a:latin typeface="Calibri"/>
+              </a:rPr>
+              <a:t>  build:</a:t>
+            </a:r>
+          </a:p>
+          <a:p>
+            <a:pPr>
+              <a:spcAft>
+                <a:spcPts val="400"/>
+              </a:spcAft>
+            </a:pPr>
+            <a:r>
+              <a:rPr sz="1400" b="0" i="0">
+                <a:solidFill>
+                  <a:srgbClr val="FFFFFF"/>
+                </a:solidFill>
+                <a:latin typeface="Calibri"/>
+              </a:rPr>
+              <a:t>    runs-on: ubuntu-latest        # 2. entorno de ejecucion</a:t>
+            </a:r>
+          </a:p>
+          <a:p>
+            <a:pPr>
+              <a:spcAft>
+                <a:spcPts val="400"/>
+              </a:spcAft>
+            </a:pPr>
+            <a:r>
+              <a:rPr sz="1400" b="0" i="0">
+                <a:solidFill>
+                  <a:srgbClr val="FFFFFF"/>
+                </a:solidFill>
+                <a:latin typeface="Calibri"/>
+              </a:rPr>
+              <a:t>    steps:</a:t>
+            </a:r>
+          </a:p>
+          <a:p>
+            <a:pPr>
+              <a:spcAft>
+                <a:spcPts val="400"/>
+              </a:spcAft>
+            </a:pPr>
+            <a:r>
+              <a:rPr sz="1400" b="0" i="0">
+                <a:solidFill>
+                  <a:srgbClr val="FFFFFF"/>
+                </a:solidFill>
+                <a:latin typeface="Calibri"/>
+              </a:rPr>
+              <a:t>      - uses: actions/checkout@v4</a:t>
+            </a:r>
+          </a:p>
+          <a:p>
+            <a:pPr>
+              <a:spcAft>
+                <a:spcPts val="400"/>
+              </a:spcAft>
+            </a:pPr>
+            <a:r>
+              <a:rPr sz="1400" b="0" i="0">
+                <a:solidFill>
+                  <a:srgbClr val="FFFFFF"/>
+                </a:solidFill>
+                <a:latin typeface="Calibri"/>
+              </a:rPr>
+              <a:t>      - uses: actions/setup-node@v4</a:t>
+            </a:r>
+          </a:p>
+          <a:p>
+            <a:pPr>
+              <a:spcAft>
+                <a:spcPts val="400"/>
+              </a:spcAft>
+            </a:pPr>
+            <a:r>
+              <a:rPr sz="1400" b="0" i="0">
+                <a:solidFill>
+                  <a:srgbClr val="FFFFFF"/>
+                </a:solidFill>
+                <a:latin typeface="Calibri"/>
+              </a:rPr>
+              <a:t>        with: { node-version: '20' }</a:t>
+            </a:r>
+          </a:p>
+          <a:p>
+            <a:pPr>
+              <a:spcAft>
+                <a:spcPts val="400"/>
+              </a:spcAft>
+            </a:pPr>
+            <a:r>
+              <a:rPr sz="1400" b="0" i="0">
+                <a:solidFill>
+                  <a:srgbClr val="FFFFFF"/>
+                </a:solidFill>
+                <a:latin typeface="Calibri"/>
+              </a:rPr>
+              <a:t>      - name: Construir</a:t>
+            </a:r>
+          </a:p>
+          <a:p>
+            <a:pPr>
+              <a:spcAft>
+                <a:spcPts val="400"/>
+              </a:spcAft>
+            </a:pPr>
+            <a:r>
+              <a:rPr sz="1400" b="0" i="0">
+                <a:solidFill>
+                  <a:srgbClr val="FFFFFF"/>
+                </a:solidFill>
+                <a:latin typeface="Calibri"/>
+              </a:rPr>
+              <a:t>        run: npm ci &amp;&amp; docker build -t cloudlite-api:0.1.0.</a:t>
+            </a:r>
+          </a:p>
+          <a:p>
+            <a:pPr>
+              <a:spcAft>
+                <a:spcPts val="400"/>
+              </a:spcAft>
+            </a:pPr>
+            <a:r>
+              <a:rPr sz="1400" b="0" i="0">
+                <a:solidFill>
+                  <a:srgbClr val="FFFFFF"/>
+                </a:solidFill>
+                <a:latin typeface="Calibri"/>
+              </a:rPr>
+              <a:t>      - name: Probar</a:t>
+            </a:r>
+          </a:p>
+          <a:p>
+            <a:pPr>
+              <a:spcAft>
+                <a:spcPts val="400"/>
+              </a:spcAft>
+            </a:pPr>
+            <a:r>
+              <a:rPr sz="1400" b="0" i="0">
+                <a:solidFill>
+                  <a:srgbClr val="FFFFFF"/>
+                </a:solidFill>
+                <a:latin typeface="Calibri"/>
+              </a:rPr>
+              <a:t>        run: npm test              # &lt;- si esto no puede fallar, no es CI</a:t>
+            </a:r>
+          </a:p>
+          <a:p>
+            <a:pPr>
+              <a:spcAft>
+                <a:spcPts val="400"/>
+              </a:spcAft>
+            </a:pPr>
+            <a:r>
+              <a:rPr sz="1400" b="0" i="0">
+                <a:solidFill>
+                  <a:srgbClr val="FFFFFF"/>
+                </a:solidFill>
+                <a:latin typeface="Calibri"/>
+              </a:rPr>
+              <a:t>      - name: Despliegue SIMULADO (no despliega a ningun servidor)</a:t>
+            </a:r>
+          </a:p>
+          <a:p>
+            <a:pPr>
+              <a:spcAft>
+                <a:spcPts val="400"/>
+              </a:spcAft>
+            </a:pPr>
+            <a:r>
+              <a:rPr sz="1400" b="0" i="0">
+                <a:solidFill>
+                  <a:srgbClr val="FFFFFF"/>
+                </a:solidFill>
+                <a:latin typeface="Calibri"/>
+              </a:rPr>
+              <a:t>        run: echo "Artefacto cloudlite-api:0.1.0 listo para desplegar"</a:t>
+            </a:r>
+          </a:p>
+        </p:txBody>
+      </p:sp>
+      <p:sp>
+        <p:nvSpPr>
+          <p:cNvPr id="9" name="TextBox 8"/>
+          <p:cNvSpPr txBox="1"/>
+          <p:nvPr/>
+        </p:nvSpPr>
+        <p:spPr>
+          <a:xfrm>
+            <a:off x="457200" y="6080760"/>
+            <a:ext cx="11277295" cy="320040"/>
+          </a:xfrm>
+          <a:prstGeom prst="rect">
+            <a:avLst/>
+          </a:prstGeom>
+          <a:noFill/>
+        </p:spPr>
+        <p:txBody>
+          <a:bodyPr wrap="square">
+            <a:spAutoFit/>
+          </a:bodyPr>
+          <a:lstStyle/>
+          <a:p>
+            <a:pPr algn="ctr"/>
+            <a:r>
+              <a:rPr sz="1200" b="0" i="1">
+                <a:solidFill>
+                  <a:srgbClr val="666666"/>
+                </a:solidFill>
+                <a:latin typeface="Calibri"/>
+              </a:rPr>
+              <a:t>Los tres pasos, en orden, y el ultimo rotulado como simulado. Secretos con ${{ secrets.NOMBRE }}, NUNCA en claro dentro del YAML.</a:t>
+            </a:r>
+          </a:p>
+        </p:txBody>
+      </p:sp>
+      <p:sp>
+        <p:nvSpPr>
+          <p:cNvPr id="10" name="TextBox 9"/>
           <p:cNvSpPr txBox="1"/>
           <p:nvPr/>
         </p:nvSpPr>
@@ -6543,7 +6829,7 @@
         <p:spPr>
           <a:xfrm>
             <a:off x="0" y="0"/>
-            <a:ext cx="12191695" cy="960120"/>
+            <a:ext cx="12191695" cy="1170432"/>
           </a:xfrm>
           <a:prstGeom prst="rect">
             <a:avLst/>
@@ -6585,7 +6871,7 @@
         </p:nvSpPr>
         <p:spPr>
           <a:xfrm>
-            <a:off x="0" y="960120"/>
+            <a:off x="0" y="1170432"/>
             <a:ext cx="12191695" cy="41148"/>
           </a:xfrm>
           <a:prstGeom prst="rect">
@@ -6629,7 +6915,7 @@
         <p:spPr>
           <a:xfrm>
             <a:off x="457200" y="164592"/>
-            <a:ext cx="11277295" cy="502920"/>
+            <a:ext cx="11277295" cy="384048"/>
           </a:xfrm>
           <a:prstGeom prst="rect">
             <a:avLst/>
@@ -6649,21 +6935,55 @@
                 </a:solidFill>
                 <a:latin typeface="Calibri"/>
               </a:rPr>
-              <a:t>.github/workflows/ci.yml — CI real, no un echo</a:t>
-            </a:r>
-          </a:p>
-        </p:txBody>
-      </p:sp>
-      <p:sp>
-        <p:nvSpPr>
-          <p:cNvPr id="5" name="Rounded Rectangle 4"/>
+              <a:t>Herramientas de hoy</a:t>
+            </a:r>
+          </a:p>
+        </p:txBody>
+      </p:sp>
+      <p:sp>
+        <p:nvSpPr>
+          <p:cNvPr id="5" name="TextBox 4"/>
+          <p:cNvSpPr txBox="1"/>
+          <p:nvPr/>
+        </p:nvSpPr>
+        <p:spPr>
+          <a:xfrm>
+            <a:off x="457200" y="566928"/>
+            <a:ext cx="11277295" cy="411480"/>
+          </a:xfrm>
+          <a:prstGeom prst="rect">
+            <a:avLst/>
+          </a:prstGeom>
+          <a:noFill/>
+        </p:spPr>
+        <p:txBody>
+          <a:bodyPr wrap="square">
+            <a:spAutoFit/>
+          </a:bodyPr>
+          <a:lstStyle/>
+          <a:p>
+            <a:r>
+              <a:rPr sz="1400" b="0" i="0">
+                <a:solidFill>
+                  <a:srgbClr val="B8D8EE"/>
+                </a:solidFill>
+                <a:latin typeface="Calibri"/>
+              </a:rPr>
+              <a:t>Gratis · navegador o free tier · sin cuenta de pago</a:t>
+            </a:r>
+          </a:p>
+        </p:txBody>
+      </p:sp>
+      <p:sp>
+        <p:nvSpPr>
+          <p:cNvPr id="6" name="Rounded Rectangle 5"/>
           <p:cNvSpPr/>
           <p:nvPr/>
         </p:nvSpPr>
         <p:spPr>
           <a:xfrm>
-            <a:off x="457200" y="1261872"/>
-            <a:ext cx="11277295" cy="4773168"/>
+            <a:off x="457200" y="1591056"/>
+            <a:ext cx="3624986" cy="2331720"/>
           </a:xfrm>
           <a:prstGeom prst="roundRect">
             <a:avLst>
@@ -6671,7 +6991,7 @@
             </a:avLst>
           </a:prstGeom>
           <a:solidFill>
-            <a:srgbClr val="1E2A38"/>
+            <a:srgbClr val="F2F2F2"/>
           </a:solidFill>
           <a:ln>
             <a:noFill/>
@@ -6701,14 +7021,14 @@
       </p:sp>
       <p:sp>
         <p:nvSpPr>
-          <p:cNvPr id="6" name="Rectangle 5"/>
+          <p:cNvPr id="7" name="Rectangle 6"/>
           <p:cNvSpPr/>
           <p:nvPr/>
         </p:nvSpPr>
         <p:spPr>
           <a:xfrm>
-            <a:off x="457200" y="1261872"/>
-            <a:ext cx="11277295" cy="320040"/>
+            <a:off x="457200" y="1591056"/>
+            <a:ext cx="3624986" cy="64008"/>
           </a:xfrm>
           <a:prstGeom prst="rect">
             <a:avLst/>
@@ -6744,14 +7064,81 @@
       </p:sp>
       <p:sp>
         <p:nvSpPr>
-          <p:cNvPr id="7" name="TextBox 6"/>
+          <p:cNvPr id="8" name="Rectangle 7"/>
+          <p:cNvSpPr/>
+          <p:nvPr/>
+        </p:nvSpPr>
+        <p:spPr>
+          <a:xfrm>
+            <a:off x="457200" y="1655064"/>
+            <a:ext cx="3624986" cy="27432"/>
+          </a:xfrm>
+          <a:prstGeom prst="rect">
+            <a:avLst/>
+          </a:prstGeom>
+          <a:solidFill>
+            <a:srgbClr val="FFD000"/>
+          </a:solidFill>
+          <a:ln>
+            <a:noFill/>
+          </a:ln>
+        </p:spPr>
+        <p:style>
+          <a:lnRef idx="1">
+            <a:schemeClr val="accent1"/>
+          </a:lnRef>
+          <a:fillRef idx="3">
+            <a:schemeClr val="accent1"/>
+          </a:fillRef>
+          <a:effectRef idx="2">
+            <a:schemeClr val="accent1"/>
+          </a:effectRef>
+          <a:fontRef idx="minor">
+            <a:schemeClr val="lt1"/>
+          </a:fontRef>
+        </p:style>
+        <p:txBody>
+          <a:bodyPr rtlCol="0" anchor="ctr"/>
+          <a:lstStyle/>
+          <a:p>
+            <a:pPr algn="ctr"/>
+          </a:p>
+        </p:txBody>
+      </p:sp>
+      <p:pic>
+        <p:nvPicPr>
+          <p:cNvPr id="9" name="Picture 8" descr="github_actions.png"/>
+          <p:cNvPicPr>
+            <a:picLocks noChangeAspect="1"/>
+          </p:cNvPicPr>
+          <p:nvPr/>
+        </p:nvPicPr>
+        <p:blipFill>
+          <a:blip r:embed="rId2"/>
+          <a:stretch>
+            <a:fillRect/>
+          </a:stretch>
+        </p:blipFill>
+        <p:spPr>
+          <a:xfrm>
+            <a:off x="1643329" y="1847087"/>
+            <a:ext cx="1252728" cy="1252728"/>
+          </a:xfrm>
+          <a:prstGeom prst="rect">
+            <a:avLst/>
+          </a:prstGeom>
+        </p:spPr>
+      </p:pic>
+      <p:sp>
+        <p:nvSpPr>
+          <p:cNvPr id="10" name="TextBox 9"/>
           <p:cNvSpPr txBox="1"/>
           <p:nvPr/>
         </p:nvSpPr>
         <p:spPr>
           <a:xfrm>
-            <a:off x="685800" y="1307592"/>
-            <a:ext cx="10820095" cy="256032"/>
+            <a:off x="530352" y="3191256"/>
+            <a:ext cx="3478682" cy="621792"/>
           </a:xfrm>
           <a:prstGeom prst="rect">
             <a:avLst/>
@@ -6759,31 +7146,203 @@
           <a:noFill/>
         </p:spPr>
         <p:txBody>
-          <a:bodyPr wrap="square" anchor="ctr"/>
-          <a:lstStyle/>
-          <a:p>
-            <a:r>
-              <a:rPr sz="1000" b="1" i="0">
-                <a:solidFill>
-                  <a:srgbClr val="269CCB"/>
-                </a:solidFill>
-                <a:latin typeface="Calibri"/>
-              </a:rPr>
-              <a:t>● ● ●</a:t>
-            </a:r>
-          </a:p>
-        </p:txBody>
-      </p:sp>
-      <p:sp>
-        <p:nvSpPr>
-          <p:cNvPr id="8" name="TextBox 7"/>
+          <a:bodyPr wrap="square" anchor="t"/>
+          <a:lstStyle/>
+          <a:p>
+            <a:pPr algn="ctr"/>
+            <a:r>
+              <a:rPr sz="1300" b="1" i="0">
+                <a:solidFill>
+                  <a:srgbClr val="095292"/>
+                </a:solidFill>
+                <a:latin typeface="Calibri"/>
+              </a:rPr>
+              <a:t>GitHub Actions</a:t>
+            </a:r>
+          </a:p>
+          <a:p>
+            <a:pPr algn="ctr">
+              <a:spcBef>
+                <a:spcPts val="200"/>
+              </a:spcBef>
+            </a:pPr>
+            <a:r>
+              <a:rPr sz="1000" b="0" i="0">
+                <a:solidFill>
+                  <a:srgbClr val="666666"/>
+                </a:solidFill>
+                <a:latin typeface="Calibri"/>
+              </a:rPr>
+              <a:t>CI del PI</a:t>
+            </a:r>
+          </a:p>
+        </p:txBody>
+      </p:sp>
+      <p:sp>
+        <p:nvSpPr>
+          <p:cNvPr id="11" name="Rounded Rectangle 10"/>
+          <p:cNvSpPr/>
+          <p:nvPr/>
+        </p:nvSpPr>
+        <p:spPr>
+          <a:xfrm>
+            <a:off x="4283354" y="1591056"/>
+            <a:ext cx="3624986" cy="2331720"/>
+          </a:xfrm>
+          <a:prstGeom prst="roundRect">
+            <a:avLst>
+              <a:gd name="adj" fmla="val 12000"/>
+            </a:avLst>
+          </a:prstGeom>
+          <a:solidFill>
+            <a:srgbClr val="F2F2F2"/>
+          </a:solidFill>
+          <a:ln>
+            <a:noFill/>
+          </a:ln>
+        </p:spPr>
+        <p:style>
+          <a:lnRef idx="1">
+            <a:schemeClr val="accent1"/>
+          </a:lnRef>
+          <a:fillRef idx="3">
+            <a:schemeClr val="accent1"/>
+          </a:fillRef>
+          <a:effectRef idx="2">
+            <a:schemeClr val="accent1"/>
+          </a:effectRef>
+          <a:fontRef idx="minor">
+            <a:schemeClr val="lt1"/>
+          </a:fontRef>
+        </p:style>
+        <p:txBody>
+          <a:bodyPr rtlCol="0" anchor="ctr"/>
+          <a:lstStyle/>
+          <a:p>
+            <a:pPr algn="ctr"/>
+          </a:p>
+        </p:txBody>
+      </p:sp>
+      <p:sp>
+        <p:nvSpPr>
+          <p:cNvPr id="12" name="Rectangle 11"/>
+          <p:cNvSpPr/>
+          <p:nvPr/>
+        </p:nvSpPr>
+        <p:spPr>
+          <a:xfrm>
+            <a:off x="4283354" y="1591056"/>
+            <a:ext cx="3624986" cy="64008"/>
+          </a:xfrm>
+          <a:prstGeom prst="rect">
+            <a:avLst/>
+          </a:prstGeom>
+          <a:solidFill>
+            <a:srgbClr val="095292"/>
+          </a:solidFill>
+          <a:ln>
+            <a:noFill/>
+          </a:ln>
+        </p:spPr>
+        <p:style>
+          <a:lnRef idx="1">
+            <a:schemeClr val="accent1"/>
+          </a:lnRef>
+          <a:fillRef idx="3">
+            <a:schemeClr val="accent1"/>
+          </a:fillRef>
+          <a:effectRef idx="2">
+            <a:schemeClr val="accent1"/>
+          </a:effectRef>
+          <a:fontRef idx="minor">
+            <a:schemeClr val="lt1"/>
+          </a:fontRef>
+        </p:style>
+        <p:txBody>
+          <a:bodyPr rtlCol="0" anchor="ctr"/>
+          <a:lstStyle/>
+          <a:p>
+            <a:pPr algn="ctr"/>
+          </a:p>
+        </p:txBody>
+      </p:sp>
+      <p:sp>
+        <p:nvSpPr>
+          <p:cNvPr id="13" name="Rectangle 12"/>
+          <p:cNvSpPr/>
+          <p:nvPr/>
+        </p:nvSpPr>
+        <p:spPr>
+          <a:xfrm>
+            <a:off x="4283354" y="1655064"/>
+            <a:ext cx="3624986" cy="27432"/>
+          </a:xfrm>
+          <a:prstGeom prst="rect">
+            <a:avLst/>
+          </a:prstGeom>
+          <a:solidFill>
+            <a:srgbClr val="FFD000"/>
+          </a:solidFill>
+          <a:ln>
+            <a:noFill/>
+          </a:ln>
+        </p:spPr>
+        <p:style>
+          <a:lnRef idx="1">
+            <a:schemeClr val="accent1"/>
+          </a:lnRef>
+          <a:fillRef idx="3">
+            <a:schemeClr val="accent1"/>
+          </a:fillRef>
+          <a:effectRef idx="2">
+            <a:schemeClr val="accent1"/>
+          </a:effectRef>
+          <a:fontRef idx="minor">
+            <a:schemeClr val="lt1"/>
+          </a:fontRef>
+        </p:style>
+        <p:txBody>
+          <a:bodyPr rtlCol="0" anchor="ctr"/>
+          <a:lstStyle/>
+          <a:p>
+            <a:pPr algn="ctr"/>
+          </a:p>
+        </p:txBody>
+      </p:sp>
+      <p:pic>
+        <p:nvPicPr>
+          <p:cNvPr id="14" name="Picture 13" descr="google_docs.png"/>
+          <p:cNvPicPr>
+            <a:picLocks noChangeAspect="1"/>
+          </p:cNvPicPr>
+          <p:nvPr/>
+        </p:nvPicPr>
+        <p:blipFill>
+          <a:blip r:embed="rId3"/>
+          <a:stretch>
+            <a:fillRect/>
+          </a:stretch>
+        </p:blipFill>
+        <p:spPr>
+          <a:xfrm>
+            <a:off x="5469483" y="1847087"/>
+            <a:ext cx="1252728" cy="1252728"/>
+          </a:xfrm>
+          <a:prstGeom prst="rect">
+            <a:avLst/>
+          </a:prstGeom>
+        </p:spPr>
+      </p:pic>
+      <p:sp>
+        <p:nvSpPr>
+          <p:cNvPr id="15" name="TextBox 14"/>
           <p:cNvSpPr txBox="1"/>
           <p:nvPr/>
         </p:nvSpPr>
         <p:spPr>
           <a:xfrm>
-            <a:off x="777240" y="1719072"/>
-            <a:ext cx="10637215" cy="4133087"/>
+            <a:off x="4356506" y="3191256"/>
+            <a:ext cx="3478682" cy="621792"/>
           </a:xfrm>
           <a:prstGeom prst="rect">
             <a:avLst/>
@@ -6791,290 +7350,245 @@
           <a:noFill/>
         </p:spPr>
         <p:txBody>
-          <a:bodyPr wrap="square">
-            <a:spAutoFit/>
-          </a:bodyPr>
-          <a:lstStyle/>
-          <a:p>
-            <a:pPr>
-              <a:spcAft>
-                <a:spcPts val="400"/>
-              </a:spcAft>
+          <a:bodyPr wrap="square" anchor="t"/>
+          <a:lstStyle/>
+          <a:p>
+            <a:pPr algn="ctr"/>
+            <a:r>
+              <a:rPr sz="1300" b="1" i="0">
+                <a:solidFill>
+                  <a:srgbClr val="095292"/>
+                </a:solidFill>
+                <a:latin typeface="Calibri"/>
+              </a:rPr>
+              <a:t>Google Docs</a:t>
+            </a:r>
+          </a:p>
+          <a:p>
+            <a:pPr algn="ctr">
+              <a:spcBef>
+                <a:spcPts val="200"/>
+              </a:spcBef>
             </a:pPr>
             <a:r>
-              <a:rPr sz="1400" b="0" i="0">
-                <a:solidFill>
-                  <a:srgbClr val="FFFFFF"/>
-                </a:solidFill>
-                <a:latin typeface="Calibri"/>
-              </a:rPr>
-              <a:t>name: CI</a:t>
-            </a:r>
-          </a:p>
-          <a:p>
-            <a:pPr>
-              <a:spcAft>
-                <a:spcPts val="400"/>
-              </a:spcAft>
+              <a:rPr sz="1000" b="0" i="0">
+                <a:solidFill>
+                  <a:srgbClr val="666666"/>
+                </a:solidFill>
+                <a:latin typeface="Calibri"/>
+              </a:rPr>
+              <a:t>Informe PI</a:t>
+            </a:r>
+          </a:p>
+        </p:txBody>
+      </p:sp>
+      <p:sp>
+        <p:nvSpPr>
+          <p:cNvPr id="16" name="Rounded Rectangle 15"/>
+          <p:cNvSpPr/>
+          <p:nvPr/>
+        </p:nvSpPr>
+        <p:spPr>
+          <a:xfrm>
+            <a:off x="8109508" y="1591056"/>
+            <a:ext cx="3624986" cy="2331720"/>
+          </a:xfrm>
+          <a:prstGeom prst="roundRect">
+            <a:avLst>
+              <a:gd name="adj" fmla="val 12000"/>
+            </a:avLst>
+          </a:prstGeom>
+          <a:solidFill>
+            <a:srgbClr val="F2F2F2"/>
+          </a:solidFill>
+          <a:ln>
+            <a:noFill/>
+          </a:ln>
+        </p:spPr>
+        <p:style>
+          <a:lnRef idx="1">
+            <a:schemeClr val="accent1"/>
+          </a:lnRef>
+          <a:fillRef idx="3">
+            <a:schemeClr val="accent1"/>
+          </a:fillRef>
+          <a:effectRef idx="2">
+            <a:schemeClr val="accent1"/>
+          </a:effectRef>
+          <a:fontRef idx="minor">
+            <a:schemeClr val="lt1"/>
+          </a:fontRef>
+        </p:style>
+        <p:txBody>
+          <a:bodyPr rtlCol="0" anchor="ctr"/>
+          <a:lstStyle/>
+          <a:p>
+            <a:pPr algn="ctr"/>
+          </a:p>
+        </p:txBody>
+      </p:sp>
+      <p:sp>
+        <p:nvSpPr>
+          <p:cNvPr id="17" name="Rectangle 16"/>
+          <p:cNvSpPr/>
+          <p:nvPr/>
+        </p:nvSpPr>
+        <p:spPr>
+          <a:xfrm>
+            <a:off x="8109508" y="1591056"/>
+            <a:ext cx="3624986" cy="64008"/>
+          </a:xfrm>
+          <a:prstGeom prst="rect">
+            <a:avLst/>
+          </a:prstGeom>
+          <a:solidFill>
+            <a:srgbClr val="095292"/>
+          </a:solidFill>
+          <a:ln>
+            <a:noFill/>
+          </a:ln>
+        </p:spPr>
+        <p:style>
+          <a:lnRef idx="1">
+            <a:schemeClr val="accent1"/>
+          </a:lnRef>
+          <a:fillRef idx="3">
+            <a:schemeClr val="accent1"/>
+          </a:fillRef>
+          <a:effectRef idx="2">
+            <a:schemeClr val="accent1"/>
+          </a:effectRef>
+          <a:fontRef idx="minor">
+            <a:schemeClr val="lt1"/>
+          </a:fontRef>
+        </p:style>
+        <p:txBody>
+          <a:bodyPr rtlCol="0" anchor="ctr"/>
+          <a:lstStyle/>
+          <a:p>
+            <a:pPr algn="ctr"/>
+          </a:p>
+        </p:txBody>
+      </p:sp>
+      <p:sp>
+        <p:nvSpPr>
+          <p:cNvPr id="18" name="Rectangle 17"/>
+          <p:cNvSpPr/>
+          <p:nvPr/>
+        </p:nvSpPr>
+        <p:spPr>
+          <a:xfrm>
+            <a:off x="8109508" y="1655064"/>
+            <a:ext cx="3624986" cy="27432"/>
+          </a:xfrm>
+          <a:prstGeom prst="rect">
+            <a:avLst/>
+          </a:prstGeom>
+          <a:solidFill>
+            <a:srgbClr val="FFD000"/>
+          </a:solidFill>
+          <a:ln>
+            <a:noFill/>
+          </a:ln>
+        </p:spPr>
+        <p:style>
+          <a:lnRef idx="1">
+            <a:schemeClr val="accent1"/>
+          </a:lnRef>
+          <a:fillRef idx="3">
+            <a:schemeClr val="accent1"/>
+          </a:fillRef>
+          <a:effectRef idx="2">
+            <a:schemeClr val="accent1"/>
+          </a:effectRef>
+          <a:fontRef idx="minor">
+            <a:schemeClr val="lt1"/>
+          </a:fontRef>
+        </p:style>
+        <p:txBody>
+          <a:bodyPr rtlCol="0" anchor="ctr"/>
+          <a:lstStyle/>
+          <a:p>
+            <a:pPr algn="ctr"/>
+          </a:p>
+        </p:txBody>
+      </p:sp>
+      <p:pic>
+        <p:nvPicPr>
+          <p:cNvPr id="19" name="Picture 18" descr="examlab.png"/>
+          <p:cNvPicPr>
+            <a:picLocks noChangeAspect="1"/>
+          </p:cNvPicPr>
+          <p:nvPr/>
+        </p:nvPicPr>
+        <p:blipFill>
+          <a:blip r:embed="rId4"/>
+          <a:stretch>
+            <a:fillRect/>
+          </a:stretch>
+        </p:blipFill>
+        <p:spPr>
+          <a:xfrm>
+            <a:off x="9295638" y="1847087"/>
+            <a:ext cx="1252728" cy="1252728"/>
+          </a:xfrm>
+          <a:prstGeom prst="rect">
+            <a:avLst/>
+          </a:prstGeom>
+        </p:spPr>
+      </p:pic>
+      <p:sp>
+        <p:nvSpPr>
+          <p:cNvPr id="20" name="TextBox 19"/>
+          <p:cNvSpPr txBox="1"/>
+          <p:nvPr/>
+        </p:nvSpPr>
+        <p:spPr>
+          <a:xfrm>
+            <a:off x="8182660" y="3191256"/>
+            <a:ext cx="3478682" cy="621792"/>
+          </a:xfrm>
+          <a:prstGeom prst="rect">
+            <a:avLst/>
+          </a:prstGeom>
+          <a:noFill/>
+        </p:spPr>
+        <p:txBody>
+          <a:bodyPr wrap="square" anchor="t"/>
+          <a:lstStyle/>
+          <a:p>
+            <a:pPr algn="ctr"/>
+            <a:r>
+              <a:rPr sz="1300" b="1" i="0">
+                <a:solidFill>
+                  <a:srgbClr val="095292"/>
+                </a:solidFill>
+                <a:latin typeface="Calibri"/>
+              </a:rPr>
+              <a:t>la plataforma del curso</a:t>
+            </a:r>
+          </a:p>
+          <a:p>
+            <a:pPr algn="ctr">
+              <a:spcBef>
+                <a:spcPts val="200"/>
+              </a:spcBef>
             </a:pPr>
             <a:r>
-              <a:rPr sz="1400" b="0" i="0">
-                <a:solidFill>
-                  <a:srgbClr val="FFFFFF"/>
-                </a:solidFill>
-                <a:latin typeface="Calibri"/>
-              </a:rPr>
-              <a:t>on: [push, pull_request]          # 1. disparadores</a:t>
-            </a:r>
-          </a:p>
-          <a:p>
-            <a:pPr>
-              <a:spcAft>
-                <a:spcPts val="400"/>
-              </a:spcAft>
-            </a:pPr>
-            <a:r>
-              <a:rPr sz="1400" b="0" i="0">
-                <a:solidFill>
-                  <a:srgbClr val="FFFFFF"/>
-                </a:solidFill>
-                <a:latin typeface="Calibri"/>
-              </a:rPr>
-              <a:t>jobs:</a:t>
-            </a:r>
-          </a:p>
-          <a:p>
-            <a:pPr>
-              <a:spcAft>
-                <a:spcPts val="400"/>
-              </a:spcAft>
-            </a:pPr>
-            <a:r>
-              <a:rPr sz="1400" b="0" i="0">
-                <a:solidFill>
-                  <a:srgbClr val="FFFFFF"/>
-                </a:solidFill>
-                <a:latin typeface="Calibri"/>
-              </a:rPr>
-              <a:t>  build:</a:t>
-            </a:r>
-          </a:p>
-          <a:p>
-            <a:pPr>
-              <a:spcAft>
-                <a:spcPts val="400"/>
-              </a:spcAft>
-            </a:pPr>
-            <a:r>
-              <a:rPr sz="1400" b="0" i="0">
-                <a:solidFill>
-                  <a:srgbClr val="FFFFFF"/>
-                </a:solidFill>
-                <a:latin typeface="Calibri"/>
-              </a:rPr>
-              <a:t>    runs-on: ubuntu-latest        # 2. entorno de ejecucion</a:t>
-            </a:r>
-          </a:p>
-          <a:p>
-            <a:pPr>
-              <a:spcAft>
-                <a:spcPts val="400"/>
-              </a:spcAft>
-            </a:pPr>
-            <a:r>
-              <a:rPr sz="1400" b="0" i="0">
-                <a:solidFill>
-                  <a:srgbClr val="FFFFFF"/>
-                </a:solidFill>
-                <a:latin typeface="Calibri"/>
-              </a:rPr>
-              <a:t>    steps:</a:t>
-            </a:r>
-          </a:p>
-          <a:p>
-            <a:pPr>
-              <a:spcAft>
-                <a:spcPts val="400"/>
-              </a:spcAft>
-            </a:pPr>
-            <a:r>
-              <a:rPr sz="1400" b="0" i="0">
-                <a:solidFill>
-                  <a:srgbClr val="FFFFFF"/>
-                </a:solidFill>
-                <a:latin typeface="Calibri"/>
-              </a:rPr>
-              <a:t>      - uses: actions/checkout@v4</a:t>
-            </a:r>
-          </a:p>
-          <a:p>
-            <a:pPr>
-              <a:spcAft>
-                <a:spcPts val="400"/>
-              </a:spcAft>
-            </a:pPr>
-            <a:r>
-              <a:rPr sz="1400" b="0" i="0">
-                <a:solidFill>
-                  <a:srgbClr val="FFFFFF"/>
-                </a:solidFill>
-                <a:latin typeface="Calibri"/>
-              </a:rPr>
-              <a:t>      - uses: actions/setup-node@v4</a:t>
-            </a:r>
-          </a:p>
-          <a:p>
-            <a:pPr>
-              <a:spcAft>
-                <a:spcPts val="400"/>
-              </a:spcAft>
-            </a:pPr>
-            <a:r>
-              <a:rPr sz="1400" b="0" i="0">
-                <a:solidFill>
-                  <a:srgbClr val="FFFFFF"/>
-                </a:solidFill>
-                <a:latin typeface="Calibri"/>
-              </a:rPr>
-              <a:t>        with: { node-version: '20' }</a:t>
-            </a:r>
-          </a:p>
-          <a:p>
-            <a:pPr>
-              <a:spcAft>
-                <a:spcPts val="400"/>
-              </a:spcAft>
-            </a:pPr>
-            <a:r>
-              <a:rPr sz="1400" b="0" i="0">
-                <a:solidFill>
-                  <a:srgbClr val="FFFFFF"/>
-                </a:solidFill>
-                <a:latin typeface="Calibri"/>
-              </a:rPr>
-              <a:t>      - name: Construir</a:t>
-            </a:r>
-          </a:p>
-          <a:p>
-            <a:pPr>
-              <a:spcAft>
-                <a:spcPts val="400"/>
-              </a:spcAft>
-            </a:pPr>
-            <a:r>
-              <a:rPr sz="1400" b="0" i="0">
-                <a:solidFill>
-                  <a:srgbClr val="FFFFFF"/>
-                </a:solidFill>
-                <a:latin typeface="Calibri"/>
-              </a:rPr>
-              <a:t>        run: npm ci &amp;&amp; docker build -t cloudlite-api:0.1.0.</a:t>
-            </a:r>
-          </a:p>
-          <a:p>
-            <a:pPr>
-              <a:spcAft>
-                <a:spcPts val="400"/>
-              </a:spcAft>
-            </a:pPr>
-            <a:r>
-              <a:rPr sz="1400" b="0" i="0">
-                <a:solidFill>
-                  <a:srgbClr val="FFFFFF"/>
-                </a:solidFill>
-                <a:latin typeface="Calibri"/>
-              </a:rPr>
-              <a:t>      - name: Probar</a:t>
-            </a:r>
-          </a:p>
-          <a:p>
-            <a:pPr>
-              <a:spcAft>
-                <a:spcPts val="400"/>
-              </a:spcAft>
-            </a:pPr>
-            <a:r>
-              <a:rPr sz="1400" b="0" i="0">
-                <a:solidFill>
-                  <a:srgbClr val="FFFFFF"/>
-                </a:solidFill>
-                <a:latin typeface="Calibri"/>
-              </a:rPr>
-              <a:t>        run: npm test              # &lt;- si esto no puede fallar, no es CI</a:t>
-            </a:r>
-          </a:p>
-          <a:p>
-            <a:pPr>
-              <a:spcAft>
-                <a:spcPts val="400"/>
-              </a:spcAft>
-            </a:pPr>
-            <a:r>
-              <a:rPr sz="1400" b="0" i="0">
-                <a:solidFill>
-                  <a:srgbClr val="FFFFFF"/>
-                </a:solidFill>
-                <a:latin typeface="Calibri"/>
-              </a:rPr>
-              <a:t>      - name: Despliegue SIMULADO (no despliega a ningun servidor)</a:t>
-            </a:r>
-          </a:p>
-          <a:p>
-            <a:pPr>
-              <a:spcAft>
-                <a:spcPts val="400"/>
-              </a:spcAft>
-            </a:pPr>
-            <a:r>
-              <a:rPr sz="1400" b="0" i="0">
-                <a:solidFill>
-                  <a:srgbClr val="FFFFFF"/>
-                </a:solidFill>
-                <a:latin typeface="Calibri"/>
-              </a:rPr>
-              <a:t>        run: echo "Artefacto cloudlite-api:0.1.0 listo para desplegar"</a:t>
-            </a:r>
-          </a:p>
-        </p:txBody>
-      </p:sp>
-      <p:sp>
-        <p:nvSpPr>
-          <p:cNvPr id="9" name="TextBox 8"/>
-          <p:cNvSpPr txBox="1"/>
-          <p:nvPr/>
-        </p:nvSpPr>
-        <p:spPr>
-          <a:xfrm>
-            <a:off x="457200" y="6080760"/>
-            <a:ext cx="11277295" cy="320040"/>
-          </a:xfrm>
-          <a:prstGeom prst="rect">
-            <a:avLst/>
-          </a:prstGeom>
-          <a:noFill/>
-        </p:spPr>
-        <p:txBody>
-          <a:bodyPr wrap="square">
-            <a:spAutoFit/>
-          </a:bodyPr>
-          <a:lstStyle/>
-          <a:p>
-            <a:pPr algn="ctr"/>
-            <a:r>
-              <a:rPr sz="1200" b="0" i="1">
+              <a:rPr sz="1000" b="0" i="0">
                 <a:solidFill>
                   <a:srgbClr val="666666"/>
                 </a:solidFill>
                 <a:latin typeface="Calibri"/>
               </a:rPr>
-              <a:t>Los tres pasos, en orden, y el ultimo rotulado como simulado. Secretos con ${{ secrets.NOMBRE }}, NUNCA en claro dentro del YAML.</a:t>
-            </a:r>
-          </a:p>
-        </p:txBody>
-      </p:sp>
-      <p:sp>
-        <p:nvSpPr>
-          <p:cNvPr id="10" name="TextBox 9"/>
+              <a:t>Donde se entrega</a:t>
+            </a:r>
+          </a:p>
+        </p:txBody>
+      </p:sp>
+      <p:sp>
+        <p:nvSpPr>
+          <p:cNvPr id="21" name="TextBox 20"/>
           <p:cNvSpPr txBox="1"/>
           <p:nvPr/>
         </p:nvSpPr>
@@ -7142,7 +7656,7 @@
         <p:spPr>
           <a:xfrm>
             <a:off x="0" y="0"/>
-            <a:ext cx="12191695" cy="1170432"/>
+            <a:ext cx="12191695" cy="960120"/>
           </a:xfrm>
           <a:prstGeom prst="rect">
             <a:avLst/>
@@ -7184,7 +7698,7 @@
         </p:nvSpPr>
         <p:spPr>
           <a:xfrm>
-            <a:off x="0" y="1170432"/>
+            <a:off x="0" y="960120"/>
             <a:ext cx="12191695" cy="41148"/>
           </a:xfrm>
           <a:prstGeom prst="rect">
@@ -7228,7 +7742,7 @@
         <p:spPr>
           <a:xfrm>
             <a:off x="457200" y="164592"/>
-            <a:ext cx="11277295" cy="384048"/>
+            <a:ext cx="11277295" cy="502920"/>
           </a:xfrm>
           <a:prstGeom prst="rect">
             <a:avLst/>
@@ -7248,7 +7762,7 @@
                 </a:solidFill>
                 <a:latin typeface="Calibri"/>
               </a:rPr>
-              <a:t>Herramientas de hoy</a:t>
+              <a:t>PI CloudLite — entregable de hoy</a:t>
             </a:r>
           </a:p>
         </p:txBody>
@@ -7261,8 +7775,8 @@
         </p:nvSpPr>
         <p:spPr>
           <a:xfrm>
-            <a:off x="457200" y="566928"/>
-            <a:ext cx="11277295" cy="411480"/>
+            <a:off x="457200" y="1170432"/>
+            <a:ext cx="11277295" cy="5230368"/>
           </a:xfrm>
           <a:prstGeom prst="rect">
             <a:avLst/>
@@ -7275,633 +7789,119 @@
           </a:bodyPr>
           <a:lstStyle/>
           <a:p>
-            <a:r>
-              <a:rPr sz="1400" b="0" i="0">
-                <a:solidFill>
-                  <a:srgbClr val="B8D8EE"/>
-                </a:solidFill>
-                <a:latin typeface="Calibri"/>
-              </a:rPr>
-              <a:t>Gratis · navegador o free tier · sin cuenta de pago</a:t>
-            </a:r>
-          </a:p>
-        </p:txBody>
-      </p:sp>
-      <p:sp>
-        <p:nvSpPr>
-          <p:cNvPr id="6" name="Rounded Rectangle 5"/>
-          <p:cNvSpPr/>
-          <p:nvPr/>
-        </p:nvSpPr>
-        <p:spPr>
-          <a:xfrm>
-            <a:off x="457200" y="1591056"/>
-            <a:ext cx="3624986" cy="2331720"/>
-          </a:xfrm>
-          <a:prstGeom prst="roundRect">
-            <a:avLst>
-              <a:gd name="adj" fmla="val 12000"/>
-            </a:avLst>
-          </a:prstGeom>
-          <a:solidFill>
-            <a:srgbClr val="F2F2F2"/>
-          </a:solidFill>
-          <a:ln>
-            <a:noFill/>
-          </a:ln>
-        </p:spPr>
-        <p:style>
-          <a:lnRef idx="1">
-            <a:schemeClr val="accent1"/>
-          </a:lnRef>
-          <a:fillRef idx="3">
-            <a:schemeClr val="accent1"/>
-          </a:fillRef>
-          <a:effectRef idx="2">
-            <a:schemeClr val="accent1"/>
-          </a:effectRef>
-          <a:fontRef idx="minor">
-            <a:schemeClr val="lt1"/>
-          </a:fontRef>
-        </p:style>
-        <p:txBody>
-          <a:bodyPr rtlCol="0" anchor="ctr"/>
-          <a:lstStyle/>
-          <a:p>
-            <a:pPr algn="ctr"/>
-          </a:p>
-        </p:txBody>
-      </p:sp>
-      <p:sp>
-        <p:nvSpPr>
-          <p:cNvPr id="7" name="Rectangle 6"/>
-          <p:cNvSpPr/>
-          <p:nvPr/>
-        </p:nvSpPr>
-        <p:spPr>
-          <a:xfrm>
-            <a:off x="457200" y="1591056"/>
-            <a:ext cx="3624986" cy="64008"/>
-          </a:xfrm>
-          <a:prstGeom prst="rect">
-            <a:avLst/>
-          </a:prstGeom>
-          <a:solidFill>
-            <a:srgbClr val="095292"/>
-          </a:solidFill>
-          <a:ln>
-            <a:noFill/>
-          </a:ln>
-        </p:spPr>
-        <p:style>
-          <a:lnRef idx="1">
-            <a:schemeClr val="accent1"/>
-          </a:lnRef>
-          <a:fillRef idx="3">
-            <a:schemeClr val="accent1"/>
-          </a:fillRef>
-          <a:effectRef idx="2">
-            <a:schemeClr val="accent1"/>
-          </a:effectRef>
-          <a:fontRef idx="minor">
-            <a:schemeClr val="lt1"/>
-          </a:fontRef>
-        </p:style>
-        <p:txBody>
-          <a:bodyPr rtlCol="0" anchor="ctr"/>
-          <a:lstStyle/>
-          <a:p>
-            <a:pPr algn="ctr"/>
-          </a:p>
-        </p:txBody>
-      </p:sp>
-      <p:sp>
-        <p:nvSpPr>
-          <p:cNvPr id="8" name="Rectangle 7"/>
-          <p:cNvSpPr/>
-          <p:nvPr/>
-        </p:nvSpPr>
-        <p:spPr>
-          <a:xfrm>
-            <a:off x="457200" y="1655064"/>
-            <a:ext cx="3624986" cy="27432"/>
-          </a:xfrm>
-          <a:prstGeom prst="rect">
-            <a:avLst/>
-          </a:prstGeom>
-          <a:solidFill>
-            <a:srgbClr val="FFD000"/>
-          </a:solidFill>
-          <a:ln>
-            <a:noFill/>
-          </a:ln>
-        </p:spPr>
-        <p:style>
-          <a:lnRef idx="1">
-            <a:schemeClr val="accent1"/>
-          </a:lnRef>
-          <a:fillRef idx="3">
-            <a:schemeClr val="accent1"/>
-          </a:fillRef>
-          <a:effectRef idx="2">
-            <a:schemeClr val="accent1"/>
-          </a:effectRef>
-          <a:fontRef idx="minor">
-            <a:schemeClr val="lt1"/>
-          </a:fontRef>
-        </p:style>
-        <p:txBody>
-          <a:bodyPr rtlCol="0" anchor="ctr"/>
-          <a:lstStyle/>
-          <a:p>
-            <a:pPr algn="ctr"/>
-          </a:p>
-        </p:txBody>
-      </p:sp>
-      <p:pic>
-        <p:nvPicPr>
-          <p:cNvPr id="9" name="Picture 8" descr="github_actions.png"/>
-          <p:cNvPicPr>
-            <a:picLocks noChangeAspect="1"/>
-          </p:cNvPicPr>
-          <p:nvPr/>
-        </p:nvPicPr>
-        <p:blipFill>
-          <a:blip r:embed="rId2"/>
-          <a:stretch>
-            <a:fillRect/>
-          </a:stretch>
-        </p:blipFill>
-        <p:spPr>
-          <a:xfrm>
-            <a:off x="1643329" y="1847087"/>
-            <a:ext cx="1252728" cy="1252728"/>
-          </a:xfrm>
-          <a:prstGeom prst="rect">
-            <a:avLst/>
-          </a:prstGeom>
-        </p:spPr>
-      </p:pic>
-      <p:sp>
-        <p:nvSpPr>
-          <p:cNvPr id="10" name="TextBox 9"/>
-          <p:cNvSpPr txBox="1"/>
-          <p:nvPr/>
-        </p:nvSpPr>
-        <p:spPr>
-          <a:xfrm>
-            <a:off x="530352" y="3191256"/>
-            <a:ext cx="3478682" cy="621792"/>
-          </a:xfrm>
-          <a:prstGeom prst="rect">
-            <a:avLst/>
-          </a:prstGeom>
-          <a:noFill/>
-        </p:spPr>
-        <p:txBody>
-          <a:bodyPr wrap="square" anchor="t"/>
-          <a:lstStyle/>
-          <a:p>
-            <a:pPr algn="ctr"/>
-            <a:r>
-              <a:rPr sz="1300" b="1" i="0">
-                <a:solidFill>
-                  <a:srgbClr val="095292"/>
-                </a:solidFill>
-                <a:latin typeface="Calibri"/>
-              </a:rPr>
-              <a:t>GitHub Actions</a:t>
-            </a:r>
-          </a:p>
-          <a:p>
-            <a:pPr algn="ctr">
-              <a:spcBef>
-                <a:spcPts val="200"/>
-              </a:spcBef>
+            <a:pPr>
+              <a:spcAft>
+                <a:spcPts val="800"/>
+              </a:spcAft>
             </a:pPr>
             <a:r>
-              <a:rPr sz="1000" b="0" i="0">
-                <a:solidFill>
-                  <a:srgbClr val="666666"/>
-                </a:solidFill>
-                <a:latin typeface="Calibri"/>
-              </a:rPr>
-              <a:t>CI del PI</a:t>
-            </a:r>
-          </a:p>
-        </p:txBody>
-      </p:sp>
-      <p:sp>
-        <p:nvSpPr>
-          <p:cNvPr id="11" name="Rounded Rectangle 10"/>
-          <p:cNvSpPr/>
-          <p:nvPr/>
-        </p:nvSpPr>
-        <p:spPr>
-          <a:xfrm>
-            <a:off x="4283354" y="1591056"/>
-            <a:ext cx="3624986" cy="2331720"/>
-          </a:xfrm>
-          <a:prstGeom prst="roundRect">
-            <a:avLst>
-              <a:gd name="adj" fmla="val 12000"/>
-            </a:avLst>
-          </a:prstGeom>
-          <a:solidFill>
-            <a:srgbClr val="F2F2F2"/>
-          </a:solidFill>
-          <a:ln>
-            <a:noFill/>
-          </a:ln>
-        </p:spPr>
-        <p:style>
-          <a:lnRef idx="1">
-            <a:schemeClr val="accent1"/>
-          </a:lnRef>
-          <a:fillRef idx="3">
-            <a:schemeClr val="accent1"/>
-          </a:fillRef>
-          <a:effectRef idx="2">
-            <a:schemeClr val="accent1"/>
-          </a:effectRef>
-          <a:fontRef idx="minor">
-            <a:schemeClr val="lt1"/>
-          </a:fontRef>
-        </p:style>
-        <p:txBody>
-          <a:bodyPr rtlCol="0" anchor="ctr"/>
-          <a:lstStyle/>
-          <a:p>
-            <a:pPr algn="ctr"/>
-          </a:p>
-        </p:txBody>
-      </p:sp>
-      <p:sp>
-        <p:nvSpPr>
-          <p:cNvPr id="12" name="Rectangle 11"/>
-          <p:cNvSpPr/>
-          <p:nvPr/>
-        </p:nvSpPr>
-        <p:spPr>
-          <a:xfrm>
-            <a:off x="4283354" y="1591056"/>
-            <a:ext cx="3624986" cy="64008"/>
-          </a:xfrm>
-          <a:prstGeom prst="rect">
-            <a:avLst/>
-          </a:prstGeom>
-          <a:solidFill>
-            <a:srgbClr val="095292"/>
-          </a:solidFill>
-          <a:ln>
-            <a:noFill/>
-          </a:ln>
-        </p:spPr>
-        <p:style>
-          <a:lnRef idx="1">
-            <a:schemeClr val="accent1"/>
-          </a:lnRef>
-          <a:fillRef idx="3">
-            <a:schemeClr val="accent1"/>
-          </a:fillRef>
-          <a:effectRef idx="2">
-            <a:schemeClr val="accent1"/>
-          </a:effectRef>
-          <a:fontRef idx="minor">
-            <a:schemeClr val="lt1"/>
-          </a:fontRef>
-        </p:style>
-        <p:txBody>
-          <a:bodyPr rtlCol="0" anchor="ctr"/>
-          <a:lstStyle/>
-          <a:p>
-            <a:pPr algn="ctr"/>
-          </a:p>
-        </p:txBody>
-      </p:sp>
-      <p:sp>
-        <p:nvSpPr>
-          <p:cNvPr id="13" name="Rectangle 12"/>
-          <p:cNvSpPr/>
-          <p:nvPr/>
-        </p:nvSpPr>
-        <p:spPr>
-          <a:xfrm>
-            <a:off x="4283354" y="1655064"/>
-            <a:ext cx="3624986" cy="27432"/>
-          </a:xfrm>
-          <a:prstGeom prst="rect">
-            <a:avLst/>
-          </a:prstGeom>
-          <a:solidFill>
-            <a:srgbClr val="FFD000"/>
-          </a:solidFill>
-          <a:ln>
-            <a:noFill/>
-          </a:ln>
-        </p:spPr>
-        <p:style>
-          <a:lnRef idx="1">
-            <a:schemeClr val="accent1"/>
-          </a:lnRef>
-          <a:fillRef idx="3">
-            <a:schemeClr val="accent1"/>
-          </a:fillRef>
-          <a:effectRef idx="2">
-            <a:schemeClr val="accent1"/>
-          </a:effectRef>
-          <a:fontRef idx="minor">
-            <a:schemeClr val="lt1"/>
-          </a:fontRef>
-        </p:style>
-        <p:txBody>
-          <a:bodyPr rtlCol="0" anchor="ctr"/>
-          <a:lstStyle/>
-          <a:p>
-            <a:pPr algn="ctr"/>
-          </a:p>
-        </p:txBody>
-      </p:sp>
-      <p:pic>
-        <p:nvPicPr>
-          <p:cNvPr id="14" name="Picture 13" descr="google_docs.png"/>
-          <p:cNvPicPr>
-            <a:picLocks noChangeAspect="1"/>
-          </p:cNvPicPr>
-          <p:nvPr/>
-        </p:nvPicPr>
-        <p:blipFill>
-          <a:blip r:embed="rId3"/>
-          <a:stretch>
-            <a:fillRect/>
-          </a:stretch>
-        </p:blipFill>
-        <p:spPr>
-          <a:xfrm>
-            <a:off x="5469483" y="1847087"/>
-            <a:ext cx="1252728" cy="1252728"/>
-          </a:xfrm>
-          <a:prstGeom prst="rect">
-            <a:avLst/>
-          </a:prstGeom>
-        </p:spPr>
-      </p:pic>
-      <p:sp>
-        <p:nvSpPr>
-          <p:cNvPr id="15" name="TextBox 14"/>
-          <p:cNvSpPr txBox="1"/>
-          <p:nvPr/>
-        </p:nvSpPr>
-        <p:spPr>
-          <a:xfrm>
-            <a:off x="4356506" y="3191256"/>
-            <a:ext cx="3478682" cy="621792"/>
-          </a:xfrm>
-          <a:prstGeom prst="rect">
-            <a:avLst/>
-          </a:prstGeom>
-          <a:noFill/>
-        </p:spPr>
-        <p:txBody>
-          <a:bodyPr wrap="square" anchor="t"/>
-          <a:lstStyle/>
-          <a:p>
-            <a:pPr algn="ctr"/>
-            <a:r>
-              <a:rPr sz="1300" b="1" i="0">
-                <a:solidFill>
-                  <a:srgbClr val="095292"/>
-                </a:solidFill>
-                <a:latin typeface="Calibri"/>
-              </a:rPr>
-              <a:t>Google Docs</a:t>
-            </a:r>
-          </a:p>
-          <a:p>
-            <a:pPr algn="ctr">
-              <a:spcBef>
-                <a:spcPts val="200"/>
-              </a:spcBef>
+              <a:rPr sz="2000" b="0" i="0">
+                <a:solidFill>
+                  <a:srgbClr val="333333"/>
+                </a:solidFill>
+                <a:latin typeface="Calibri"/>
+              </a:rPr>
+              <a:t>–   </a:t>
+            </a:r>
+            <a:r>
+              <a:rPr sz="2000" b="1" i="0">
+                <a:solidFill>
+                  <a:srgbClr val="333333"/>
+                </a:solidFill>
+                <a:latin typeface="Calibri"/>
+              </a:rPr>
+              <a:t>Entregable:</a:t>
+            </a:r>
+            <a:r>
+              <a:rPr sz="2000" b="0" i="0">
+                <a:solidFill>
+                  <a:srgbClr val="333333"/>
+                </a:solidFill>
+                <a:latin typeface="Calibri"/>
+              </a:rPr>
+              <a:t> .github/workflows/ci.yml + sección Monitoreo/CI del informe</a:t>
+            </a:r>
+          </a:p>
+          <a:p>
+            <a:pPr>
+              <a:spcAft>
+                <a:spcPts val="800"/>
+              </a:spcAft>
             </a:pPr>
             <a:r>
-              <a:rPr sz="1000" b="0" i="0">
-                <a:solidFill>
-                  <a:srgbClr val="666666"/>
-                </a:solidFill>
-                <a:latin typeface="Calibri"/>
-              </a:rPr>
-              <a:t>Informe PI</a:t>
-            </a:r>
-          </a:p>
-        </p:txBody>
-      </p:sp>
-      <p:sp>
-        <p:nvSpPr>
-          <p:cNvPr id="16" name="Rounded Rectangle 15"/>
-          <p:cNvSpPr/>
-          <p:nvPr/>
-        </p:nvSpPr>
-        <p:spPr>
-          <a:xfrm>
-            <a:off x="8109508" y="1591056"/>
-            <a:ext cx="3624986" cy="2331720"/>
-          </a:xfrm>
-          <a:prstGeom prst="roundRect">
-            <a:avLst>
-              <a:gd name="adj" fmla="val 12000"/>
-            </a:avLst>
-          </a:prstGeom>
-          <a:solidFill>
-            <a:srgbClr val="F2F2F2"/>
-          </a:solidFill>
-          <a:ln>
-            <a:noFill/>
-          </a:ln>
-        </p:spPr>
-        <p:style>
-          <a:lnRef idx="1">
-            <a:schemeClr val="accent1"/>
-          </a:lnRef>
-          <a:fillRef idx="3">
-            <a:schemeClr val="accent1"/>
-          </a:fillRef>
-          <a:effectRef idx="2">
-            <a:schemeClr val="accent1"/>
-          </a:effectRef>
-          <a:fontRef idx="minor">
-            <a:schemeClr val="lt1"/>
-          </a:fontRef>
-        </p:style>
-        <p:txBody>
-          <a:bodyPr rtlCol="0" anchor="ctr"/>
-          <a:lstStyle/>
-          <a:p>
-            <a:pPr algn="ctr"/>
-          </a:p>
-        </p:txBody>
-      </p:sp>
-      <p:sp>
-        <p:nvSpPr>
-          <p:cNvPr id="17" name="Rectangle 16"/>
-          <p:cNvSpPr/>
-          <p:nvPr/>
-        </p:nvSpPr>
-        <p:spPr>
-          <a:xfrm>
-            <a:off x="8109508" y="1591056"/>
-            <a:ext cx="3624986" cy="64008"/>
-          </a:xfrm>
-          <a:prstGeom prst="rect">
-            <a:avLst/>
-          </a:prstGeom>
-          <a:solidFill>
-            <a:srgbClr val="095292"/>
-          </a:solidFill>
-          <a:ln>
-            <a:noFill/>
-          </a:ln>
-        </p:spPr>
-        <p:style>
-          <a:lnRef idx="1">
-            <a:schemeClr val="accent1"/>
-          </a:lnRef>
-          <a:fillRef idx="3">
-            <a:schemeClr val="accent1"/>
-          </a:fillRef>
-          <a:effectRef idx="2">
-            <a:schemeClr val="accent1"/>
-          </a:effectRef>
-          <a:fontRef idx="minor">
-            <a:schemeClr val="lt1"/>
-          </a:fontRef>
-        </p:style>
-        <p:txBody>
-          <a:bodyPr rtlCol="0" anchor="ctr"/>
-          <a:lstStyle/>
-          <a:p>
-            <a:pPr algn="ctr"/>
-          </a:p>
-        </p:txBody>
-      </p:sp>
-      <p:sp>
-        <p:nvSpPr>
-          <p:cNvPr id="18" name="Rectangle 17"/>
-          <p:cNvSpPr/>
-          <p:nvPr/>
-        </p:nvSpPr>
-        <p:spPr>
-          <a:xfrm>
-            <a:off x="8109508" y="1655064"/>
-            <a:ext cx="3624986" cy="27432"/>
-          </a:xfrm>
-          <a:prstGeom prst="rect">
-            <a:avLst/>
-          </a:prstGeom>
-          <a:solidFill>
-            <a:srgbClr val="FFD000"/>
-          </a:solidFill>
-          <a:ln>
-            <a:noFill/>
-          </a:ln>
-        </p:spPr>
-        <p:style>
-          <a:lnRef idx="1">
-            <a:schemeClr val="accent1"/>
-          </a:lnRef>
-          <a:fillRef idx="3">
-            <a:schemeClr val="accent1"/>
-          </a:fillRef>
-          <a:effectRef idx="2">
-            <a:schemeClr val="accent1"/>
-          </a:effectRef>
-          <a:fontRef idx="minor">
-            <a:schemeClr val="lt1"/>
-          </a:fontRef>
-        </p:style>
-        <p:txBody>
-          <a:bodyPr rtlCol="0" anchor="ctr"/>
-          <a:lstStyle/>
-          <a:p>
-            <a:pPr algn="ctr"/>
-          </a:p>
-        </p:txBody>
-      </p:sp>
-      <p:pic>
-        <p:nvPicPr>
-          <p:cNvPr id="19" name="Picture 18" descr="examlab.png"/>
-          <p:cNvPicPr>
-            <a:picLocks noChangeAspect="1"/>
-          </p:cNvPicPr>
-          <p:nvPr/>
-        </p:nvPicPr>
-        <p:blipFill>
-          <a:blip r:embed="rId4"/>
-          <a:stretch>
-            <a:fillRect/>
-          </a:stretch>
-        </p:blipFill>
-        <p:spPr>
-          <a:xfrm>
-            <a:off x="9295638" y="1847087"/>
-            <a:ext cx="1252728" cy="1252728"/>
-          </a:xfrm>
-          <a:prstGeom prst="rect">
-            <a:avLst/>
-          </a:prstGeom>
-        </p:spPr>
-      </p:pic>
-      <p:sp>
-        <p:nvSpPr>
-          <p:cNvPr id="20" name="TextBox 19"/>
-          <p:cNvSpPr txBox="1"/>
-          <p:nvPr/>
-        </p:nvSpPr>
-        <p:spPr>
-          <a:xfrm>
-            <a:off x="8182660" y="3191256"/>
-            <a:ext cx="3478682" cy="621792"/>
-          </a:xfrm>
-          <a:prstGeom prst="rect">
-            <a:avLst/>
-          </a:prstGeom>
-          <a:noFill/>
-        </p:spPr>
-        <p:txBody>
-          <a:bodyPr wrap="square" anchor="t"/>
-          <a:lstStyle/>
-          <a:p>
-            <a:pPr algn="ctr"/>
-            <a:r>
-              <a:rPr sz="1300" b="1" i="0">
-                <a:solidFill>
-                  <a:srgbClr val="095292"/>
-                </a:solidFill>
-                <a:latin typeface="Calibri"/>
-              </a:rPr>
-              <a:t>la plataforma del curso</a:t>
-            </a:r>
-          </a:p>
-          <a:p>
-            <a:pPr algn="ctr">
-              <a:spcBef>
-                <a:spcPts val="200"/>
-              </a:spcBef>
+              <a:rPr sz="2000" b="0" i="0">
+                <a:solidFill>
+                  <a:srgbClr val="333333"/>
+                </a:solidFill>
+                <a:latin typeface="Calibri"/>
+              </a:rPr>
+              <a:t>–   Herramienta: </a:t>
+            </a:r>
+            <a:r>
+              <a:rPr sz="2000" b="1" i="0">
+                <a:solidFill>
+                  <a:srgbClr val="333333"/>
+                </a:solidFill>
+                <a:latin typeface="Calibri"/>
+              </a:rPr>
+              <a:t>GitHub Actions · Google Docs</a:t>
+            </a:r>
+          </a:p>
+          <a:p>
+            <a:pPr>
+              <a:spcAft>
+                <a:spcPts val="800"/>
+              </a:spcAft>
             </a:pPr>
             <a:r>
-              <a:rPr sz="1000" b="0" i="0">
-                <a:solidFill>
-                  <a:srgbClr val="666666"/>
-                </a:solidFill>
-                <a:latin typeface="Calibri"/>
-              </a:rPr>
-              <a:t>Donde se entrega</a:t>
-            </a:r>
-          </a:p>
-        </p:txBody>
-      </p:sp>
-      <p:sp>
-        <p:nvSpPr>
-          <p:cNvPr id="21" name="TextBox 20"/>
+              <a:rPr sz="2000" b="0" i="0">
+                <a:solidFill>
+                  <a:srgbClr val="333333"/>
+                </a:solidFill>
+                <a:latin typeface="Calibri"/>
+              </a:rPr>
+              <a:t>–   Todo lo que construyan hoy entra al </a:t>
+            </a:r>
+            <a:r>
+              <a:rPr sz="2000" b="1" i="0">
+                <a:solidFill>
+                  <a:srgbClr val="333333"/>
+                </a:solidFill>
+                <a:latin typeface="Calibri"/>
+              </a:rPr>
+              <a:t>informe/repo del PI</a:t>
+            </a:r>
+            <a:r>
+              <a:rPr sz="2000" b="0" i="0">
+                <a:solidFill>
+                  <a:srgbClr val="333333"/>
+                </a:solidFill>
+                <a:latin typeface="Calibri"/>
+              </a:rPr>
+              <a:t> (no es lab suelto).</a:t>
+            </a:r>
+          </a:p>
+          <a:p>
+            <a:pPr>
+              <a:spcAft>
+                <a:spcPts val="800"/>
+              </a:spcAft>
+            </a:pPr>
+            <a:r>
+              <a:rPr sz="2000" b="0" i="0">
+                <a:solidFill>
+                  <a:srgbClr val="333333"/>
+                </a:solidFill>
+                <a:latin typeface="Calibri"/>
+              </a:rPr>
+              <a:t>–   Individual por defecto · el docente puede autorizar equipos de 2–3; la entrega en la plataforma del curso siempre es individual.</a:t>
+            </a:r>
+          </a:p>
+        </p:txBody>
+      </p:sp>
+      <p:sp>
+        <p:nvSpPr>
+          <p:cNvPr id="6" name="TextBox 5"/>
           <p:cNvSpPr txBox="1"/>
           <p:nvPr/>
         </p:nvSpPr>
